--- a/courseware/facilitator-slides.pptx
+++ b/courseware/facilitator-slides.pptx
@@ -6640,7 +6640,7 @@
           <p:cNvPr id="2" name="Title 1">
             <a:extLst>
               <a:ext uri="{FF2B5EF4-FFF2-40B4-BE49-F238E27FC236}">
-                <a16:creationId xmlns:a16="http://schemas.microsoft.com/office/drawing/2014/main" id="{6391BDCB-B82E-8929-7B1E-4F1A1BE41B04}"/>
+                <a16:creationId xmlns:a16="http://schemas.microsoft.com/office/drawing/2014/main" id="{489C4941-4D0E-5C2B-5C04-A18FE6E4CC24}"/>
               </a:ext>
             </a:extLst>
           </p:cNvPr>
@@ -6658,7 +6658,7 @@
           <a:p>
             <a:r>
               <a:rPr lang="en-US"/>
-              <a:t>Day 1 Recap</a:t>
+              <a:t>Lab 4 — Scheduled Trigger Workflow</a:t>
             </a:r>
           </a:p>
         </p:txBody>
@@ -6668,15 +6668,15 @@
           <p:cNvPr id="3" name="Content Placeholder 2">
             <a:extLst>
               <a:ext uri="{FF2B5EF4-FFF2-40B4-BE49-F238E27FC236}">
-                <a16:creationId xmlns:a16="http://schemas.microsoft.com/office/drawing/2014/main" id="{DE420688-BC85-68E9-EFEB-D3CE8557D411}"/>
-              </a:ext>
-            </a:extLst>
-          </p:cNvPr>
-          <p:cNvSpPr>
-            <a:spLocks noGrp="1"/>
-          </p:cNvSpPr>
-          <p:nvPr>
-            <p:ph idx="1"/>
+                <a16:creationId xmlns:a16="http://schemas.microsoft.com/office/drawing/2014/main" id="{D967F280-F155-A084-A7DC-5A9A21D152B2}"/>
+              </a:ext>
+            </a:extLst>
+          </p:cNvPr>
+          <p:cNvSpPr>
+            <a:spLocks noGrp="1"/>
+          </p:cNvSpPr>
+          <p:nvPr>
+            <p:ph sz="half" idx="1"/>
           </p:nvPr>
         </p:nvSpPr>
         <p:spPr/>
@@ -6687,12 +6687,48 @@
           <a:lstStyle/>
           <a:p>
             <a:r>
-              <a:rPr lang="en-US" sz="1800"/>
-              <a:t>You learned what workflow automation is and why it matters
-Every flow = Trigger → Actions → Output
-Power Automate connects your apps with low-code flows
-You built five working flows: email, Excel logging, approval, scheduled and form
-Tomorrow: build AI business agents in Copilot Studio</a:t>
+              <a:rPr lang="en-US" sz="1600"/>
+              <a:t>GOAL
+Send a daily reminder / digest automatically
+YOU'LL USE
+Recurrence (schedule) trigger
+Send an email action
+Optional: List rows from Excel</a:t>
+            </a:r>
+          </a:p>
+        </p:txBody>
+      </p:sp>
+      <p:sp>
+        <p:nvSpPr>
+          <p:cNvPr id="4" name="Content Placeholder 3">
+            <a:extLst>
+              <a:ext uri="{FF2B5EF4-FFF2-40B4-BE49-F238E27FC236}">
+                <a16:creationId xmlns:a16="http://schemas.microsoft.com/office/drawing/2014/main" id="{073DA2BB-4E22-9731-A736-3DE77AD8FC1E}"/>
+              </a:ext>
+            </a:extLst>
+          </p:cNvPr>
+          <p:cNvSpPr>
+            <a:spLocks noGrp="1"/>
+          </p:cNvSpPr>
+          <p:nvPr>
+            <p:ph sz="half" idx="2"/>
+          </p:nvPr>
+        </p:nvSpPr>
+        <p:spPr/>
+        <p:txBody>
+          <a:bodyPr>
+            <a:normAutofit/>
+          </a:bodyPr>
+          <a:lstStyle/>
+          <a:p>
+            <a:r>
+              <a:rPr lang="en-US" sz="1600"/>
+              <a:t>STEPS
+1.  Trigger: Recurrence — weekdays 9 AM
+2.  Set the correct time zone
+3.  Action: send a reminder email
+4.  Optional: add a live count from Excel
+5.  Test now, then let it run on schedule</a:t>
             </a:r>
           </a:p>
         </p:txBody>
@@ -6700,7 +6736,7 @@
     </p:spTree>
     <p:extLst>
       <p:ext uri="{BB962C8B-B14F-4D97-AF65-F5344CB8AC3E}">
-        <p14:creationId xmlns:p14="http://schemas.microsoft.com/office/powerpoint/2010/main" val="1526476791"/>
+        <p14:creationId xmlns:p14="http://schemas.microsoft.com/office/powerpoint/2010/main" val="586675484"/>
       </p:ext>
     </p:extLst>
   </p:cSld>
@@ -6732,7 +6768,7 @@
           <p:cNvPr id="2" name="Title 1">
             <a:extLst>
               <a:ext uri="{FF2B5EF4-FFF2-40B4-BE49-F238E27FC236}">
-                <a16:creationId xmlns:a16="http://schemas.microsoft.com/office/drawing/2014/main" id="{07FCFDC1-8B82-A2EB-9EB2-396F7244D9E9}"/>
+                <a16:creationId xmlns:a16="http://schemas.microsoft.com/office/drawing/2014/main" id="{489C4941-4D0E-5C2B-5C04-A18FE6E4CC24}"/>
               </a:ext>
             </a:extLst>
           </p:cNvPr>
@@ -6750,25 +6786,25 @@
           <a:p>
             <a:r>
               <a:rPr lang="en-US"/>
-              <a:t>Day 2 — Building Business Agents with Copilot Studio</a:t>
-            </a:r>
-          </a:p>
-        </p:txBody>
-      </p:sp>
-      <p:sp>
-        <p:nvSpPr>
-          <p:cNvPr id="3" name="Text Placeholder 2">
-            <a:extLst>
-              <a:ext uri="{FF2B5EF4-FFF2-40B4-BE49-F238E27FC236}">
-                <a16:creationId xmlns:a16="http://schemas.microsoft.com/office/drawing/2014/main" id="{45CD9A7C-6FAC-8D23-F8A9-0FBBFA344045}"/>
-              </a:ext>
-            </a:extLst>
-          </p:cNvPr>
-          <p:cNvSpPr>
-            <a:spLocks noGrp="1"/>
-          </p:cNvSpPr>
-          <p:nvPr>
-            <p:ph type="body" idx="1"/>
+              <a:t>Lab 5 — Form Submission Workflow</a:t>
+            </a:r>
+          </a:p>
+        </p:txBody>
+      </p:sp>
+      <p:sp>
+        <p:nvSpPr>
+          <p:cNvPr id="3" name="Content Placeholder 2">
+            <a:extLst>
+              <a:ext uri="{FF2B5EF4-FFF2-40B4-BE49-F238E27FC236}">
+                <a16:creationId xmlns:a16="http://schemas.microsoft.com/office/drawing/2014/main" id="{D967F280-F155-A084-A7DC-5A9A21D152B2}"/>
+              </a:ext>
+            </a:extLst>
+          </p:cNvPr>
+          <p:cNvSpPr>
+            <a:spLocks noGrp="1"/>
+          </p:cNvSpPr>
+          <p:nvPr>
+            <p:ph sz="half" idx="1"/>
           </p:nvPr>
         </p:nvSpPr>
         <p:spPr/>
@@ -6779,12 +6815,48 @@
           <a:lstStyle/>
           <a:p>
             <a:r>
-              <a:rPr lang="en-US" sz="1800" b="1">
-                <a:solidFill>
-                  <a:srgbClr val="7C3AED"/>
-                </a:solidFill>
-              </a:rPr>
-              <a:t>Module 3  ·  Create AI agents and connect them to your flows</a:t>
+              <a:rPr lang="en-US" sz="1600"/>
+              <a:t>GOAL
+Capture form submissions to email and Excel
+YOU'LL USE
+Microsoft Forms trigger
+Get response details
+Send email + Add a row to Excel</a:t>
+            </a:r>
+          </a:p>
+        </p:txBody>
+      </p:sp>
+      <p:sp>
+        <p:nvSpPr>
+          <p:cNvPr id="4" name="Content Placeholder 3">
+            <a:extLst>
+              <a:ext uri="{FF2B5EF4-FFF2-40B4-BE49-F238E27FC236}">
+                <a16:creationId xmlns:a16="http://schemas.microsoft.com/office/drawing/2014/main" id="{073DA2BB-4E22-9731-A736-3DE77AD8FC1E}"/>
+              </a:ext>
+            </a:extLst>
+          </p:cNvPr>
+          <p:cNvSpPr>
+            <a:spLocks noGrp="1"/>
+          </p:cNvSpPr>
+          <p:nvPr>
+            <p:ph sz="half" idx="2"/>
+          </p:nvPr>
+        </p:nvSpPr>
+        <p:spPr/>
+        <p:txBody>
+          <a:bodyPr>
+            <a:normAutofit/>
+          </a:bodyPr>
+          <a:lstStyle/>
+          <a:p>
+            <a:r>
+              <a:rPr lang="en-US" sz="1600"/>
+              <a:t>STEPS
+1.  Build a Microsoft Form (shareable URL)
+2.  Trigger: when a response is submitted
+3.  Get response details
+4.  Email the team the new submission
+5.  Log the submission to an Excel table</a:t>
             </a:r>
           </a:p>
         </p:txBody>
@@ -6792,7 +6864,7 @@
     </p:spTree>
     <p:extLst>
       <p:ext uri="{BB962C8B-B14F-4D97-AF65-F5344CB8AC3E}">
-        <p14:creationId xmlns:p14="http://schemas.microsoft.com/office/powerpoint/2010/main" val="2026020724"/>
+        <p14:creationId xmlns:p14="http://schemas.microsoft.com/office/powerpoint/2010/main" val="586675484"/>
       </p:ext>
     </p:extLst>
   </p:cSld>
@@ -6824,7 +6896,7 @@
           <p:cNvPr id="2" name="Title 1">
             <a:extLst>
               <a:ext uri="{FF2B5EF4-FFF2-40B4-BE49-F238E27FC236}">
-                <a16:creationId xmlns:a16="http://schemas.microsoft.com/office/drawing/2014/main" id="{FEB6704F-8AD0-B4B9-F225-46BD56532E68}"/>
+                <a16:creationId xmlns:a16="http://schemas.microsoft.com/office/drawing/2014/main" id="{6391BDCB-B82E-8929-7B1E-4F1A1BE41B04}"/>
               </a:ext>
             </a:extLst>
           </p:cNvPr>
@@ -6842,7 +6914,7 @@
           <a:p>
             <a:r>
               <a:rPr lang="en-US"/>
-              <a:t>Day 2 Roadmap</a:t>
+              <a:t>Day 1 Recap</a:t>
             </a:r>
           </a:p>
         </p:txBody>
@@ -6852,7 +6924,7 @@
           <p:cNvPr id="3" name="Content Placeholder 2">
             <a:extLst>
               <a:ext uri="{FF2B5EF4-FFF2-40B4-BE49-F238E27FC236}">
-                <a16:creationId xmlns:a16="http://schemas.microsoft.com/office/drawing/2014/main" id="{9FCABE08-416B-F4B3-7431-E92AC5FC9F6D}"/>
+                <a16:creationId xmlns:a16="http://schemas.microsoft.com/office/drawing/2014/main" id="{DE420688-BC85-68E9-EFEB-D3CE8557D411}"/>
               </a:ext>
             </a:extLst>
           </p:cNvPr>
@@ -6872,11 +6944,11 @@
           <a:p>
             <a:r>
               <a:rPr lang="en-US" sz="1800"/>
-              <a:t>Recap: yesterday you automated tasks with Power Automate
-Today: add intelligence with AI agents in Copilot Studio
-Learn to design agents that produce clean, structured output
-Connect those agents to the flows you already know
-Build six hands-on labs: create, knowledge, tools, then three agents</a:t>
+              <a:t>You learned what workflow automation is and why it matters
+Every flow = Trigger → Actions → Output
+Power Automate connects your apps with low-code flows
+You built five working flows: email, Excel logging, approval, scheduled and form
+Tomorrow: build AI business agents in Copilot Studio</a:t>
             </a:r>
           </a:p>
         </p:txBody>
@@ -6884,7 +6956,7 @@
     </p:spTree>
     <p:extLst>
       <p:ext uri="{BB962C8B-B14F-4D97-AF65-F5344CB8AC3E}">
-        <p14:creationId xmlns:p14="http://schemas.microsoft.com/office/powerpoint/2010/main" val="3815795200"/>
+        <p14:creationId xmlns:p14="http://schemas.microsoft.com/office/powerpoint/2010/main" val="1526476791"/>
       </p:ext>
     </p:extLst>
   </p:cSld>
@@ -6916,7 +6988,7 @@
           <p:cNvPr id="2" name="Title 1">
             <a:extLst>
               <a:ext uri="{FF2B5EF4-FFF2-40B4-BE49-F238E27FC236}">
-                <a16:creationId xmlns:a16="http://schemas.microsoft.com/office/drawing/2014/main" id="{C9F1FFFC-3F9F-EF25-73C6-D53E4AD542B4}"/>
+                <a16:creationId xmlns:a16="http://schemas.microsoft.com/office/drawing/2014/main" id="{07FCFDC1-8B82-A2EB-9EB2-396F7244D9E9}"/>
               </a:ext>
             </a:extLst>
           </p:cNvPr>
@@ -6934,7 +7006,7 @@
           <a:p>
             <a:r>
               <a:rPr lang="en-US"/>
-              <a:t>Module 3 · Building Business Agents with Copilot Studio</a:t>
+              <a:t>Day 2 — Building Business Agents with Copilot Studio</a:t>
             </a:r>
           </a:p>
         </p:txBody>
@@ -6944,7 +7016,7 @@
           <p:cNvPr id="3" name="Text Placeholder 2">
             <a:extLst>
               <a:ext uri="{FF2B5EF4-FFF2-40B4-BE49-F238E27FC236}">
-                <a16:creationId xmlns:a16="http://schemas.microsoft.com/office/drawing/2014/main" id="{8FEE78CB-30D6-CCDF-F84A-0B996FBF7A10}"/>
+                <a16:creationId xmlns:a16="http://schemas.microsoft.com/office/drawing/2014/main" id="{45CD9A7C-6FAC-8D23-F8A9-0FBBFA344045}"/>
               </a:ext>
             </a:extLst>
           </p:cNvPr>
@@ -6968,7 +7040,7 @@
                   <a:srgbClr val="7C3AED"/>
                 </a:solidFill>
               </a:rPr>
-              <a:t>From a helpful chatbot to an agent that triggers real work</a:t>
+              <a:t>Module 3  ·  Create AI agents and connect them to your flows</a:t>
             </a:r>
           </a:p>
         </p:txBody>
@@ -6976,7 +7048,7 @@
     </p:spTree>
     <p:extLst>
       <p:ext uri="{BB962C8B-B14F-4D97-AF65-F5344CB8AC3E}">
-        <p14:creationId xmlns:p14="http://schemas.microsoft.com/office/powerpoint/2010/main" val="4082178276"/>
+        <p14:creationId xmlns:p14="http://schemas.microsoft.com/office/powerpoint/2010/main" val="2026020724"/>
       </p:ext>
     </p:extLst>
   </p:cSld>
@@ -7008,7 +7080,7 @@
           <p:cNvPr id="2" name="Title 1">
             <a:extLst>
               <a:ext uri="{FF2B5EF4-FFF2-40B4-BE49-F238E27FC236}">
-                <a16:creationId xmlns:a16="http://schemas.microsoft.com/office/drawing/2014/main" id="{106992FD-56F4-4632-E07C-B2E5B3689D6E}"/>
+                <a16:creationId xmlns:a16="http://schemas.microsoft.com/office/drawing/2014/main" id="{FEB6704F-8AD0-B4B9-F225-46BD56532E68}"/>
               </a:ext>
             </a:extLst>
           </p:cNvPr>
@@ -7026,7 +7098,7 @@
           <a:p>
             <a:r>
               <a:rPr lang="en-US"/>
-              <a:t>What Is Copilot Studio?</a:t>
+              <a:t>Day 2 Roadmap</a:t>
             </a:r>
           </a:p>
         </p:txBody>
@@ -7036,7 +7108,7 @@
           <p:cNvPr id="3" name="Content Placeholder 2">
             <a:extLst>
               <a:ext uri="{FF2B5EF4-FFF2-40B4-BE49-F238E27FC236}">
-                <a16:creationId xmlns:a16="http://schemas.microsoft.com/office/drawing/2014/main" id="{1CFFF989-1664-64BD-C695-2CAC2586BDDC}"/>
+                <a16:creationId xmlns:a16="http://schemas.microsoft.com/office/drawing/2014/main" id="{9FCABE08-416B-F4B3-7431-E92AC5FC9F6D}"/>
               </a:ext>
             </a:extLst>
           </p:cNvPr>
@@ -7056,11 +7128,11 @@
           <a:p>
             <a:r>
               <a:rPr lang="en-US" sz="1800"/>
-              <a:t>Microsoft's low-code tool for building custom AI agents
-Create conversational agents that understand natural language
-Ground them in your own knowledge — documents, sites, data
-Agents can call Power Automate flows to take action
-Publish to Teams, websites and other channels</a:t>
+              <a:t>Recap: yesterday you automated tasks with Power Automate
+Today: add intelligence with AI agents in Copilot Studio
+Learn to design agents that produce clean, structured output
+Connect those agents to the flows you already know
+Build six hands-on labs: create, knowledge, tools, then three agents</a:t>
             </a:r>
           </a:p>
         </p:txBody>
@@ -7068,7 +7140,7 @@
     </p:spTree>
     <p:extLst>
       <p:ext uri="{BB962C8B-B14F-4D97-AF65-F5344CB8AC3E}">
-        <p14:creationId xmlns:p14="http://schemas.microsoft.com/office/powerpoint/2010/main" val="2076235642"/>
+        <p14:creationId xmlns:p14="http://schemas.microsoft.com/office/powerpoint/2010/main" val="3815795200"/>
       </p:ext>
     </p:extLst>
   </p:cSld>
@@ -7192,7 +7264,7 @@
           <p:cNvPr id="2" name="Title 1">
             <a:extLst>
               <a:ext uri="{FF2B5EF4-FFF2-40B4-BE49-F238E27FC236}">
-                <a16:creationId xmlns:a16="http://schemas.microsoft.com/office/drawing/2014/main" id="{F2952BFD-21C0-388E-F8AC-F4B03470DDC4}"/>
+                <a16:creationId xmlns:a16="http://schemas.microsoft.com/office/drawing/2014/main" id="{C9F1FFFC-3F9F-EF25-73C6-D53E4AD542B4}"/>
               </a:ext>
             </a:extLst>
           </p:cNvPr>
@@ -7210,25 +7282,25 @@
           <a:p>
             <a:r>
               <a:rPr lang="en-US"/>
-              <a:t>The Copilot Studio Maker</a:t>
-            </a:r>
-          </a:p>
-        </p:txBody>
-      </p:sp>
-      <p:sp>
-        <p:nvSpPr>
-          <p:cNvPr id="3" name="Content Placeholder 2">
-            <a:extLst>
-              <a:ext uri="{FF2B5EF4-FFF2-40B4-BE49-F238E27FC236}">
-                <a16:creationId xmlns:a16="http://schemas.microsoft.com/office/drawing/2014/main" id="{89C7A1A4-1F57-2A5D-4EB6-6F3E00E8E5BB}"/>
-              </a:ext>
-            </a:extLst>
-          </p:cNvPr>
-          <p:cNvSpPr>
-            <a:spLocks noGrp="1"/>
-          </p:cNvSpPr>
-          <p:nvPr>
-            <p:ph idx="1"/>
+              <a:t>Module 3 · Building Business Agents with Copilot Studio</a:t>
+            </a:r>
+          </a:p>
+        </p:txBody>
+      </p:sp>
+      <p:sp>
+        <p:nvSpPr>
+          <p:cNvPr id="3" name="Text Placeholder 2">
+            <a:extLst>
+              <a:ext uri="{FF2B5EF4-FFF2-40B4-BE49-F238E27FC236}">
+                <a16:creationId xmlns:a16="http://schemas.microsoft.com/office/drawing/2014/main" id="{8FEE78CB-30D6-CCDF-F84A-0B996FBF7A10}"/>
+              </a:ext>
+            </a:extLst>
+          </p:cNvPr>
+          <p:cNvSpPr>
+            <a:spLocks noGrp="1"/>
+          </p:cNvSpPr>
+          <p:nvPr>
+            <p:ph type="body" idx="1"/>
           </p:nvPr>
         </p:nvSpPr>
         <p:spPr/>
@@ -7239,12 +7311,12 @@
           <a:lstStyle/>
           <a:p>
             <a:r>
-              <a:rPr lang="en-US" sz="1800"/>
-              <a:t>Build agents at copilotstudio.microsoft.com
-Describe your agent in plain language to get started
-Add knowledge sources, topics and actions
-Test live in the built-in chat panel as you build
-Publish when you're happy — update any time</a:t>
+              <a:rPr lang="en-US" sz="1800" b="1">
+                <a:solidFill>
+                  <a:srgbClr val="7C3AED"/>
+                </a:solidFill>
+              </a:rPr>
+              <a:t>From a helpful chatbot to an agent that triggers real work</a:t>
             </a:r>
           </a:p>
         </p:txBody>
@@ -7252,7 +7324,7 @@
     </p:spTree>
     <p:extLst>
       <p:ext uri="{BB962C8B-B14F-4D97-AF65-F5344CB8AC3E}">
-        <p14:creationId xmlns:p14="http://schemas.microsoft.com/office/powerpoint/2010/main" val="704177008"/>
+        <p14:creationId xmlns:p14="http://schemas.microsoft.com/office/powerpoint/2010/main" val="4082178276"/>
       </p:ext>
     </p:extLst>
   </p:cSld>
@@ -7284,7 +7356,7 @@
           <p:cNvPr id="2" name="Title 1">
             <a:extLst>
               <a:ext uri="{FF2B5EF4-FFF2-40B4-BE49-F238E27FC236}">
-                <a16:creationId xmlns:a16="http://schemas.microsoft.com/office/drawing/2014/main" id="{1AE3FB51-CEE1-B26C-4A7A-5AA8076775A6}"/>
+                <a16:creationId xmlns:a16="http://schemas.microsoft.com/office/drawing/2014/main" id="{106992FD-56F4-4632-E07C-B2E5B3689D6E}"/>
               </a:ext>
             </a:extLst>
           </p:cNvPr>
@@ -7302,7 +7374,7 @@
           <a:p>
             <a:r>
               <a:rPr lang="en-US"/>
-              <a:t>How an Agent Works</a:t>
+              <a:t>What Is Copilot Studio?</a:t>
             </a:r>
           </a:p>
         </p:txBody>
@@ -7312,7 +7384,7 @@
           <p:cNvPr id="3" name="Content Placeholder 2">
             <a:extLst>
               <a:ext uri="{FF2B5EF4-FFF2-40B4-BE49-F238E27FC236}">
-                <a16:creationId xmlns:a16="http://schemas.microsoft.com/office/drawing/2014/main" id="{5211CD51-034A-0050-CEF4-C70825EAC938}"/>
+                <a16:creationId xmlns:a16="http://schemas.microsoft.com/office/drawing/2014/main" id="{1CFFF989-1664-64BD-C695-2CAC2586BDDC}"/>
               </a:ext>
             </a:extLst>
           </p:cNvPr>
@@ -7332,11 +7404,11 @@
           <a:p>
             <a:r>
               <a:rPr lang="en-US" sz="1800"/>
-              <a:t>Instructions tell the agent its role and how to behave
-Knowledge gives it the information to answer from
-Topics and prompts shape specific conversations
-Actions let it do things — including running your flows
-It interprets the user, responds, and can hand off to automation</a:t>
+              <a:t>Microsoft's low-code tool for building custom AI agents
+Create conversational agents that understand natural language
+Ground them in your own knowledge — documents, sites, data
+Agents can call Power Automate flows to take action
+Publish to Teams, websites and other channels</a:t>
             </a:r>
           </a:p>
         </p:txBody>
@@ -7344,7 +7416,7 @@
     </p:spTree>
     <p:extLst>
       <p:ext uri="{BB962C8B-B14F-4D97-AF65-F5344CB8AC3E}">
-        <p14:creationId xmlns:p14="http://schemas.microsoft.com/office/powerpoint/2010/main" val="4071870543"/>
+        <p14:creationId xmlns:p14="http://schemas.microsoft.com/office/powerpoint/2010/main" val="2076235642"/>
       </p:ext>
     </p:extLst>
   </p:cSld>
@@ -7376,7 +7448,7 @@
           <p:cNvPr id="2" name="Title 1">
             <a:extLst>
               <a:ext uri="{FF2B5EF4-FFF2-40B4-BE49-F238E27FC236}">
-                <a16:creationId xmlns:a16="http://schemas.microsoft.com/office/drawing/2014/main" id="{754FB79F-EE74-DA8D-C6DC-3356C375A141}"/>
+                <a16:creationId xmlns:a16="http://schemas.microsoft.com/office/drawing/2014/main" id="{F2952BFD-21C0-388E-F8AC-F4B03470DDC4}"/>
               </a:ext>
             </a:extLst>
           </p:cNvPr>
@@ -7394,7 +7466,7 @@
           <a:p>
             <a:r>
               <a:rPr lang="en-US"/>
-              <a:t>What Makes a Good Business Agent</a:t>
+              <a:t>The Copilot Studio Maker</a:t>
             </a:r>
           </a:p>
         </p:txBody>
@@ -7404,7 +7476,7 @@
           <p:cNvPr id="3" name="Content Placeholder 2">
             <a:extLst>
               <a:ext uri="{FF2B5EF4-FFF2-40B4-BE49-F238E27FC236}">
-                <a16:creationId xmlns:a16="http://schemas.microsoft.com/office/drawing/2014/main" id="{3E5DC6E2-59CF-0CB9-5E4D-D12A83E0071A}"/>
+                <a16:creationId xmlns:a16="http://schemas.microsoft.com/office/drawing/2014/main" id="{89C7A1A4-1F57-2A5D-4EB6-6F3E00E8E5BB}"/>
               </a:ext>
             </a:extLst>
           </p:cNvPr>
@@ -7424,11 +7496,11 @@
           <a:p>
             <a:r>
               <a:rPr lang="en-US" sz="1800"/>
-              <a:t>A clear, narrow job — it does one thing well
-A defined audience and tone of voice
-Reliable, structured output the next step can use
-Grounded in trustworthy knowledge — no guessing
-Knows when to act: hand off to a flow at the right moment</a:t>
+              <a:t>Build agents at copilotstudio.microsoft.com
+Describe your agent in plain language to get started
+Add knowledge sources, topics and actions
+Test live in the built-in chat panel as you build
+Publish when you're happy — update any time</a:t>
             </a:r>
           </a:p>
         </p:txBody>
@@ -7436,7 +7508,7 @@
     </p:spTree>
     <p:extLst>
       <p:ext uri="{BB962C8B-B14F-4D97-AF65-F5344CB8AC3E}">
-        <p14:creationId xmlns:p14="http://schemas.microsoft.com/office/powerpoint/2010/main" val="759935770"/>
+        <p14:creationId xmlns:p14="http://schemas.microsoft.com/office/powerpoint/2010/main" val="704177008"/>
       </p:ext>
     </p:extLst>
   </p:cSld>
@@ -7468,7 +7540,7 @@
           <p:cNvPr id="2" name="Title 1">
             <a:extLst>
               <a:ext uri="{FF2B5EF4-FFF2-40B4-BE49-F238E27FC236}">
-                <a16:creationId xmlns:a16="http://schemas.microsoft.com/office/drawing/2014/main" id="{6A61CFB4-BFEB-85F9-D843-6DCB08E77699}"/>
+                <a16:creationId xmlns:a16="http://schemas.microsoft.com/office/drawing/2014/main" id="{1AE3FB51-CEE1-B26C-4A7A-5AA8076775A6}"/>
               </a:ext>
             </a:extLst>
           </p:cNvPr>
@@ -7486,7 +7558,7 @@
           <a:p>
             <a:r>
               <a:rPr lang="en-US"/>
-              <a:t>Creating Practical Business Agents</a:t>
+              <a:t>How an Agent Works</a:t>
             </a:r>
           </a:p>
         </p:txBody>
@@ -7496,7 +7568,7 @@
           <p:cNvPr id="3" name="Content Placeholder 2">
             <a:extLst>
               <a:ext uri="{FF2B5EF4-FFF2-40B4-BE49-F238E27FC236}">
-                <a16:creationId xmlns:a16="http://schemas.microsoft.com/office/drawing/2014/main" id="{CA3C0C69-1FCB-07E7-DFFA-DDB3929526C8}"/>
+                <a16:creationId xmlns:a16="http://schemas.microsoft.com/office/drawing/2014/main" id="{5211CD51-034A-0050-CEF4-C70825EAC938}"/>
               </a:ext>
             </a:extLst>
           </p:cNvPr>
@@ -7516,11 +7588,11 @@
           <a:p>
             <a:r>
               <a:rPr lang="en-US" sz="1800"/>
-              <a:t>Start from a real task: ‘handle sales enquiries’, ‘log procurement requests’
-Write clear instructions: role, scope, what to collect, what to avoid
-Add knowledge: product info, policies, price lists, FAQs
-Decide the output: what should the agent hand back?
-Test with realistic questions before connecting any automation</a:t>
+              <a:t>Instructions tell the agent its role and how to behave
+Knowledge gives it the information to answer from
+Topics handle specific conversations — the agent chooses one from its description
+Actions let it do things — including running your flows
+It interprets the user, responds, and can hand off to automation</a:t>
             </a:r>
           </a:p>
         </p:txBody>
@@ -7528,7 +7600,7 @@
     </p:spTree>
     <p:extLst>
       <p:ext uri="{BB962C8B-B14F-4D97-AF65-F5344CB8AC3E}">
-        <p14:creationId xmlns:p14="http://schemas.microsoft.com/office/powerpoint/2010/main" val="1751461905"/>
+        <p14:creationId xmlns:p14="http://schemas.microsoft.com/office/powerpoint/2010/main" val="4071870543"/>
       </p:ext>
     </p:extLst>
   </p:cSld>
@@ -7560,7 +7632,7 @@
           <p:cNvPr id="2" name="Title 1">
             <a:extLst>
               <a:ext uri="{FF2B5EF4-FFF2-40B4-BE49-F238E27FC236}">
-                <a16:creationId xmlns:a16="http://schemas.microsoft.com/office/drawing/2014/main" id="{FB094133-EB8D-D48C-E00C-FBB587521BAB}"/>
+                <a16:creationId xmlns:a16="http://schemas.microsoft.com/office/drawing/2014/main" id="{754FB79F-EE74-DA8D-C6DC-3356C375A141}"/>
               </a:ext>
             </a:extLst>
           </p:cNvPr>
@@ -7578,7 +7650,7 @@
           <a:p>
             <a:r>
               <a:rPr lang="en-US"/>
-              <a:t>Prompt Design Fundamentals</a:t>
+              <a:t>What Makes a Good Business Agent</a:t>
             </a:r>
           </a:p>
         </p:txBody>
@@ -7588,7 +7660,7 @@
           <p:cNvPr id="3" name="Content Placeholder 2">
             <a:extLst>
               <a:ext uri="{FF2B5EF4-FFF2-40B4-BE49-F238E27FC236}">
-                <a16:creationId xmlns:a16="http://schemas.microsoft.com/office/drawing/2014/main" id="{B91B447A-5DB7-731C-D493-1748FC1CFB8A}"/>
+                <a16:creationId xmlns:a16="http://schemas.microsoft.com/office/drawing/2014/main" id="{3E5DC6E2-59CF-0CB9-5E4D-D12A83E0071A}"/>
               </a:ext>
             </a:extLst>
           </p:cNvPr>
@@ -7608,11 +7680,11 @@
           <a:p>
             <a:r>
               <a:rPr lang="en-US" sz="1800"/>
-              <a:t>The prompt is the instruction that shapes the agent's response
-Be specific: state the role, the task and the format you want
-Give examples of good answers — the agent learns the pattern
-Set boundaries: what to do when information is missing
-Iterate: test, refine the wording, test again</a:t>
+              <a:t>A clear, narrow job — it does one thing well
+A defined audience and tone of voice
+Reliable, structured output the next step can use
+Grounded in trustworthy knowledge — no guessing
+Knows when to act: hand off to a flow at the right moment</a:t>
             </a:r>
           </a:p>
         </p:txBody>
@@ -7620,7 +7692,7 @@
     </p:spTree>
     <p:extLst>
       <p:ext uri="{BB962C8B-B14F-4D97-AF65-F5344CB8AC3E}">
-        <p14:creationId xmlns:p14="http://schemas.microsoft.com/office/powerpoint/2010/main" val="2361496135"/>
+        <p14:creationId xmlns:p14="http://schemas.microsoft.com/office/powerpoint/2010/main" val="759935770"/>
       </p:ext>
     </p:extLst>
   </p:cSld>
@@ -7652,7 +7724,7 @@
           <p:cNvPr id="2" name="Title 1">
             <a:extLst>
               <a:ext uri="{FF2B5EF4-FFF2-40B4-BE49-F238E27FC236}">
-                <a16:creationId xmlns:a16="http://schemas.microsoft.com/office/drawing/2014/main" id="{ECD51738-FC22-06D4-AA9C-1284BA381035}"/>
+                <a16:creationId xmlns:a16="http://schemas.microsoft.com/office/drawing/2014/main" id="{6A61CFB4-BFEB-85F9-D843-6DCB08E77699}"/>
               </a:ext>
             </a:extLst>
           </p:cNvPr>
@@ -7670,7 +7742,7 @@
           <a:p>
             <a:r>
               <a:rPr lang="en-US"/>
-              <a:t>Prompt Design for Structured Outputs</a:t>
+              <a:t>Creating Practical Business Agents</a:t>
             </a:r>
           </a:p>
         </p:txBody>
@@ -7680,7 +7752,7 @@
           <p:cNvPr id="3" name="Content Placeholder 2">
             <a:extLst>
               <a:ext uri="{FF2B5EF4-FFF2-40B4-BE49-F238E27FC236}">
-                <a16:creationId xmlns:a16="http://schemas.microsoft.com/office/drawing/2014/main" id="{EFA17231-1535-FA3E-1E29-8F01D614AAAC}"/>
+                <a16:creationId xmlns:a16="http://schemas.microsoft.com/office/drawing/2014/main" id="{CA3C0C69-1FCB-07E7-DFFA-DDB3929526C8}"/>
               </a:ext>
             </a:extLst>
           </p:cNvPr>
@@ -7700,11 +7772,11 @@
           <a:p>
             <a:r>
               <a:rPr lang="en-US" sz="1800"/>
-              <a:t>A workflow needs predictable fields, not free-flowing prose
-Ask the agent to return the same fields every time
-Name each field clearly: Customer, Product, Quantity, Priority
-Specify the format — a labelled list, a table, or JSON
-Structured output = data your Power Automate flow can read directly</a:t>
+              <a:t>Start from a real task: ‘handle sales enquiries’, ‘log procurement requests’
+Write clear instructions: role, scope, what to collect, what to avoid
+Add knowledge: product info, policies, price lists, FAQs
+Decide the output: what should the agent hand back?
+Test with realistic questions before connecting any automation</a:t>
             </a:r>
           </a:p>
         </p:txBody>
@@ -7712,7 +7784,7 @@
     </p:spTree>
     <p:extLst>
       <p:ext uri="{BB962C8B-B14F-4D97-AF65-F5344CB8AC3E}">
-        <p14:creationId xmlns:p14="http://schemas.microsoft.com/office/powerpoint/2010/main" val="1029975955"/>
+        <p14:creationId xmlns:p14="http://schemas.microsoft.com/office/powerpoint/2010/main" val="1751461905"/>
       </p:ext>
     </p:extLst>
   </p:cSld>
@@ -7744,7 +7816,7 @@
           <p:cNvPr id="2" name="Title 1">
             <a:extLst>
               <a:ext uri="{FF2B5EF4-FFF2-40B4-BE49-F238E27FC236}">
-                <a16:creationId xmlns:a16="http://schemas.microsoft.com/office/drawing/2014/main" id="{50FB60E9-163C-C95A-7BFB-155EB57D2AAA}"/>
+                <a16:creationId xmlns:a16="http://schemas.microsoft.com/office/drawing/2014/main" id="{FB094133-EB8D-D48C-E00C-FBB587521BAB}"/>
               </a:ext>
             </a:extLst>
           </p:cNvPr>
@@ -7762,7 +7834,7 @@
           <a:p>
             <a:r>
               <a:rPr lang="en-US"/>
-              <a:t>Structured Output Formats</a:t>
+              <a:t>Prompt Design Fundamentals</a:t>
             </a:r>
           </a:p>
         </p:txBody>
@@ -7772,15 +7844,15 @@
           <p:cNvPr id="3" name="Content Placeholder 2">
             <a:extLst>
               <a:ext uri="{FF2B5EF4-FFF2-40B4-BE49-F238E27FC236}">
-                <a16:creationId xmlns:a16="http://schemas.microsoft.com/office/drawing/2014/main" id="{6C9A2798-F21E-5AE9-F7E6-1A3A56553342}"/>
-              </a:ext>
-            </a:extLst>
-          </p:cNvPr>
-          <p:cNvSpPr>
-            <a:spLocks noGrp="1"/>
-          </p:cNvSpPr>
-          <p:nvPr>
-            <p:ph sz="half" idx="1"/>
+                <a16:creationId xmlns:a16="http://schemas.microsoft.com/office/drawing/2014/main" id="{B91B447A-5DB7-731C-D493-1748FC1CFB8A}"/>
+              </a:ext>
+            </a:extLst>
+          </p:cNvPr>
+          <p:cNvSpPr>
+            <a:spLocks noGrp="1"/>
+          </p:cNvSpPr>
+          <p:nvPr>
+            <p:ph idx="1"/>
           </p:nvPr>
         </p:nvSpPr>
         <p:spPr/>
@@ -7791,49 +7863,12 @@
           <a:lstStyle/>
           <a:p>
             <a:r>
-              <a:rPr lang="en-US" sz="1600"/>
-              <a:t>LABELLED FIELDS
-Customer: Acme Ltd
-Product: Widget Pro
-Quantity: 50
-Priority: High
-Easy to read, easy to map</a:t>
-            </a:r>
-          </a:p>
-        </p:txBody>
-      </p:sp>
-      <p:sp>
-        <p:nvSpPr>
-          <p:cNvPr id="4" name="Content Placeholder 3">
-            <a:extLst>
-              <a:ext uri="{FF2B5EF4-FFF2-40B4-BE49-F238E27FC236}">
-                <a16:creationId xmlns:a16="http://schemas.microsoft.com/office/drawing/2014/main" id="{2B3450F7-D16C-C4A8-CD66-BD6E44BF1072}"/>
-              </a:ext>
-            </a:extLst>
-          </p:cNvPr>
-          <p:cNvSpPr>
-            <a:spLocks noGrp="1"/>
-          </p:cNvSpPr>
-          <p:nvPr>
-            <p:ph sz="half" idx="2"/>
-          </p:nvPr>
-        </p:nvSpPr>
-        <p:spPr/>
-        <p:txBody>
-          <a:bodyPr>
-            <a:normAutofit/>
-          </a:bodyPr>
-          <a:lstStyle/>
-          <a:p>
-            <a:r>
-              <a:rPr lang="en-US" sz="1600"/>
-              <a:t>JSON
-{
-  “customer”: “Acme Ltd”,
-  “product”: “Widget Pro”,
-  “quantity”: 50,
-  “priority”: “High”
-}</a:t>
+              <a:rPr lang="en-US" sz="1800"/>
+              <a:t>The prompt is the instruction that shapes the agent's response
+Be specific: state the role, the task and the format you want
+Give examples of good answers — the agent learns the pattern
+Set boundaries: what to do when information is missing
+Iterate: test, refine the wording, test again</a:t>
             </a:r>
           </a:p>
         </p:txBody>
@@ -7841,7 +7876,7 @@
     </p:spTree>
     <p:extLst>
       <p:ext uri="{BB962C8B-B14F-4D97-AF65-F5344CB8AC3E}">
-        <p14:creationId xmlns:p14="http://schemas.microsoft.com/office/powerpoint/2010/main" val="3008258654"/>
+        <p14:creationId xmlns:p14="http://schemas.microsoft.com/office/powerpoint/2010/main" val="2361496135"/>
       </p:ext>
     </p:extLst>
   </p:cSld>
@@ -7873,7 +7908,7 @@
           <p:cNvPr id="2" name="Title 1">
             <a:extLst>
               <a:ext uri="{FF2B5EF4-FFF2-40B4-BE49-F238E27FC236}">
-                <a16:creationId xmlns:a16="http://schemas.microsoft.com/office/drawing/2014/main" id="{BF2C1699-291E-C771-80D0-8DC549FA0F41}"/>
+                <a16:creationId xmlns:a16="http://schemas.microsoft.com/office/drawing/2014/main" id="{ECD51738-FC22-06D4-AA9C-1284BA381035}"/>
               </a:ext>
             </a:extLst>
           </p:cNvPr>
@@ -7891,7 +7926,7 @@
           <a:p>
             <a:r>
               <a:rPr lang="en-US"/>
-              <a:t>Example: A Structured Prompt</a:t>
+              <a:t>Prompt Design for Structured Outputs</a:t>
             </a:r>
           </a:p>
         </p:txBody>
@@ -7901,15 +7936,15 @@
           <p:cNvPr id="3" name="Content Placeholder 2">
             <a:extLst>
               <a:ext uri="{FF2B5EF4-FFF2-40B4-BE49-F238E27FC236}">
-                <a16:creationId xmlns:a16="http://schemas.microsoft.com/office/drawing/2014/main" id="{0FEA4F5C-5ECD-D950-2703-080A2C919249}"/>
-              </a:ext>
-            </a:extLst>
-          </p:cNvPr>
-          <p:cNvSpPr>
-            <a:spLocks noGrp="1"/>
-          </p:cNvSpPr>
-          <p:nvPr>
-            <p:ph sz="half" idx="1"/>
+                <a16:creationId xmlns:a16="http://schemas.microsoft.com/office/drawing/2014/main" id="{EFA17231-1535-FA3E-1E29-8F01D614AAAC}"/>
+              </a:ext>
+            </a:extLst>
+          </p:cNvPr>
+          <p:cNvSpPr>
+            <a:spLocks noGrp="1"/>
+          </p:cNvSpPr>
+          <p:nvPr>
+            <p:ph idx="1"/>
           </p:nvPr>
         </p:nvSpPr>
         <p:spPr/>
@@ -7920,49 +7955,12 @@
           <a:lstStyle/>
           <a:p>
             <a:r>
-              <a:rPr lang="en-US" sz="1600"/>
-              <a:t>THE PROMPT
-“You are a sales enquiry assistant.
-From the customer's message, extract:
-Customer name, Product, Quantity,
-and Priority (High / Medium / Low).
-Return the result as labelled fields.
-If a detail is missing, write ‘Not stated’.”</a:t>
-            </a:r>
-          </a:p>
-        </p:txBody>
-      </p:sp>
-      <p:sp>
-        <p:nvSpPr>
-          <p:cNvPr id="4" name="Content Placeholder 3">
-            <a:extLst>
-              <a:ext uri="{FF2B5EF4-FFF2-40B4-BE49-F238E27FC236}">
-                <a16:creationId xmlns:a16="http://schemas.microsoft.com/office/drawing/2014/main" id="{98BD0EC0-10E0-BFBA-4D05-E2D9D90E4D69}"/>
-              </a:ext>
-            </a:extLst>
-          </p:cNvPr>
-          <p:cNvSpPr>
-            <a:spLocks noGrp="1"/>
-          </p:cNvSpPr>
-          <p:nvPr>
-            <p:ph sz="half" idx="2"/>
-          </p:nvPr>
-        </p:nvSpPr>
-        <p:spPr/>
-        <p:txBody>
-          <a:bodyPr>
-            <a:normAutofit/>
-          </a:bodyPr>
-          <a:lstStyle/>
-          <a:p>
-            <a:r>
-              <a:rPr lang="en-US" sz="1600"/>
-              <a:t>THE OUTPUT
-Customer: Acme Ltd
-Product: Widget Pro
-Quantity: 50
-Priority: High
-→ Ready to log to Excel and notify sales</a:t>
+              <a:rPr lang="en-US" sz="1800"/>
+              <a:t>A workflow needs predictable fields, not free-flowing prose
+Ask the agent to return the same fields every time
+Name each field clearly: Customer, Product, Quantity, Priority
+Specify the format — a labelled list, a table, or JSON
+Structured output = data your Power Automate flow can read directly</a:t>
             </a:r>
           </a:p>
         </p:txBody>
@@ -7970,7 +7968,7 @@
     </p:spTree>
     <p:extLst>
       <p:ext uri="{BB962C8B-B14F-4D97-AF65-F5344CB8AC3E}">
-        <p14:creationId xmlns:p14="http://schemas.microsoft.com/office/powerpoint/2010/main" val="3947509645"/>
+        <p14:creationId xmlns:p14="http://schemas.microsoft.com/office/powerpoint/2010/main" val="1029975955"/>
       </p:ext>
     </p:extLst>
   </p:cSld>
@@ -8002,7 +8000,7 @@
           <p:cNvPr id="2" name="Title 1">
             <a:extLst>
               <a:ext uri="{FF2B5EF4-FFF2-40B4-BE49-F238E27FC236}">
-                <a16:creationId xmlns:a16="http://schemas.microsoft.com/office/drawing/2014/main" id="{97C6296A-C570-BB6C-B527-5B1C31ED36F8}"/>
+                <a16:creationId xmlns:a16="http://schemas.microsoft.com/office/drawing/2014/main" id="{50FB60E9-163C-C95A-7BFB-155EB57D2AAA}"/>
               </a:ext>
             </a:extLst>
           </p:cNvPr>
@@ -8020,7 +8018,7 @@
           <a:p>
             <a:r>
               <a:rPr lang="en-US"/>
-              <a:t>Connecting Agents to Power Automate Flows</a:t>
+              <a:t>Structured Output Formats</a:t>
             </a:r>
           </a:p>
         </p:txBody>
@@ -8030,15 +8028,15 @@
           <p:cNvPr id="3" name="Content Placeholder 2">
             <a:extLst>
               <a:ext uri="{FF2B5EF4-FFF2-40B4-BE49-F238E27FC236}">
-                <a16:creationId xmlns:a16="http://schemas.microsoft.com/office/drawing/2014/main" id="{DE914721-D499-2ED4-4B0E-F13C4C5F36CC}"/>
-              </a:ext>
-            </a:extLst>
-          </p:cNvPr>
-          <p:cNvSpPr>
-            <a:spLocks noGrp="1"/>
-          </p:cNvSpPr>
-          <p:nvPr>
-            <p:ph idx="1"/>
+                <a16:creationId xmlns:a16="http://schemas.microsoft.com/office/drawing/2014/main" id="{6C9A2798-F21E-5AE9-F7E6-1A3A56553342}"/>
+              </a:ext>
+            </a:extLst>
+          </p:cNvPr>
+          <p:cNvSpPr>
+            <a:spLocks noGrp="1"/>
+          </p:cNvSpPr>
+          <p:nvPr>
+            <p:ph sz="half" idx="1"/>
           </p:nvPr>
         </p:nvSpPr>
         <p:spPr/>
@@ -8049,12 +8047,49 @@
           <a:lstStyle/>
           <a:p>
             <a:r>
-              <a:rPr lang="en-US" sz="1800"/>
-              <a:t>An agent can call a flow as one of its actions
-Build the flow with an ‘instant’ trigger that accepts inputs
-Add the flow to your agent in Copilot Studio
-The agent passes data in; the flow runs and returns a result
-This is how a conversation turns into real action</a:t>
+              <a:rPr lang="en-US" sz="1600"/>
+              <a:t>LABELLED FIELDS
+Customer: Acme Ltd
+Product: Widget Pro
+Quantity: 50
+Priority: High
+Easy to read, easy to map</a:t>
+            </a:r>
+          </a:p>
+        </p:txBody>
+      </p:sp>
+      <p:sp>
+        <p:nvSpPr>
+          <p:cNvPr id="4" name="Content Placeholder 3">
+            <a:extLst>
+              <a:ext uri="{FF2B5EF4-FFF2-40B4-BE49-F238E27FC236}">
+                <a16:creationId xmlns:a16="http://schemas.microsoft.com/office/drawing/2014/main" id="{2B3450F7-D16C-C4A8-CD66-BD6E44BF1072}"/>
+              </a:ext>
+            </a:extLst>
+          </p:cNvPr>
+          <p:cNvSpPr>
+            <a:spLocks noGrp="1"/>
+          </p:cNvSpPr>
+          <p:nvPr>
+            <p:ph sz="half" idx="2"/>
+          </p:nvPr>
+        </p:nvSpPr>
+        <p:spPr/>
+        <p:txBody>
+          <a:bodyPr>
+            <a:normAutofit/>
+          </a:bodyPr>
+          <a:lstStyle/>
+          <a:p>
+            <a:r>
+              <a:rPr lang="en-US" sz="1600"/>
+              <a:t>JSON
+{
+  “customer”: “Acme Ltd”,
+  “product”: “Widget Pro”,
+  “quantity”: 50,
+  “priority”: “High”
+}</a:t>
             </a:r>
           </a:p>
         </p:txBody>
@@ -8062,7 +8097,7 @@
     </p:spTree>
     <p:extLst>
       <p:ext uri="{BB962C8B-B14F-4D97-AF65-F5344CB8AC3E}">
-        <p14:creationId xmlns:p14="http://schemas.microsoft.com/office/powerpoint/2010/main" val="2536611153"/>
+        <p14:creationId xmlns:p14="http://schemas.microsoft.com/office/powerpoint/2010/main" val="3008258654"/>
       </p:ext>
     </p:extLst>
   </p:cSld>
@@ -8094,7 +8129,7 @@
           <p:cNvPr id="2" name="Title 1">
             <a:extLst>
               <a:ext uri="{FF2B5EF4-FFF2-40B4-BE49-F238E27FC236}">
-                <a16:creationId xmlns:a16="http://schemas.microsoft.com/office/drawing/2014/main" id="{D75F60A6-FC38-871E-C0FC-43F5C0D2855E}"/>
+                <a16:creationId xmlns:a16="http://schemas.microsoft.com/office/drawing/2014/main" id="{BF2C1699-291E-C771-80D0-8DC549FA0F41}"/>
               </a:ext>
             </a:extLst>
           </p:cNvPr>
@@ -8112,7 +8147,7 @@
           <a:p>
             <a:r>
               <a:rPr lang="en-US"/>
-              <a:t>Passing Outputs into Workflows</a:t>
+              <a:t>Example: A Structured Prompt</a:t>
             </a:r>
           </a:p>
         </p:txBody>
@@ -8122,15 +8157,15 @@
           <p:cNvPr id="3" name="Content Placeholder 2">
             <a:extLst>
               <a:ext uri="{FF2B5EF4-FFF2-40B4-BE49-F238E27FC236}">
-                <a16:creationId xmlns:a16="http://schemas.microsoft.com/office/drawing/2014/main" id="{073BF8C8-55B9-3240-CD0E-AB0847E360C8}"/>
-              </a:ext>
-            </a:extLst>
-          </p:cNvPr>
-          <p:cNvSpPr>
-            <a:spLocks noGrp="1"/>
-          </p:cNvSpPr>
-          <p:nvPr>
-            <p:ph idx="1"/>
+                <a16:creationId xmlns:a16="http://schemas.microsoft.com/office/drawing/2014/main" id="{0FEA4F5C-5ECD-D950-2703-080A2C919249}"/>
+              </a:ext>
+            </a:extLst>
+          </p:cNvPr>
+          <p:cNvSpPr>
+            <a:spLocks noGrp="1"/>
+          </p:cNvSpPr>
+          <p:nvPr>
+            <p:ph sz="half" idx="1"/>
           </p:nvPr>
         </p:nvSpPr>
         <p:spPr/>
@@ -8141,12 +8176,49 @@
           <a:lstStyle/>
           <a:p>
             <a:r>
-              <a:rPr lang="en-US" sz="1800"/>
-              <a:t>The agent's structured output becomes the flow's input
-Each field maps to a flow parameter: Customer, Product, Quantity
-The flow uses those values in its actions — log, email, approve
-Clean structured output makes mapping effortless
-Garbage in, garbage out — good prompts pay off here</a:t>
+              <a:rPr lang="en-US" sz="1600"/>
+              <a:t>THE PROMPT
+“You are a sales enquiry assistant.
+From the customer's message, extract:
+Customer name, Product, Quantity,
+and Priority (High / Medium / Low).
+Return the result as labelled fields.
+If a detail is missing, write ‘Not stated’.”</a:t>
+            </a:r>
+          </a:p>
+        </p:txBody>
+      </p:sp>
+      <p:sp>
+        <p:nvSpPr>
+          <p:cNvPr id="4" name="Content Placeholder 3">
+            <a:extLst>
+              <a:ext uri="{FF2B5EF4-FFF2-40B4-BE49-F238E27FC236}">
+                <a16:creationId xmlns:a16="http://schemas.microsoft.com/office/drawing/2014/main" id="{98BD0EC0-10E0-BFBA-4D05-E2D9D90E4D69}"/>
+              </a:ext>
+            </a:extLst>
+          </p:cNvPr>
+          <p:cNvSpPr>
+            <a:spLocks noGrp="1"/>
+          </p:cNvSpPr>
+          <p:nvPr>
+            <p:ph sz="half" idx="2"/>
+          </p:nvPr>
+        </p:nvSpPr>
+        <p:spPr/>
+        <p:txBody>
+          <a:bodyPr>
+            <a:normAutofit/>
+          </a:bodyPr>
+          <a:lstStyle/>
+          <a:p>
+            <a:r>
+              <a:rPr lang="en-US" sz="1600"/>
+              <a:t>THE OUTPUT
+Customer: Acme Ltd
+Product: Widget Pro
+Quantity: 50
+Priority: High
+→ Ready to log to Excel and notify sales</a:t>
             </a:r>
           </a:p>
         </p:txBody>
@@ -8154,7 +8226,7 @@
     </p:spTree>
     <p:extLst>
       <p:ext uri="{BB962C8B-B14F-4D97-AF65-F5344CB8AC3E}">
-        <p14:creationId xmlns:p14="http://schemas.microsoft.com/office/powerpoint/2010/main" val="139799701"/>
+        <p14:creationId xmlns:p14="http://schemas.microsoft.com/office/powerpoint/2010/main" val="3947509645"/>
       </p:ext>
     </p:extLst>
   </p:cSld>
@@ -8278,7 +8350,7 @@
           <p:cNvPr id="2" name="Title 1">
             <a:extLst>
               <a:ext uri="{FF2B5EF4-FFF2-40B4-BE49-F238E27FC236}">
-                <a16:creationId xmlns:a16="http://schemas.microsoft.com/office/drawing/2014/main" id="{DD3C2E25-47E9-7C3D-5BF6-270B2C4F7A8A}"/>
+                <a16:creationId xmlns:a16="http://schemas.microsoft.com/office/drawing/2014/main" id="{97C6296A-C570-BB6C-B527-5B1C31ED36F8}"/>
               </a:ext>
             </a:extLst>
           </p:cNvPr>
@@ -8296,7 +8368,7 @@
           <a:p>
             <a:r>
               <a:rPr lang="en-US"/>
-              <a:t>Input and Output Mapping</a:t>
+              <a:t>Connecting Agents to Power Automate Flows</a:t>
             </a:r>
           </a:p>
         </p:txBody>
@@ -8306,7 +8378,7 @@
           <p:cNvPr id="3" name="Content Placeholder 2">
             <a:extLst>
               <a:ext uri="{FF2B5EF4-FFF2-40B4-BE49-F238E27FC236}">
-                <a16:creationId xmlns:a16="http://schemas.microsoft.com/office/drawing/2014/main" id="{D20A7C00-B18D-B4F1-3094-74D1152F6FA2}"/>
+                <a16:creationId xmlns:a16="http://schemas.microsoft.com/office/drawing/2014/main" id="{DE914721-D499-2ED4-4B0E-F13C4C5F36CC}"/>
               </a:ext>
             </a:extLst>
           </p:cNvPr>
@@ -8326,11 +8398,11 @@
           <a:p>
             <a:r>
               <a:rPr lang="en-US" sz="1800"/>
-              <a:t>Define the flow's inputs to match the agent's fields
-Map each agent field to the matching flow parameter
-The flow can return a value back to the agent (e.g. a reference number)
-The agent confirms to the user: ‘Logged — your reference is 1042’
-Data flows both ways: agent → flow → agent</a:t>
+              <a:t>An agent can call a flow as one of its actions
+Build the flow with an ‘instant’ trigger that accepts inputs
+Add the flow to your agent in Copilot Studio
+The agent passes data in; the flow runs and returns a result
+This is how a conversation turns into real action</a:t>
             </a:r>
           </a:p>
         </p:txBody>
@@ -8338,7 +8410,7 @@
     </p:spTree>
     <p:extLst>
       <p:ext uri="{BB962C8B-B14F-4D97-AF65-F5344CB8AC3E}">
-        <p14:creationId xmlns:p14="http://schemas.microsoft.com/office/powerpoint/2010/main" val="2707578365"/>
+        <p14:creationId xmlns:p14="http://schemas.microsoft.com/office/powerpoint/2010/main" val="2536611153"/>
       </p:ext>
     </p:extLst>
   </p:cSld>
@@ -8370,6 +8442,190 @@
           <p:cNvPr id="2" name="Title 1">
             <a:extLst>
               <a:ext uri="{FF2B5EF4-FFF2-40B4-BE49-F238E27FC236}">
+                <a16:creationId xmlns:a16="http://schemas.microsoft.com/office/drawing/2014/main" id="{D75F60A6-FC38-871E-C0FC-43F5C0D2855E}"/>
+              </a:ext>
+            </a:extLst>
+          </p:cNvPr>
+          <p:cNvSpPr>
+            <a:spLocks noGrp="1"/>
+          </p:cNvSpPr>
+          <p:nvPr>
+            <p:ph type="title"/>
+          </p:nvPr>
+        </p:nvSpPr>
+        <p:spPr/>
+        <p:txBody>
+          <a:bodyPr/>
+          <a:lstStyle/>
+          <a:p>
+            <a:r>
+              <a:rPr lang="en-US"/>
+              <a:t>Passing Outputs into Workflows</a:t>
+            </a:r>
+          </a:p>
+        </p:txBody>
+      </p:sp>
+      <p:sp>
+        <p:nvSpPr>
+          <p:cNvPr id="3" name="Content Placeholder 2">
+            <a:extLst>
+              <a:ext uri="{FF2B5EF4-FFF2-40B4-BE49-F238E27FC236}">
+                <a16:creationId xmlns:a16="http://schemas.microsoft.com/office/drawing/2014/main" id="{073BF8C8-55B9-3240-CD0E-AB0847E360C8}"/>
+              </a:ext>
+            </a:extLst>
+          </p:cNvPr>
+          <p:cNvSpPr>
+            <a:spLocks noGrp="1"/>
+          </p:cNvSpPr>
+          <p:nvPr>
+            <p:ph idx="1"/>
+          </p:nvPr>
+        </p:nvSpPr>
+        <p:spPr/>
+        <p:txBody>
+          <a:bodyPr>
+            <a:normAutofit/>
+          </a:bodyPr>
+          <a:lstStyle/>
+          <a:p>
+            <a:r>
+              <a:rPr lang="en-US" sz="1800"/>
+              <a:t>The agent's structured output becomes the flow's input
+Each field maps to a flow parameter: Customer, Product, Quantity
+The flow uses those values in its actions — log, email, approve
+Clean structured output makes mapping effortless
+Garbage in, garbage out — good prompts pay off here</a:t>
+            </a:r>
+          </a:p>
+        </p:txBody>
+      </p:sp>
+    </p:spTree>
+    <p:extLst>
+      <p:ext uri="{BB962C8B-B14F-4D97-AF65-F5344CB8AC3E}">
+        <p14:creationId xmlns:p14="http://schemas.microsoft.com/office/powerpoint/2010/main" val="139799701"/>
+      </p:ext>
+    </p:extLst>
+  </p:cSld>
+  <p:clrMapOvr>
+    <a:masterClrMapping/>
+  </p:clrMapOvr>
+</p:sld>
+</file>
+
+<file path=ppt/slides/slide52.xml><?xml version="1.0" encoding="utf-8"?>
+<p:sld xmlns:a="http://schemas.openxmlformats.org/drawingml/2006/main" xmlns:r="http://schemas.openxmlformats.org/officeDocument/2006/relationships" xmlns:p="http://schemas.openxmlformats.org/presentationml/2006/main">
+  <p:cSld>
+    <p:spTree>
+      <p:nvGrpSpPr>
+        <p:cNvPr id="1" name=""/>
+        <p:cNvGrpSpPr/>
+        <p:nvPr/>
+      </p:nvGrpSpPr>
+      <p:grpSpPr>
+        <a:xfrm>
+          <a:off x="0" y="0"/>
+          <a:ext cx="0" cy="0"/>
+          <a:chOff x="0" y="0"/>
+          <a:chExt cx="0" cy="0"/>
+        </a:xfrm>
+      </p:grpSpPr>
+      <p:sp>
+        <p:nvSpPr>
+          <p:cNvPr id="2" name="Title 1">
+            <a:extLst>
+              <a:ext uri="{FF2B5EF4-FFF2-40B4-BE49-F238E27FC236}">
+                <a16:creationId xmlns:a16="http://schemas.microsoft.com/office/drawing/2014/main" id="{DD3C2E25-47E9-7C3D-5BF6-270B2C4F7A8A}"/>
+              </a:ext>
+            </a:extLst>
+          </p:cNvPr>
+          <p:cNvSpPr>
+            <a:spLocks noGrp="1"/>
+          </p:cNvSpPr>
+          <p:nvPr>
+            <p:ph type="title"/>
+          </p:nvPr>
+        </p:nvSpPr>
+        <p:spPr/>
+        <p:txBody>
+          <a:bodyPr/>
+          <a:lstStyle/>
+          <a:p>
+            <a:r>
+              <a:rPr lang="en-US"/>
+              <a:t>Input and Output Mapping</a:t>
+            </a:r>
+          </a:p>
+        </p:txBody>
+      </p:sp>
+      <p:sp>
+        <p:nvSpPr>
+          <p:cNvPr id="3" name="Content Placeholder 2">
+            <a:extLst>
+              <a:ext uri="{FF2B5EF4-FFF2-40B4-BE49-F238E27FC236}">
+                <a16:creationId xmlns:a16="http://schemas.microsoft.com/office/drawing/2014/main" id="{D20A7C00-B18D-B4F1-3094-74D1152F6FA2}"/>
+              </a:ext>
+            </a:extLst>
+          </p:cNvPr>
+          <p:cNvSpPr>
+            <a:spLocks noGrp="1"/>
+          </p:cNvSpPr>
+          <p:nvPr>
+            <p:ph idx="1"/>
+          </p:nvPr>
+        </p:nvSpPr>
+        <p:spPr/>
+        <p:txBody>
+          <a:bodyPr>
+            <a:normAutofit/>
+          </a:bodyPr>
+          <a:lstStyle/>
+          <a:p>
+            <a:r>
+              <a:rPr lang="en-US" sz="1800"/>
+              <a:t>Define the flow's inputs to match the agent's fields
+Map each agent field to the matching flow parameter
+The flow can return a value back to the agent (e.g. a reference number)
+The agent confirms to the user: ‘Logged — your reference is 1042’
+Data flows both ways: agent → flow → agent</a:t>
+            </a:r>
+          </a:p>
+        </p:txBody>
+      </p:sp>
+    </p:spTree>
+    <p:extLst>
+      <p:ext uri="{BB962C8B-B14F-4D97-AF65-F5344CB8AC3E}">
+        <p14:creationId xmlns:p14="http://schemas.microsoft.com/office/powerpoint/2010/main" val="2707578365"/>
+      </p:ext>
+    </p:extLst>
+  </p:cSld>
+  <p:clrMapOvr>
+    <a:masterClrMapping/>
+  </p:clrMapOvr>
+</p:sld>
+</file>
+
+<file path=ppt/slides/slide53.xml><?xml version="1.0" encoding="utf-8"?>
+<p:sld xmlns:a="http://schemas.openxmlformats.org/drawingml/2006/main" xmlns:r="http://schemas.openxmlformats.org/officeDocument/2006/relationships" xmlns:p="http://schemas.openxmlformats.org/presentationml/2006/main">
+  <p:cSld>
+    <p:spTree>
+      <p:nvGrpSpPr>
+        <p:cNvPr id="1" name=""/>
+        <p:cNvGrpSpPr/>
+        <p:nvPr/>
+      </p:nvGrpSpPr>
+      <p:grpSpPr>
+        <a:xfrm>
+          <a:off x="0" y="0"/>
+          <a:ext cx="0" cy="0"/>
+          <a:chOff x="0" y="0"/>
+          <a:chExt cx="0" cy="0"/>
+        </a:xfrm>
+      </p:grpSpPr>
+      <p:sp>
+        <p:nvSpPr>
+          <p:cNvPr id="2" name="Title 1">
+            <a:extLst>
+              <a:ext uri="{FF2B5EF4-FFF2-40B4-BE49-F238E27FC236}">
                 <a16:creationId xmlns:a16="http://schemas.microsoft.com/office/drawing/2014/main" id="{BA5A429E-CAFB-6250-E072-71143608D6DE}"/>
               </a:ext>
             </a:extLst>
@@ -8440,7 +8696,7 @@
 </p:sld>
 </file>
 
-<file path=ppt/slides/slide52.xml><?xml version="1.0" encoding="utf-8"?>
+<file path=ppt/slides/slide54.xml><?xml version="1.0" encoding="utf-8"?>
 <p:sld xmlns:a="http://schemas.openxmlformats.org/drawingml/2006/main" xmlns:r="http://schemas.openxmlformats.org/officeDocument/2006/relationships" xmlns:p="http://schemas.openxmlformats.org/presentationml/2006/main">
   <p:cSld>
     <p:spTree>
@@ -9112,226 +9368,6 @@
 </p:sld>
 </file>
 
-<file path=ppt/slides/slide53.xml><?xml version="1.0" encoding="utf-8"?>
-<p:sld xmlns:a="http://schemas.openxmlformats.org/drawingml/2006/main" xmlns:r="http://schemas.openxmlformats.org/officeDocument/2006/relationships" xmlns:p="http://schemas.openxmlformats.org/presentationml/2006/main">
-  <p:cSld>
-    <p:spTree>
-      <p:nvGrpSpPr>
-        <p:cNvPr id="1" name=""/>
-        <p:cNvGrpSpPr/>
-        <p:nvPr/>
-      </p:nvGrpSpPr>
-      <p:grpSpPr>
-        <a:xfrm>
-          <a:off x="0" y="0"/>
-          <a:ext cx="0" cy="0"/>
-          <a:chOff x="0" y="0"/>
-          <a:chExt cx="0" cy="0"/>
-        </a:xfrm>
-      </p:grpSpPr>
-      <p:sp>
-        <p:nvSpPr>
-          <p:cNvPr id="2" name="Title 1">
-            <a:extLst>
-              <a:ext uri="{FF2B5EF4-FFF2-40B4-BE49-F238E27FC236}">
-                <a16:creationId xmlns:a16="http://schemas.microsoft.com/office/drawing/2014/main" id="{DE56C47B-0463-4404-4CAE-F97494FB3AC4}"/>
-              </a:ext>
-            </a:extLst>
-          </p:cNvPr>
-          <p:cNvSpPr>
-            <a:spLocks noGrp="1"/>
-          </p:cNvSpPr>
-          <p:nvPr>
-            <p:ph type="title"/>
-          </p:nvPr>
-        </p:nvSpPr>
-        <p:spPr/>
-        <p:txBody>
-          <a:bodyPr/>
-          <a:lstStyle/>
-          <a:p>
-            <a:r>
-              <a:rPr lang="en-US"/>
-              <a:t>Hands-On Labs · Copilot Studio</a:t>
-            </a:r>
-          </a:p>
-        </p:txBody>
-      </p:sp>
-      <p:sp>
-        <p:nvSpPr>
-          <p:cNvPr id="3" name="Text Placeholder 2">
-            <a:extLst>
-              <a:ext uri="{FF2B5EF4-FFF2-40B4-BE49-F238E27FC236}">
-                <a16:creationId xmlns:a16="http://schemas.microsoft.com/office/drawing/2014/main" id="{1CA1F413-66CD-EEE8-148E-0A39E1D3C826}"/>
-              </a:ext>
-            </a:extLst>
-          </p:cNvPr>
-          <p:cNvSpPr>
-            <a:spLocks noGrp="1"/>
-          </p:cNvSpPr>
-          <p:nvPr>
-            <p:ph type="body" idx="1"/>
-          </p:nvPr>
-        </p:nvSpPr>
-        <p:spPr/>
-        <p:txBody>
-          <a:bodyPr>
-            <a:normAutofit/>
-          </a:bodyPr>
-          <a:lstStyle/>
-          <a:p>
-            <a:r>
-              <a:rPr lang="en-US" sz="1800" b="1">
-                <a:solidFill>
-                  <a:srgbClr val="7C3AED"/>
-                </a:solidFill>
-              </a:rPr>
-              <a:t>Six labs: create an agent, add knowledge &amp; tools, then three business agents</a:t>
-            </a:r>
-          </a:p>
-        </p:txBody>
-      </p:sp>
-    </p:spTree>
-    <p:extLst>
-      <p:ext uri="{BB962C8B-B14F-4D97-AF65-F5344CB8AC3E}">
-        <p14:creationId xmlns:p14="http://schemas.microsoft.com/office/powerpoint/2010/main" val="2734189858"/>
-      </p:ext>
-    </p:extLst>
-  </p:cSld>
-  <p:clrMapOvr>
-    <a:masterClrMapping/>
-  </p:clrMapOvr>
-</p:sld>
-</file>
-
-<file path=ppt/slides/slide54.xml><?xml version="1.0" encoding="utf-8"?>
-<p:sld xmlns:a="http://schemas.openxmlformats.org/drawingml/2006/main" xmlns:r="http://schemas.openxmlformats.org/officeDocument/2006/relationships" xmlns:p="http://schemas.openxmlformats.org/presentationml/2006/main">
-  <p:cSld>
-    <p:spTree>
-      <p:nvGrpSpPr>
-        <p:cNvPr id="1" name=""/>
-        <p:cNvGrpSpPr/>
-        <p:nvPr/>
-      </p:nvGrpSpPr>
-      <p:grpSpPr>
-        <a:xfrm>
-          <a:off x="0" y="0"/>
-          <a:ext cx="0" cy="0"/>
-          <a:chOff x="0" y="0"/>
-          <a:chExt cx="0" cy="0"/>
-        </a:xfrm>
-      </p:grpSpPr>
-      <p:sp>
-        <p:nvSpPr>
-          <p:cNvPr id="2" name="Title 1">
-            <a:extLst>
-              <a:ext uri="{FF2B5EF4-FFF2-40B4-BE49-F238E27FC236}">
-                <a16:creationId xmlns:a16="http://schemas.microsoft.com/office/drawing/2014/main" id="{571666CC-AAE9-06B8-D1A6-1E5F90632537}"/>
-              </a:ext>
-            </a:extLst>
-          </p:cNvPr>
-          <p:cNvSpPr>
-            <a:spLocks noGrp="1"/>
-          </p:cNvSpPr>
-          <p:nvPr>
-            <p:ph type="title"/>
-          </p:nvPr>
-        </p:nvSpPr>
-        <p:spPr/>
-        <p:txBody>
-          <a:bodyPr/>
-          <a:lstStyle/>
-          <a:p>
-            <a:r>
-              <a:rPr lang="en-US"/>
-              <a:t>Lab 9 — Sales Enquiry Assistant</a:t>
-            </a:r>
-          </a:p>
-        </p:txBody>
-      </p:sp>
-      <p:sp>
-        <p:nvSpPr>
-          <p:cNvPr id="3" name="Content Placeholder 2">
-            <a:extLst>
-              <a:ext uri="{FF2B5EF4-FFF2-40B4-BE49-F238E27FC236}">
-                <a16:creationId xmlns:a16="http://schemas.microsoft.com/office/drawing/2014/main" id="{14102613-EFF2-DF81-651A-F3779CF9FC37}"/>
-              </a:ext>
-            </a:extLst>
-          </p:cNvPr>
-          <p:cNvSpPr>
-            <a:spLocks noGrp="1"/>
-          </p:cNvSpPr>
-          <p:nvPr>
-            <p:ph sz="half" idx="1"/>
-          </p:nvPr>
-        </p:nvSpPr>
-        <p:spPr/>
-        <p:txBody>
-          <a:bodyPr>
-            <a:normAutofit/>
-          </a:bodyPr>
-          <a:lstStyle/>
-          <a:p>
-            <a:r>
-              <a:rPr lang="en-US" sz="1600"/>
-              <a:t>GOAL
-An agent that captures sales enquiries
-as structured fields
-YOU'LL USE
-Copilot Studio agent
-A structured-output prompt</a:t>
-            </a:r>
-          </a:p>
-        </p:txBody>
-      </p:sp>
-      <p:sp>
-        <p:nvSpPr>
-          <p:cNvPr id="4" name="Content Placeholder 3">
-            <a:extLst>
-              <a:ext uri="{FF2B5EF4-FFF2-40B4-BE49-F238E27FC236}">
-                <a16:creationId xmlns:a16="http://schemas.microsoft.com/office/drawing/2014/main" id="{CF24EF09-D57E-0B33-E277-90D95CAA3229}"/>
-              </a:ext>
-            </a:extLst>
-          </p:cNvPr>
-          <p:cNvSpPr>
-            <a:spLocks noGrp="1"/>
-          </p:cNvSpPr>
-          <p:nvPr>
-            <p:ph sz="half" idx="2"/>
-          </p:nvPr>
-        </p:nvSpPr>
-        <p:spPr/>
-        <p:txBody>
-          <a:bodyPr>
-            <a:normAutofit/>
-          </a:bodyPr>
-          <a:lstStyle/>
-          <a:p>
-            <a:r>
-              <a:rPr lang="en-US" sz="1600"/>
-              <a:t>STEPS
-1.  Create an agent for sales enquiries
-2.  Add instructions and product knowledge
-3.  Prompt it to extract Customer, Product, Qty
-4.  Test with sample enquiries
-5.  Check the output is clean and consistent</a:t>
-            </a:r>
-          </a:p>
-        </p:txBody>
-      </p:sp>
-    </p:spTree>
-    <p:extLst>
-      <p:ext uri="{BB962C8B-B14F-4D97-AF65-F5344CB8AC3E}">
-        <p14:creationId xmlns:p14="http://schemas.microsoft.com/office/powerpoint/2010/main" val="1750854078"/>
-      </p:ext>
-    </p:extLst>
-  </p:cSld>
-  <p:clrMapOvr>
-    <a:masterClrMapping/>
-  </p:clrMapOvr>
-</p:sld>
-</file>
-
 <file path=ppt/slides/slide55.xml><?xml version="1.0" encoding="utf-8"?>
 <p:sld xmlns:a="http://schemas.openxmlformats.org/drawingml/2006/main" xmlns:r="http://schemas.openxmlformats.org/officeDocument/2006/relationships" xmlns:p="http://schemas.openxmlformats.org/presentationml/2006/main">
   <p:cSld>
@@ -9354,7 +9390,7 @@
           <p:cNvPr id="2" name="Title 1">
             <a:extLst>
               <a:ext uri="{FF2B5EF4-FFF2-40B4-BE49-F238E27FC236}">
-                <a16:creationId xmlns:a16="http://schemas.microsoft.com/office/drawing/2014/main" id="{9C66D420-67FD-D03D-5F8F-5EA8E9E3A26D}"/>
+                <a16:creationId xmlns:a16="http://schemas.microsoft.com/office/drawing/2014/main" id="{DE56C47B-0463-4404-4CAE-F97494FB3AC4}"/>
               </a:ext>
             </a:extLst>
           </p:cNvPr>
@@ -9372,25 +9408,25 @@
           <a:p>
             <a:r>
               <a:rPr lang="en-US"/>
-              <a:t>Lab 10 — Procurement Request Workflow</a:t>
-            </a:r>
-          </a:p>
-        </p:txBody>
-      </p:sp>
-      <p:sp>
-        <p:nvSpPr>
-          <p:cNvPr id="3" name="Content Placeholder 2">
-            <a:extLst>
-              <a:ext uri="{FF2B5EF4-FFF2-40B4-BE49-F238E27FC236}">
-                <a16:creationId xmlns:a16="http://schemas.microsoft.com/office/drawing/2014/main" id="{825E4BD2-D173-5808-0363-F77B7D682F97}"/>
-              </a:ext>
-            </a:extLst>
-          </p:cNvPr>
-          <p:cNvSpPr>
-            <a:spLocks noGrp="1"/>
-          </p:cNvSpPr>
-          <p:nvPr>
-            <p:ph sz="half" idx="1"/>
+              <a:t>Hands-On Labs · Copilot Studio</a:t>
+            </a:r>
+          </a:p>
+        </p:txBody>
+      </p:sp>
+      <p:sp>
+        <p:nvSpPr>
+          <p:cNvPr id="3" name="Text Placeholder 2">
+            <a:extLst>
+              <a:ext uri="{FF2B5EF4-FFF2-40B4-BE49-F238E27FC236}">
+                <a16:creationId xmlns:a16="http://schemas.microsoft.com/office/drawing/2014/main" id="{1CA1F413-66CD-EEE8-148E-0A39E1D3C826}"/>
+              </a:ext>
+            </a:extLst>
+          </p:cNvPr>
+          <p:cNvSpPr>
+            <a:spLocks noGrp="1"/>
+          </p:cNvSpPr>
+          <p:nvPr>
+            <p:ph type="body" idx="1"/>
           </p:nvPr>
         </p:nvSpPr>
         <p:spPr/>
@@ -9401,48 +9437,12 @@
           <a:lstStyle/>
           <a:p>
             <a:r>
-              <a:rPr lang="en-US" sz="1600"/>
-              <a:t>GOAL
-An agent that takes procurement requests
-and starts an approval flow
-YOU'LL USE
-Copilot Studio agent
-A Power Automate flow (approval)</a:t>
-            </a:r>
-          </a:p>
-        </p:txBody>
-      </p:sp>
-      <p:sp>
-        <p:nvSpPr>
-          <p:cNvPr id="4" name="Content Placeholder 3">
-            <a:extLst>
-              <a:ext uri="{FF2B5EF4-FFF2-40B4-BE49-F238E27FC236}">
-                <a16:creationId xmlns:a16="http://schemas.microsoft.com/office/drawing/2014/main" id="{2BAEDEC7-32E6-5E4A-EA59-F2C89EC604AF}"/>
-              </a:ext>
-            </a:extLst>
-          </p:cNvPr>
-          <p:cNvSpPr>
-            <a:spLocks noGrp="1"/>
-          </p:cNvSpPr>
-          <p:nvPr>
-            <p:ph sz="half" idx="2"/>
-          </p:nvPr>
-        </p:nvSpPr>
-        <p:spPr/>
-        <p:txBody>
-          <a:bodyPr>
-            <a:normAutofit/>
-          </a:bodyPr>
-          <a:lstStyle/>
-          <a:p>
-            <a:r>
-              <a:rPr lang="en-US" sz="1600"/>
-              <a:t>STEPS
-1.  Build an agent to collect request details
-2.  Create a flow with an approval step
-3.  Connect the flow as an agent action
-4.  Pass the request fields into the flow
-5.  Test end-to-end: request → approval</a:t>
+              <a:rPr lang="en-US" sz="1800" b="1">
+                <a:solidFill>
+                  <a:srgbClr val="7C3AED"/>
+                </a:solidFill>
+              </a:rPr>
+              <a:t>Six labs: create an agent, add knowledge &amp; tools, then three business agents</a:t>
             </a:r>
           </a:p>
         </p:txBody>
@@ -9450,7 +9450,7 @@
     </p:spTree>
     <p:extLst>
       <p:ext uri="{BB962C8B-B14F-4D97-AF65-F5344CB8AC3E}">
-        <p14:creationId xmlns:p14="http://schemas.microsoft.com/office/powerpoint/2010/main" val="1113679174"/>
+        <p14:creationId xmlns:p14="http://schemas.microsoft.com/office/powerpoint/2010/main" val="2734189858"/>
       </p:ext>
     </p:extLst>
   </p:cSld>
@@ -9482,7 +9482,7 @@
           <p:cNvPr id="2" name="Title 1">
             <a:extLst>
               <a:ext uri="{FF2B5EF4-FFF2-40B4-BE49-F238E27FC236}">
-                <a16:creationId xmlns:a16="http://schemas.microsoft.com/office/drawing/2014/main" id="{B3821669-B5EA-1FB5-752E-D48BE161B1BA}"/>
+                <a16:creationId xmlns:a16="http://schemas.microsoft.com/office/drawing/2014/main" id="{571666CC-AAE9-06B8-D1A6-1E5F90632537}"/>
               </a:ext>
             </a:extLst>
           </p:cNvPr>
@@ -9500,7 +9500,7 @@
           <a:p>
             <a:r>
               <a:rPr lang="en-US"/>
-              <a:t>Lab 11 — Automated Response Generation</a:t>
+              <a:t>Lab 6 — Create Your First Agent</a:t>
             </a:r>
           </a:p>
         </p:txBody>
@@ -9510,7 +9510,7 @@
           <p:cNvPr id="3" name="Content Placeholder 2">
             <a:extLst>
               <a:ext uri="{FF2B5EF4-FFF2-40B4-BE49-F238E27FC236}">
-                <a16:creationId xmlns:a16="http://schemas.microsoft.com/office/drawing/2014/main" id="{B8E3914F-01D2-1AE3-D426-DDB8BF39C820}"/>
+                <a16:creationId xmlns:a16="http://schemas.microsoft.com/office/drawing/2014/main" id="{14102613-EFF2-DF81-651A-F3779CF9FC37}"/>
               </a:ext>
             </a:extLst>
           </p:cNvPr>
@@ -9531,11 +9531,11 @@
             <a:r>
               <a:rPr lang="en-US" sz="1600"/>
               <a:t>GOAL
-An agent that drafts a tailored reply
-from the captured details
+Build, configure and test your
+first Copilot Studio agent
 YOU'LL USE
 Copilot Studio agent
-Send email action</a:t>
+Instructions + built-in Test pane</a:t>
             </a:r>
           </a:p>
         </p:txBody>
@@ -9545,7 +9545,7 @@
           <p:cNvPr id="4" name="Content Placeholder 3">
             <a:extLst>
               <a:ext uri="{FF2B5EF4-FFF2-40B4-BE49-F238E27FC236}">
-                <a16:creationId xmlns:a16="http://schemas.microsoft.com/office/drawing/2014/main" id="{29E62AEB-C862-B252-D0A2-8B709D2C9537}"/>
+                <a16:creationId xmlns:a16="http://schemas.microsoft.com/office/drawing/2014/main" id="{CF24EF09-D57E-0B33-E277-90D95CAA3229}"/>
               </a:ext>
             </a:extLst>
           </p:cNvPr>
@@ -9566,11 +9566,11 @@
             <a:r>
               <a:rPr lang="en-US" sz="1600"/>
               <a:t>STEPS
-1.  Reuse the enquiry details from Lab 9
-2.  Prompt the agent to draft a reply
-3.  Keep the tone professional and on-brand
-4.  Send the draft via a flow
-5.  Review, refine the prompt, repeat</a:t>
+1.  Create a new agent (skip to configure)
+2.  Write clear instructions (role + tone)
+3.  Add a knowledge source
+4.  Test it live in the chat panel
+5.  Refine instructions, then publish</a:t>
             </a:r>
           </a:p>
         </p:txBody>
@@ -9578,7 +9578,7 @@
     </p:spTree>
     <p:extLst>
       <p:ext uri="{BB962C8B-B14F-4D97-AF65-F5344CB8AC3E}">
-        <p14:creationId xmlns:p14="http://schemas.microsoft.com/office/powerpoint/2010/main" val="3368437237"/>
+        <p14:creationId xmlns:p14="http://schemas.microsoft.com/office/powerpoint/2010/main" val="1750854078"/>
       </p:ext>
     </p:extLst>
   </p:cSld>
@@ -9610,7 +9610,7 @@
           <p:cNvPr id="2" name="Title 1">
             <a:extLst>
               <a:ext uri="{FF2B5EF4-FFF2-40B4-BE49-F238E27FC236}">
-                <a16:creationId xmlns:a16="http://schemas.microsoft.com/office/drawing/2014/main" id="{59720534-FF42-5EE2-C52D-D6A875AC7764}"/>
+                <a16:creationId xmlns:a16="http://schemas.microsoft.com/office/drawing/2014/main" id="{571666CC-AAE9-06B8-D1A6-1E5F90632537}"/>
               </a:ext>
             </a:extLst>
           </p:cNvPr>
@@ -9628,7 +9628,7 @@
           <a:p>
             <a:r>
               <a:rPr lang="en-US"/>
-              <a:t>Testing &amp; Debugging Agents</a:t>
+              <a:t>Lab 7 — Add Knowledge to Your Agent (RAG)</a:t>
             </a:r>
           </a:p>
         </p:txBody>
@@ -9638,15 +9638,15 @@
           <p:cNvPr id="3" name="Content Placeholder 2">
             <a:extLst>
               <a:ext uri="{FF2B5EF4-FFF2-40B4-BE49-F238E27FC236}">
-                <a16:creationId xmlns:a16="http://schemas.microsoft.com/office/drawing/2014/main" id="{A4B4DC5E-4545-01F1-D1EA-4BEFEB1FDD67}"/>
-              </a:ext>
-            </a:extLst>
-          </p:cNvPr>
-          <p:cNvSpPr>
-            <a:spLocks noGrp="1"/>
-          </p:cNvSpPr>
-          <p:nvPr>
-            <p:ph idx="1"/>
+                <a16:creationId xmlns:a16="http://schemas.microsoft.com/office/drawing/2014/main" id="{14102613-EFF2-DF81-651A-F3779CF9FC37}"/>
+              </a:ext>
+            </a:extLst>
+          </p:cNvPr>
+          <p:cNvSpPr>
+            <a:spLocks noGrp="1"/>
+          </p:cNvSpPr>
+          <p:nvPr>
+            <p:ph sz="half" idx="1"/>
           </p:nvPr>
         </p:nvSpPr>
         <p:spPr/>
@@ -9657,12 +9657,48 @@
           <a:lstStyle/>
           <a:p>
             <a:r>
-              <a:rPr lang="en-US" sz="1800"/>
-              <a:t>Test in the chat panel with realistic, messy inputs
-Check the output format is consistent every time
-Trace flow runs to see exactly what data passed through
-Refine the prompt when answers drift or fields go missing
-Handle the edge cases: missing info, unexpected questions</a:t>
+              <a:rPr lang="en-US" sz="1600"/>
+              <a:t>GOAL
+Ground the agent in your own
+documents (RAG) with citations
+YOU'LL USE
+Knowledge sources (files / website)
+Copilot Studio agent</a:t>
+            </a:r>
+          </a:p>
+        </p:txBody>
+      </p:sp>
+      <p:sp>
+        <p:nvSpPr>
+          <p:cNvPr id="4" name="Content Placeholder 3">
+            <a:extLst>
+              <a:ext uri="{FF2B5EF4-FFF2-40B4-BE49-F238E27FC236}">
+                <a16:creationId xmlns:a16="http://schemas.microsoft.com/office/drawing/2014/main" id="{CF24EF09-D57E-0B33-E277-90D95CAA3229}"/>
+              </a:ext>
+            </a:extLst>
+          </p:cNvPr>
+          <p:cNvSpPr>
+            <a:spLocks noGrp="1"/>
+          </p:cNvSpPr>
+          <p:nvPr>
+            <p:ph sz="half" idx="2"/>
+          </p:nvPr>
+        </p:nvSpPr>
+        <p:spPr/>
+        <p:txBody>
+          <a:bodyPr>
+            <a:normAutofit/>
+          </a:bodyPr>
+          <a:lstStyle/>
+          <a:p>
+            <a:r>
+              <a:rPr lang="en-US" sz="1600"/>
+              <a:t>STEPS
+1.  Prepare a document or website
+2.  Add it as a knowledge source
+3.  Wait until the source is Ready
+4.  Ask questions answered from your content
+5.  Check the citations; tune the sources</a:t>
             </a:r>
           </a:p>
         </p:txBody>
@@ -9670,7 +9706,7 @@
     </p:spTree>
     <p:extLst>
       <p:ext uri="{BB962C8B-B14F-4D97-AF65-F5344CB8AC3E}">
-        <p14:creationId xmlns:p14="http://schemas.microsoft.com/office/powerpoint/2010/main" val="1415766186"/>
+        <p14:creationId xmlns:p14="http://schemas.microsoft.com/office/powerpoint/2010/main" val="1750854078"/>
       </p:ext>
     </p:extLst>
   </p:cSld>
@@ -9702,7 +9738,7 @@
           <p:cNvPr id="2" name="Title 1">
             <a:extLst>
               <a:ext uri="{FF2B5EF4-FFF2-40B4-BE49-F238E27FC236}">
-                <a16:creationId xmlns:a16="http://schemas.microsoft.com/office/drawing/2014/main" id="{81445806-BBA9-BACB-9A42-A0C6831C1AB7}"/>
+                <a16:creationId xmlns:a16="http://schemas.microsoft.com/office/drawing/2014/main" id="{571666CC-AAE9-06B8-D1A6-1E5F90632537}"/>
               </a:ext>
             </a:extLst>
           </p:cNvPr>
@@ -9720,7 +9756,7 @@
           <a:p>
             <a:r>
               <a:rPr lang="en-US"/>
-              <a:t>Day 2 Recap</a:t>
+              <a:t>Lab 8 — Add Tools and Actions</a:t>
             </a:r>
           </a:p>
         </p:txBody>
@@ -9730,15 +9766,15 @@
           <p:cNvPr id="3" name="Content Placeholder 2">
             <a:extLst>
               <a:ext uri="{FF2B5EF4-FFF2-40B4-BE49-F238E27FC236}">
-                <a16:creationId xmlns:a16="http://schemas.microsoft.com/office/drawing/2014/main" id="{374A3DCA-15CA-E41E-DB93-4933698BD9C8}"/>
-              </a:ext>
-            </a:extLst>
-          </p:cNvPr>
-          <p:cNvSpPr>
-            <a:spLocks noGrp="1"/>
-          </p:cNvSpPr>
-          <p:nvPr>
-            <p:ph idx="1"/>
+                <a16:creationId xmlns:a16="http://schemas.microsoft.com/office/drawing/2014/main" id="{14102613-EFF2-DF81-651A-F3779CF9FC37}"/>
+              </a:ext>
+            </a:extLst>
+          </p:cNvPr>
+          <p:cNvSpPr>
+            <a:spLocks noGrp="1"/>
+          </p:cNvSpPr>
+          <p:nvPr>
+            <p:ph sz="half" idx="1"/>
           </p:nvPr>
         </p:nvSpPr>
         <p:spPr/>
@@ -9749,12 +9785,48 @@
           <a:lstStyle/>
           <a:p>
             <a:r>
-              <a:rPr lang="en-US" sz="1800"/>
-              <a:t>Copilot Studio builds low-code AI business agents
-Good prompts produce structured, predictable output
-Agents connect to Power Automate to take real action
-You created an agent, added knowledge and tools, then built a sales assistant, a procurement agent and a response generator
-Tomorrow: orchestrate full end-to-end workflows and build your own</a:t>
+              <a:rPr lang="en-US" sz="1600"/>
+              <a:t>GOAL
+Give the agent tools so it can
+act, not just answer
+YOU'LL USE
+Connector / prebuilt action
+A Power Automate flow as a tool</a:t>
+            </a:r>
+          </a:p>
+        </p:txBody>
+      </p:sp>
+      <p:sp>
+        <p:nvSpPr>
+          <p:cNvPr id="4" name="Content Placeholder 3">
+            <a:extLst>
+              <a:ext uri="{FF2B5EF4-FFF2-40B4-BE49-F238E27FC236}">
+                <a16:creationId xmlns:a16="http://schemas.microsoft.com/office/drawing/2014/main" id="{CF24EF09-D57E-0B33-E277-90D95CAA3229}"/>
+              </a:ext>
+            </a:extLst>
+          </p:cNvPr>
+          <p:cNvSpPr>
+            <a:spLocks noGrp="1"/>
+          </p:cNvSpPr>
+          <p:nvPr>
+            <p:ph sz="half" idx="2"/>
+          </p:nvPr>
+        </p:nvSpPr>
+        <p:spPr/>
+        <p:txBody>
+          <a:bodyPr>
+            <a:normAutofit/>
+          </a:bodyPr>
+          <a:lstStyle/>
+          <a:p>
+            <a:r>
+              <a:rPr lang="en-US" sz="1600"/>
+              <a:t>STEPS
+1.  Open the Tools tab, add a tool
+2.  Add a connector action (e.g. send email)
+3.  Describe when the agent should use it
+4.  Or add a flow as a tool with inputs
+5.  Test the agent performing the action</a:t>
             </a:r>
           </a:p>
         </p:txBody>
@@ -9762,7 +9834,7 @@
     </p:spTree>
     <p:extLst>
       <p:ext uri="{BB962C8B-B14F-4D97-AF65-F5344CB8AC3E}">
-        <p14:creationId xmlns:p14="http://schemas.microsoft.com/office/powerpoint/2010/main" val="4075740085"/>
+        <p14:creationId xmlns:p14="http://schemas.microsoft.com/office/powerpoint/2010/main" val="1750854078"/>
       </p:ext>
     </p:extLst>
   </p:cSld>
@@ -9794,7 +9866,7 @@
           <p:cNvPr id="2" name="Title 1">
             <a:extLst>
               <a:ext uri="{FF2B5EF4-FFF2-40B4-BE49-F238E27FC236}">
-                <a16:creationId xmlns:a16="http://schemas.microsoft.com/office/drawing/2014/main" id="{8D0D72E3-AE14-8F81-2F0B-9E2919A2FE95}"/>
+                <a16:creationId xmlns:a16="http://schemas.microsoft.com/office/drawing/2014/main" id="{571666CC-AAE9-06B8-D1A6-1E5F90632537}"/>
               </a:ext>
             </a:extLst>
           </p:cNvPr>
@@ -9812,25 +9884,25 @@
           <a:p>
             <a:r>
               <a:rPr lang="en-US"/>
-              <a:t>Day 3 — End-to-End Automation &amp; Workshop</a:t>
-            </a:r>
-          </a:p>
-        </p:txBody>
-      </p:sp>
-      <p:sp>
-        <p:nvSpPr>
-          <p:cNvPr id="3" name="Text Placeholder 2">
-            <a:extLst>
-              <a:ext uri="{FF2B5EF4-FFF2-40B4-BE49-F238E27FC236}">
-                <a16:creationId xmlns:a16="http://schemas.microsoft.com/office/drawing/2014/main" id="{8FC80A94-63CC-BC3F-A555-2C76B6CB5E99}"/>
-              </a:ext>
-            </a:extLst>
-          </p:cNvPr>
-          <p:cNvSpPr>
-            <a:spLocks noGrp="1"/>
-          </p:cNvSpPr>
-          <p:nvPr>
-            <p:ph type="body" idx="1"/>
+              <a:t>Lab 9 — Sales Enquiry Assistant</a:t>
+            </a:r>
+          </a:p>
+        </p:txBody>
+      </p:sp>
+      <p:sp>
+        <p:nvSpPr>
+          <p:cNvPr id="3" name="Content Placeholder 2">
+            <a:extLst>
+              <a:ext uri="{FF2B5EF4-FFF2-40B4-BE49-F238E27FC236}">
+                <a16:creationId xmlns:a16="http://schemas.microsoft.com/office/drawing/2014/main" id="{14102613-EFF2-DF81-651A-F3779CF9FC37}"/>
+              </a:ext>
+            </a:extLst>
+          </p:cNvPr>
+          <p:cNvSpPr>
+            <a:spLocks noGrp="1"/>
+          </p:cNvSpPr>
+          <p:nvPr>
+            <p:ph sz="half" idx="1"/>
           </p:nvPr>
         </p:nvSpPr>
         <p:spPr/>
@@ -9841,12 +9913,48 @@
           <a:lstStyle/>
           <a:p>
             <a:r>
-              <a:rPr lang="en-US" sz="1800" b="1">
-                <a:solidFill>
-                  <a:srgbClr val="7C3AED"/>
-                </a:solidFill>
-              </a:rPr>
-              <a:t>Modules 4 &amp; 5  ·  Tie it all together, then build your own</a:t>
+              <a:rPr lang="en-US" sz="1600"/>
+              <a:t>GOAL
+An agent that captures sales enquiries
+as structured fields
+YOU'LL USE
+Copilot Studio agent
+A topic with Ask-a-question nodes</a:t>
+            </a:r>
+          </a:p>
+        </p:txBody>
+      </p:sp>
+      <p:sp>
+        <p:nvSpPr>
+          <p:cNvPr id="4" name="Content Placeholder 3">
+            <a:extLst>
+              <a:ext uri="{FF2B5EF4-FFF2-40B4-BE49-F238E27FC236}">
+                <a16:creationId xmlns:a16="http://schemas.microsoft.com/office/drawing/2014/main" id="{CF24EF09-D57E-0B33-E277-90D95CAA3229}"/>
+              </a:ext>
+            </a:extLst>
+          </p:cNvPr>
+          <p:cNvSpPr>
+            <a:spLocks noGrp="1"/>
+          </p:cNvSpPr>
+          <p:nvPr>
+            <p:ph sz="half" idx="2"/>
+          </p:nvPr>
+        </p:nvSpPr>
+        <p:spPr/>
+        <p:txBody>
+          <a:bodyPr>
+            <a:normAutofit/>
+          </a:bodyPr>
+          <a:lstStyle/>
+          <a:p>
+            <a:r>
+              <a:rPr lang="en-US" sz="1600"/>
+              <a:t>STEPS
+1.  Create the Sales Enquiry Assistant agent
+2.  Add a "New Sales Enquiry" topic — the agent chooses it from its description
+3.  Ask-a-question nodes save Name, Company, Product, Quantity
+4.  Show a structured summary of all four variables
+5.  Test — Quantity uses Identify = Number, so text re-asks</a:t>
             </a:r>
           </a:p>
         </p:txBody>
@@ -9854,7 +9962,7 @@
     </p:spTree>
     <p:extLst>
       <p:ext uri="{BB962C8B-B14F-4D97-AF65-F5344CB8AC3E}">
-        <p14:creationId xmlns:p14="http://schemas.microsoft.com/office/powerpoint/2010/main" val="4182612005"/>
+        <p14:creationId xmlns:p14="http://schemas.microsoft.com/office/powerpoint/2010/main" val="1750854078"/>
       </p:ext>
     </p:extLst>
   </p:cSld>
@@ -9978,7 +10086,7 @@
           <p:cNvPr id="2" name="Title 1">
             <a:extLst>
               <a:ext uri="{FF2B5EF4-FFF2-40B4-BE49-F238E27FC236}">
-                <a16:creationId xmlns:a16="http://schemas.microsoft.com/office/drawing/2014/main" id="{E26D960F-5148-1E72-EDBD-9C1537F8039B}"/>
+                <a16:creationId xmlns:a16="http://schemas.microsoft.com/office/drawing/2014/main" id="{9C66D420-67FD-D03D-5F8F-5EA8E9E3A26D}"/>
               </a:ext>
             </a:extLst>
           </p:cNvPr>
@@ -9996,25 +10104,25 @@
           <a:p>
             <a:r>
               <a:rPr lang="en-US"/>
-              <a:t>Module 4 · End-to-End Workflow Automation</a:t>
-            </a:r>
-          </a:p>
-        </p:txBody>
-      </p:sp>
-      <p:sp>
-        <p:nvSpPr>
-          <p:cNvPr id="3" name="Text Placeholder 2">
-            <a:extLst>
-              <a:ext uri="{FF2B5EF4-FFF2-40B4-BE49-F238E27FC236}">
-                <a16:creationId xmlns:a16="http://schemas.microsoft.com/office/drawing/2014/main" id="{A96082DC-522E-9A10-168E-F1A5C96839D5}"/>
-              </a:ext>
-            </a:extLst>
-          </p:cNvPr>
-          <p:cNvSpPr>
-            <a:spLocks noGrp="1"/>
-          </p:cNvSpPr>
-          <p:nvPr>
-            <p:ph type="body" idx="1"/>
+              <a:t>Lab 10 — Procurement Request Workflow</a:t>
+            </a:r>
+          </a:p>
+        </p:txBody>
+      </p:sp>
+      <p:sp>
+        <p:nvSpPr>
+          <p:cNvPr id="3" name="Content Placeholder 2">
+            <a:extLst>
+              <a:ext uri="{FF2B5EF4-FFF2-40B4-BE49-F238E27FC236}">
+                <a16:creationId xmlns:a16="http://schemas.microsoft.com/office/drawing/2014/main" id="{825E4BD2-D173-5808-0363-F77B7D682F97}"/>
+              </a:ext>
+            </a:extLst>
+          </p:cNvPr>
+          <p:cNvSpPr>
+            <a:spLocks noGrp="1"/>
+          </p:cNvSpPr>
+          <p:nvPr>
+            <p:ph sz="half" idx="1"/>
           </p:nvPr>
         </p:nvSpPr>
         <p:spPr/>
@@ -10025,12 +10133,48 @@
           <a:lstStyle/>
           <a:p>
             <a:r>
-              <a:rPr lang="en-US" sz="1800" b="1">
-                <a:solidFill>
-                  <a:srgbClr val="7C3AED"/>
-                </a:solidFill>
-              </a:rPr>
-              <a:t>Orchestrate agents and flows into complete business processes</a:t>
+              <a:rPr lang="en-US" sz="1600"/>
+              <a:t>GOAL
+An agent that takes procurement requests
+and starts an approval flow
+YOU'LL USE
+Copilot Studio agent
+A Power Automate flow (approval)</a:t>
+            </a:r>
+          </a:p>
+        </p:txBody>
+      </p:sp>
+      <p:sp>
+        <p:nvSpPr>
+          <p:cNvPr id="4" name="Content Placeholder 3">
+            <a:extLst>
+              <a:ext uri="{FF2B5EF4-FFF2-40B4-BE49-F238E27FC236}">
+                <a16:creationId xmlns:a16="http://schemas.microsoft.com/office/drawing/2014/main" id="{2BAEDEC7-32E6-5E4A-EA59-F2C89EC604AF}"/>
+              </a:ext>
+            </a:extLst>
+          </p:cNvPr>
+          <p:cNvSpPr>
+            <a:spLocks noGrp="1"/>
+          </p:cNvSpPr>
+          <p:nvPr>
+            <p:ph sz="half" idx="2"/>
+          </p:nvPr>
+        </p:nvSpPr>
+        <p:spPr/>
+        <p:txBody>
+          <a:bodyPr>
+            <a:normAutofit/>
+          </a:bodyPr>
+          <a:lstStyle/>
+          <a:p>
+            <a:r>
+              <a:rPr lang="en-US" sz="1600"/>
+              <a:t>STEPS
+1.  Build an agent to collect request details
+2.  Create a flow with an approval step
+3.  Connect the flow as an agent action
+4.  Pass the request fields into the flow
+5.  Test end-to-end: request → approval</a:t>
             </a:r>
           </a:p>
         </p:txBody>
@@ -10038,7 +10182,7 @@
     </p:spTree>
     <p:extLst>
       <p:ext uri="{BB962C8B-B14F-4D97-AF65-F5344CB8AC3E}">
-        <p14:creationId xmlns:p14="http://schemas.microsoft.com/office/powerpoint/2010/main" val="2716757608"/>
+        <p14:creationId xmlns:p14="http://schemas.microsoft.com/office/powerpoint/2010/main" val="1113679174"/>
       </p:ext>
     </p:extLst>
   </p:cSld>
@@ -10070,7 +10214,7 @@
           <p:cNvPr id="2" name="Title 1">
             <a:extLst>
               <a:ext uri="{FF2B5EF4-FFF2-40B4-BE49-F238E27FC236}">
-                <a16:creationId xmlns:a16="http://schemas.microsoft.com/office/drawing/2014/main" id="{A69642F8-062B-35D2-EF06-816F41307EAB}"/>
+                <a16:creationId xmlns:a16="http://schemas.microsoft.com/office/drawing/2014/main" id="{B3821669-B5EA-1FB5-752E-D48BE161B1BA}"/>
               </a:ext>
             </a:extLst>
           </p:cNvPr>
@@ -10088,7 +10232,7 @@
           <a:p>
             <a:r>
               <a:rPr lang="en-US"/>
-              <a:t>Agents + Power Automate, End to End</a:t>
+              <a:t>Lab 11 — Automated Response Generation</a:t>
             </a:r>
           </a:p>
         </p:txBody>
@@ -10098,15 +10242,15 @@
           <p:cNvPr id="3" name="Content Placeholder 2">
             <a:extLst>
               <a:ext uri="{FF2B5EF4-FFF2-40B4-BE49-F238E27FC236}">
-                <a16:creationId xmlns:a16="http://schemas.microsoft.com/office/drawing/2014/main" id="{28B2DB7E-1F19-06E1-B801-490E19E100EA}"/>
-              </a:ext>
-            </a:extLst>
-          </p:cNvPr>
-          <p:cNvSpPr>
-            <a:spLocks noGrp="1"/>
-          </p:cNvSpPr>
-          <p:nvPr>
-            <p:ph idx="1"/>
+                <a16:creationId xmlns:a16="http://schemas.microsoft.com/office/drawing/2014/main" id="{B8E3914F-01D2-1AE3-D426-DDB8BF39C820}"/>
+              </a:ext>
+            </a:extLst>
+          </p:cNvPr>
+          <p:cNvSpPr>
+            <a:spLocks noGrp="1"/>
+          </p:cNvSpPr>
+          <p:nvPr>
+            <p:ph sz="half" idx="1"/>
           </p:nvPr>
         </p:nvSpPr>
         <p:spPr/>
@@ -10117,12 +10261,48 @@
           <a:lstStyle/>
           <a:p>
             <a:r>
-              <a:rPr lang="en-US" sz="1800"/>
-              <a:t>The agent is the brain; the flow is the hands
-Agent captures intent and structured data from a person
-Flow carries out the steps across Excel, Outlook, Teams and approvals
-Together they cover a process from first contact to final result
-One conversation can trigger a whole chain of work</a:t>
+              <a:rPr lang="en-US" sz="1600"/>
+              <a:t>GOAL
+An agent that drafts a tailored reply
+from the captured details
+YOU'LL USE
+Copilot Studio agent
+Send email action</a:t>
+            </a:r>
+          </a:p>
+        </p:txBody>
+      </p:sp>
+      <p:sp>
+        <p:nvSpPr>
+          <p:cNvPr id="4" name="Content Placeholder 3">
+            <a:extLst>
+              <a:ext uri="{FF2B5EF4-FFF2-40B4-BE49-F238E27FC236}">
+                <a16:creationId xmlns:a16="http://schemas.microsoft.com/office/drawing/2014/main" id="{29E62AEB-C862-B252-D0A2-8B709D2C9537}"/>
+              </a:ext>
+            </a:extLst>
+          </p:cNvPr>
+          <p:cNvSpPr>
+            <a:spLocks noGrp="1"/>
+          </p:cNvSpPr>
+          <p:nvPr>
+            <p:ph sz="half" idx="2"/>
+          </p:nvPr>
+        </p:nvSpPr>
+        <p:spPr/>
+        <p:txBody>
+          <a:bodyPr>
+            <a:normAutofit/>
+          </a:bodyPr>
+          <a:lstStyle/>
+          <a:p>
+            <a:r>
+              <a:rPr lang="en-US" sz="1600"/>
+              <a:t>STEPS
+1.  Reuse the enquiry details from Lab 9
+2.  Prompt the agent to draft a reply
+3.  Keep the tone professional and on-brand
+4.  Send the draft via a flow
+5.  Review, refine the prompt, repeat</a:t>
             </a:r>
           </a:p>
         </p:txBody>
@@ -10130,7 +10310,7 @@
     </p:spTree>
     <p:extLst>
       <p:ext uri="{BB962C8B-B14F-4D97-AF65-F5344CB8AC3E}">
-        <p14:creationId xmlns:p14="http://schemas.microsoft.com/office/powerpoint/2010/main" val="2380287581"/>
+        <p14:creationId xmlns:p14="http://schemas.microsoft.com/office/powerpoint/2010/main" val="3368437237"/>
       </p:ext>
     </p:extLst>
   </p:cSld>
@@ -10162,7 +10342,7 @@
           <p:cNvPr id="2" name="Title 1">
             <a:extLst>
               <a:ext uri="{FF2B5EF4-FFF2-40B4-BE49-F238E27FC236}">
-                <a16:creationId xmlns:a16="http://schemas.microsoft.com/office/drawing/2014/main" id="{E20FE00E-F573-E3F6-A34A-167439CDE4F6}"/>
+                <a16:creationId xmlns:a16="http://schemas.microsoft.com/office/drawing/2014/main" id="{59720534-FF42-5EE2-C52D-D6A875AC7764}"/>
               </a:ext>
             </a:extLst>
           </p:cNvPr>
@@ -10180,7 +10360,7 @@
           <a:p>
             <a:r>
               <a:rPr lang="en-US"/>
-              <a:t>Workflow Orchestration</a:t>
+              <a:t>Testing &amp; Debugging Agents</a:t>
             </a:r>
           </a:p>
         </p:txBody>
@@ -10190,7 +10370,7 @@
           <p:cNvPr id="3" name="Content Placeholder 2">
             <a:extLst>
               <a:ext uri="{FF2B5EF4-FFF2-40B4-BE49-F238E27FC236}">
-                <a16:creationId xmlns:a16="http://schemas.microsoft.com/office/drawing/2014/main" id="{EDAA4994-88EE-B72B-B57C-A49674FFE9C9}"/>
+                <a16:creationId xmlns:a16="http://schemas.microsoft.com/office/drawing/2014/main" id="{A4B4DC5E-4545-01F1-D1EA-4BEFEB1FDD67}"/>
               </a:ext>
             </a:extLst>
           </p:cNvPr>
@@ -10210,11 +10390,11 @@
           <a:p>
             <a:r>
               <a:rPr lang="en-US" sz="1800"/>
-              <a:t>Orchestration = coordinating multiple steps and systems in order
-Sequence steps: do this, then that, then notify
-Branch with conditions: approved vs rejected, high vs low value
-Chain flows: one flow's output starts the next
-The result: a reliable process that runs itself</a:t>
+              <a:t>Test in the chat panel with realistic, messy inputs
+Check the output format is consistent every time
+Trace flow runs to see exactly what data passed through
+Refine the prompt when answers drift or fields go missing
+Handle the edge cases: missing info, unexpected questions</a:t>
             </a:r>
           </a:p>
         </p:txBody>
@@ -10222,7 +10402,7 @@
     </p:spTree>
     <p:extLst>
       <p:ext uri="{BB962C8B-B14F-4D97-AF65-F5344CB8AC3E}">
-        <p14:creationId xmlns:p14="http://schemas.microsoft.com/office/powerpoint/2010/main" val="188657722"/>
+        <p14:creationId xmlns:p14="http://schemas.microsoft.com/office/powerpoint/2010/main" val="1415766186"/>
       </p:ext>
     </p:extLst>
   </p:cSld>
@@ -10254,7 +10434,7 @@
           <p:cNvPr id="2" name="Title 1">
             <a:extLst>
               <a:ext uri="{FF2B5EF4-FFF2-40B4-BE49-F238E27FC236}">
-                <a16:creationId xmlns:a16="http://schemas.microsoft.com/office/drawing/2014/main" id="{6C3F139A-DEC4-E6F4-14A9-C02BF97686FE}"/>
+                <a16:creationId xmlns:a16="http://schemas.microsoft.com/office/drawing/2014/main" id="{81445806-BBA9-BACB-9A42-A0C6831C1AB7}"/>
               </a:ext>
             </a:extLst>
           </p:cNvPr>
@@ -10272,7 +10452,7 @@
           <a:p>
             <a:r>
               <a:rPr lang="en-US"/>
-              <a:t>Orchestration Patterns</a:t>
+              <a:t>Day 2 Recap</a:t>
             </a:r>
           </a:p>
         </p:txBody>
@@ -10282,7 +10462,7 @@
           <p:cNvPr id="3" name="Content Placeholder 2">
             <a:extLst>
               <a:ext uri="{FF2B5EF4-FFF2-40B4-BE49-F238E27FC236}">
-                <a16:creationId xmlns:a16="http://schemas.microsoft.com/office/drawing/2014/main" id="{38B95C8D-CF00-99DC-110F-A2578CA3B30D}"/>
+                <a16:creationId xmlns:a16="http://schemas.microsoft.com/office/drawing/2014/main" id="{374A3DCA-15CA-E41E-DB93-4933698BD9C8}"/>
               </a:ext>
             </a:extLst>
           </p:cNvPr>
@@ -10302,11 +10482,11 @@
           <a:p>
             <a:r>
               <a:rPr lang="en-US" sz="1800"/>
-              <a:t>Capture → Log → Notify — record an event and tell the team
-Submit → Approve → Act — route for sign-off, then proceed
-Request → Route → Fulfil — send to the right owner and complete
-Each pattern reuses the same triggers and actions you've learned
-Most business processes are a combination of these</a:t>
+              <a:t>Copilot Studio builds low-code AI business agents
+Good prompts produce structured, predictable output
+Agents connect to Power Automate to take real action
+You created an agent, added knowledge and tools, then built a sales assistant, a procurement agent and a response generator
+Tomorrow: orchestrate full end-to-end workflows and build your own</a:t>
             </a:r>
           </a:p>
         </p:txBody>
@@ -10314,7 +10494,7 @@
     </p:spTree>
     <p:extLst>
       <p:ext uri="{BB962C8B-B14F-4D97-AF65-F5344CB8AC3E}">
-        <p14:creationId xmlns:p14="http://schemas.microsoft.com/office/powerpoint/2010/main" val="4284843206"/>
+        <p14:creationId xmlns:p14="http://schemas.microsoft.com/office/powerpoint/2010/main" val="4075740085"/>
       </p:ext>
     </p:extLst>
   </p:cSld>
@@ -10346,7 +10526,7 @@
           <p:cNvPr id="2" name="Title 1">
             <a:extLst>
               <a:ext uri="{FF2B5EF4-FFF2-40B4-BE49-F238E27FC236}">
-                <a16:creationId xmlns:a16="http://schemas.microsoft.com/office/drawing/2014/main" id="{B458143E-40F3-DFC6-37A6-DA30F78830E6}"/>
+                <a16:creationId xmlns:a16="http://schemas.microsoft.com/office/drawing/2014/main" id="{8D0D72E3-AE14-8F81-2F0B-9E2919A2FE95}"/>
               </a:ext>
             </a:extLst>
           </p:cNvPr>
@@ -10364,25 +10544,25 @@
           <a:p>
             <a:r>
               <a:rPr lang="en-US"/>
-              <a:t>Managing Outputs &amp; Next Steps</a:t>
-            </a:r>
-          </a:p>
-        </p:txBody>
-      </p:sp>
-      <p:sp>
-        <p:nvSpPr>
-          <p:cNvPr id="3" name="Content Placeholder 2">
-            <a:extLst>
-              <a:ext uri="{FF2B5EF4-FFF2-40B4-BE49-F238E27FC236}">
-                <a16:creationId xmlns:a16="http://schemas.microsoft.com/office/drawing/2014/main" id="{62AA70CD-152D-D02C-E980-242A19DE303F}"/>
-              </a:ext>
-            </a:extLst>
-          </p:cNvPr>
-          <p:cNvSpPr>
-            <a:spLocks noGrp="1"/>
-          </p:cNvSpPr>
-          <p:nvPr>
-            <p:ph idx="1"/>
+              <a:t>Day 3 — End-to-End Automation &amp; Workshop</a:t>
+            </a:r>
+          </a:p>
+        </p:txBody>
+      </p:sp>
+      <p:sp>
+        <p:nvSpPr>
+          <p:cNvPr id="3" name="Text Placeholder 2">
+            <a:extLst>
+              <a:ext uri="{FF2B5EF4-FFF2-40B4-BE49-F238E27FC236}">
+                <a16:creationId xmlns:a16="http://schemas.microsoft.com/office/drawing/2014/main" id="{8FC80A94-63CC-BC3F-A555-2C76B6CB5E99}"/>
+              </a:ext>
+            </a:extLst>
+          </p:cNvPr>
+          <p:cNvSpPr>
+            <a:spLocks noGrp="1"/>
+          </p:cNvSpPr>
+          <p:nvPr>
+            <p:ph type="body" idx="1"/>
           </p:nvPr>
         </p:nvSpPr>
         <p:spPr/>
@@ -10393,12 +10573,12 @@
           <a:lstStyle/>
           <a:p>
             <a:r>
-              <a:rPr lang="en-US" sz="1800"/>
-              <a:t>Decide what each workflow should leave behind: a record, an email, a decision
-Make outputs traceable — a log row or reference number
-Feed one workflow's output into the next as input
-Notify the right people at the right moment
-Review logs regularly to spot bottlenecks and improve</a:t>
+              <a:rPr lang="en-US" sz="1800" b="1">
+                <a:solidFill>
+                  <a:srgbClr val="7C3AED"/>
+                </a:solidFill>
+              </a:rPr>
+              <a:t>Modules 4 &amp; 5  ·  Tie it all together, then build your own</a:t>
             </a:r>
           </a:p>
         </p:txBody>
@@ -10406,7 +10586,7 @@
     </p:spTree>
     <p:extLst>
       <p:ext uri="{BB962C8B-B14F-4D97-AF65-F5344CB8AC3E}">
-        <p14:creationId xmlns:p14="http://schemas.microsoft.com/office/powerpoint/2010/main" val="1712158698"/>
+        <p14:creationId xmlns:p14="http://schemas.microsoft.com/office/powerpoint/2010/main" val="4182612005"/>
       </p:ext>
     </p:extLst>
   </p:cSld>
@@ -10438,7 +10618,7 @@
           <p:cNvPr id="2" name="Title 1">
             <a:extLst>
               <a:ext uri="{FF2B5EF4-FFF2-40B4-BE49-F238E27FC236}">
-                <a16:creationId xmlns:a16="http://schemas.microsoft.com/office/drawing/2014/main" id="{A5EF1490-BC6F-3E78-6615-320E2385856F}"/>
+                <a16:creationId xmlns:a16="http://schemas.microsoft.com/office/drawing/2014/main" id="{E26D960F-5148-1E72-EDBD-9C1537F8039B}"/>
               </a:ext>
             </a:extLst>
           </p:cNvPr>
@@ -10456,25 +10636,25 @@
           <a:p>
             <a:r>
               <a:rPr lang="en-US"/>
-              <a:t>Error Handling &amp; Monitoring</a:t>
-            </a:r>
-          </a:p>
-        </p:txBody>
-      </p:sp>
-      <p:sp>
-        <p:nvSpPr>
-          <p:cNvPr id="3" name="Content Placeholder 2">
-            <a:extLst>
-              <a:ext uri="{FF2B5EF4-FFF2-40B4-BE49-F238E27FC236}">
-                <a16:creationId xmlns:a16="http://schemas.microsoft.com/office/drawing/2014/main" id="{1EF55AE5-B915-D401-BC5F-2C76C93FC2FD}"/>
-              </a:ext>
-            </a:extLst>
-          </p:cNvPr>
-          <p:cNvSpPr>
-            <a:spLocks noGrp="1"/>
-          </p:cNvSpPr>
-          <p:nvPr>
-            <p:ph idx="1"/>
+              <a:t>Module 4 · End-to-End Workflow Automation</a:t>
+            </a:r>
+          </a:p>
+        </p:txBody>
+      </p:sp>
+      <p:sp>
+        <p:nvSpPr>
+          <p:cNvPr id="3" name="Text Placeholder 2">
+            <a:extLst>
+              <a:ext uri="{FF2B5EF4-FFF2-40B4-BE49-F238E27FC236}">
+                <a16:creationId xmlns:a16="http://schemas.microsoft.com/office/drawing/2014/main" id="{A96082DC-522E-9A10-168E-F1A5C96839D5}"/>
+              </a:ext>
+            </a:extLst>
+          </p:cNvPr>
+          <p:cNvSpPr>
+            <a:spLocks noGrp="1"/>
+          </p:cNvSpPr>
+          <p:nvPr>
+            <p:ph type="body" idx="1"/>
           </p:nvPr>
         </p:nvSpPr>
         <p:spPr/>
@@ -10485,12 +10665,12 @@
           <a:lstStyle/>
           <a:p>
             <a:r>
-              <a:rPr lang="en-US" sz="1800"/>
-              <a:t>Things fail — plan for it so the process stays reliable
-Add conditions to catch missing or invalid data
-Configure run-after steps to handle failures gracefully
-Notify someone when a flow errors — don't fail silently
-Watch the run history to monitor health and fix issues fast</a:t>
+              <a:rPr lang="en-US" sz="1800" b="1">
+                <a:solidFill>
+                  <a:srgbClr val="7C3AED"/>
+                </a:solidFill>
+              </a:rPr>
+              <a:t>Orchestrate agents and flows into complete business processes</a:t>
             </a:r>
           </a:p>
         </p:txBody>
@@ -10498,7 +10678,7 @@
     </p:spTree>
     <p:extLst>
       <p:ext uri="{BB962C8B-B14F-4D97-AF65-F5344CB8AC3E}">
-        <p14:creationId xmlns:p14="http://schemas.microsoft.com/office/powerpoint/2010/main" val="2939944548"/>
+        <p14:creationId xmlns:p14="http://schemas.microsoft.com/office/powerpoint/2010/main" val="2716757608"/>
       </p:ext>
     </p:extLst>
   </p:cSld>
@@ -10530,6 +10710,558 @@
           <p:cNvPr id="2" name="Title 1">
             <a:extLst>
               <a:ext uri="{FF2B5EF4-FFF2-40B4-BE49-F238E27FC236}">
+                <a16:creationId xmlns:a16="http://schemas.microsoft.com/office/drawing/2014/main" id="{A69642F8-062B-35D2-EF06-816F41307EAB}"/>
+              </a:ext>
+            </a:extLst>
+          </p:cNvPr>
+          <p:cNvSpPr>
+            <a:spLocks noGrp="1"/>
+          </p:cNvSpPr>
+          <p:nvPr>
+            <p:ph type="title"/>
+          </p:nvPr>
+        </p:nvSpPr>
+        <p:spPr/>
+        <p:txBody>
+          <a:bodyPr/>
+          <a:lstStyle/>
+          <a:p>
+            <a:r>
+              <a:rPr lang="en-US"/>
+              <a:t>Agents + Power Automate, End to End</a:t>
+            </a:r>
+          </a:p>
+        </p:txBody>
+      </p:sp>
+      <p:sp>
+        <p:nvSpPr>
+          <p:cNvPr id="3" name="Content Placeholder 2">
+            <a:extLst>
+              <a:ext uri="{FF2B5EF4-FFF2-40B4-BE49-F238E27FC236}">
+                <a16:creationId xmlns:a16="http://schemas.microsoft.com/office/drawing/2014/main" id="{28B2DB7E-1F19-06E1-B801-490E19E100EA}"/>
+              </a:ext>
+            </a:extLst>
+          </p:cNvPr>
+          <p:cNvSpPr>
+            <a:spLocks noGrp="1"/>
+          </p:cNvSpPr>
+          <p:nvPr>
+            <p:ph idx="1"/>
+          </p:nvPr>
+        </p:nvSpPr>
+        <p:spPr/>
+        <p:txBody>
+          <a:bodyPr>
+            <a:normAutofit/>
+          </a:bodyPr>
+          <a:lstStyle/>
+          <a:p>
+            <a:r>
+              <a:rPr lang="en-US" sz="1800"/>
+              <a:t>The agent is the brain; the flow is the hands
+Agent captures intent and structured data from a person
+Flow carries out the steps across Excel, Outlook, Teams and approvals
+Together they cover a process from first contact to final result
+One conversation can trigger a whole chain of work</a:t>
+            </a:r>
+          </a:p>
+        </p:txBody>
+      </p:sp>
+    </p:spTree>
+    <p:extLst>
+      <p:ext uri="{BB962C8B-B14F-4D97-AF65-F5344CB8AC3E}">
+        <p14:creationId xmlns:p14="http://schemas.microsoft.com/office/powerpoint/2010/main" val="2380287581"/>
+      </p:ext>
+    </p:extLst>
+  </p:cSld>
+  <p:clrMapOvr>
+    <a:masterClrMapping/>
+  </p:clrMapOvr>
+</p:sld>
+</file>
+
+<file path=ppt/slides/slide67.xml><?xml version="1.0" encoding="utf-8"?>
+<p:sld xmlns:a="http://schemas.openxmlformats.org/drawingml/2006/main" xmlns:r="http://schemas.openxmlformats.org/officeDocument/2006/relationships" xmlns:p="http://schemas.openxmlformats.org/presentationml/2006/main">
+  <p:cSld>
+    <p:spTree>
+      <p:nvGrpSpPr>
+        <p:cNvPr id="1" name=""/>
+        <p:cNvGrpSpPr/>
+        <p:nvPr/>
+      </p:nvGrpSpPr>
+      <p:grpSpPr>
+        <a:xfrm>
+          <a:off x="0" y="0"/>
+          <a:ext cx="0" cy="0"/>
+          <a:chOff x="0" y="0"/>
+          <a:chExt cx="0" cy="0"/>
+        </a:xfrm>
+      </p:grpSpPr>
+      <p:sp>
+        <p:nvSpPr>
+          <p:cNvPr id="2" name="Title 1">
+            <a:extLst>
+              <a:ext uri="{FF2B5EF4-FFF2-40B4-BE49-F238E27FC236}">
+                <a16:creationId xmlns:a16="http://schemas.microsoft.com/office/drawing/2014/main" id="{E20FE00E-F573-E3F6-A34A-167439CDE4F6}"/>
+              </a:ext>
+            </a:extLst>
+          </p:cNvPr>
+          <p:cNvSpPr>
+            <a:spLocks noGrp="1"/>
+          </p:cNvSpPr>
+          <p:nvPr>
+            <p:ph type="title"/>
+          </p:nvPr>
+        </p:nvSpPr>
+        <p:spPr/>
+        <p:txBody>
+          <a:bodyPr/>
+          <a:lstStyle/>
+          <a:p>
+            <a:r>
+              <a:rPr lang="en-US"/>
+              <a:t>Workflow Orchestration</a:t>
+            </a:r>
+          </a:p>
+        </p:txBody>
+      </p:sp>
+      <p:sp>
+        <p:nvSpPr>
+          <p:cNvPr id="3" name="Content Placeholder 2">
+            <a:extLst>
+              <a:ext uri="{FF2B5EF4-FFF2-40B4-BE49-F238E27FC236}">
+                <a16:creationId xmlns:a16="http://schemas.microsoft.com/office/drawing/2014/main" id="{EDAA4994-88EE-B72B-B57C-A49674FFE9C9}"/>
+              </a:ext>
+            </a:extLst>
+          </p:cNvPr>
+          <p:cNvSpPr>
+            <a:spLocks noGrp="1"/>
+          </p:cNvSpPr>
+          <p:nvPr>
+            <p:ph idx="1"/>
+          </p:nvPr>
+        </p:nvSpPr>
+        <p:spPr/>
+        <p:txBody>
+          <a:bodyPr>
+            <a:normAutofit/>
+          </a:bodyPr>
+          <a:lstStyle/>
+          <a:p>
+            <a:r>
+              <a:rPr lang="en-US" sz="1800"/>
+              <a:t>Orchestration = coordinating multiple steps and systems in order
+Sequence steps: do this, then that, then notify
+Branch with conditions: approved vs rejected, high vs low value
+Chain flows: one flow's output starts the next
+The result: a reliable process that runs itself</a:t>
+            </a:r>
+          </a:p>
+        </p:txBody>
+      </p:sp>
+    </p:spTree>
+    <p:extLst>
+      <p:ext uri="{BB962C8B-B14F-4D97-AF65-F5344CB8AC3E}">
+        <p14:creationId xmlns:p14="http://schemas.microsoft.com/office/powerpoint/2010/main" val="188657722"/>
+      </p:ext>
+    </p:extLst>
+  </p:cSld>
+  <p:clrMapOvr>
+    <a:masterClrMapping/>
+  </p:clrMapOvr>
+</p:sld>
+</file>
+
+<file path=ppt/slides/slide68.xml><?xml version="1.0" encoding="utf-8"?>
+<p:sld xmlns:a="http://schemas.openxmlformats.org/drawingml/2006/main" xmlns:r="http://schemas.openxmlformats.org/officeDocument/2006/relationships" xmlns:p="http://schemas.openxmlformats.org/presentationml/2006/main">
+  <p:cSld>
+    <p:spTree>
+      <p:nvGrpSpPr>
+        <p:cNvPr id="1" name=""/>
+        <p:cNvGrpSpPr/>
+        <p:nvPr/>
+      </p:nvGrpSpPr>
+      <p:grpSpPr>
+        <a:xfrm>
+          <a:off x="0" y="0"/>
+          <a:ext cx="0" cy="0"/>
+          <a:chOff x="0" y="0"/>
+          <a:chExt cx="0" cy="0"/>
+        </a:xfrm>
+      </p:grpSpPr>
+      <p:sp>
+        <p:nvSpPr>
+          <p:cNvPr id="2" name="Title 1">
+            <a:extLst>
+              <a:ext uri="{FF2B5EF4-FFF2-40B4-BE49-F238E27FC236}">
+                <a16:creationId xmlns:a16="http://schemas.microsoft.com/office/drawing/2014/main" id="{6C3F139A-DEC4-E6F4-14A9-C02BF97686FE}"/>
+              </a:ext>
+            </a:extLst>
+          </p:cNvPr>
+          <p:cNvSpPr>
+            <a:spLocks noGrp="1"/>
+          </p:cNvSpPr>
+          <p:nvPr>
+            <p:ph type="title"/>
+          </p:nvPr>
+        </p:nvSpPr>
+        <p:spPr/>
+        <p:txBody>
+          <a:bodyPr/>
+          <a:lstStyle/>
+          <a:p>
+            <a:r>
+              <a:rPr lang="en-US"/>
+              <a:t>Orchestration Patterns</a:t>
+            </a:r>
+          </a:p>
+        </p:txBody>
+      </p:sp>
+      <p:sp>
+        <p:nvSpPr>
+          <p:cNvPr id="3" name="Content Placeholder 2">
+            <a:extLst>
+              <a:ext uri="{FF2B5EF4-FFF2-40B4-BE49-F238E27FC236}">
+                <a16:creationId xmlns:a16="http://schemas.microsoft.com/office/drawing/2014/main" id="{38B95C8D-CF00-99DC-110F-A2578CA3B30D}"/>
+              </a:ext>
+            </a:extLst>
+          </p:cNvPr>
+          <p:cNvSpPr>
+            <a:spLocks noGrp="1"/>
+          </p:cNvSpPr>
+          <p:nvPr>
+            <p:ph idx="1"/>
+          </p:nvPr>
+        </p:nvSpPr>
+        <p:spPr/>
+        <p:txBody>
+          <a:bodyPr>
+            <a:normAutofit/>
+          </a:bodyPr>
+          <a:lstStyle/>
+          <a:p>
+            <a:r>
+              <a:rPr lang="en-US" sz="1800"/>
+              <a:t>Capture → Log → Notify — record an event and tell the team
+Submit → Approve → Act — route for sign-off, then proceed
+Request → Route → Fulfil — send to the right owner and complete
+Each pattern reuses the same triggers and actions you've learned
+Most business processes are a combination of these</a:t>
+            </a:r>
+          </a:p>
+        </p:txBody>
+      </p:sp>
+    </p:spTree>
+    <p:extLst>
+      <p:ext uri="{BB962C8B-B14F-4D97-AF65-F5344CB8AC3E}">
+        <p14:creationId xmlns:p14="http://schemas.microsoft.com/office/powerpoint/2010/main" val="4284843206"/>
+      </p:ext>
+    </p:extLst>
+  </p:cSld>
+  <p:clrMapOvr>
+    <a:masterClrMapping/>
+  </p:clrMapOvr>
+</p:sld>
+</file>
+
+<file path=ppt/slides/slide69.xml><?xml version="1.0" encoding="utf-8"?>
+<p:sld xmlns:a="http://schemas.openxmlformats.org/drawingml/2006/main" xmlns:r="http://schemas.openxmlformats.org/officeDocument/2006/relationships" xmlns:p="http://schemas.openxmlformats.org/presentationml/2006/main">
+  <p:cSld>
+    <p:spTree>
+      <p:nvGrpSpPr>
+        <p:cNvPr id="1" name=""/>
+        <p:cNvGrpSpPr/>
+        <p:nvPr/>
+      </p:nvGrpSpPr>
+      <p:grpSpPr>
+        <a:xfrm>
+          <a:off x="0" y="0"/>
+          <a:ext cx="0" cy="0"/>
+          <a:chOff x="0" y="0"/>
+          <a:chExt cx="0" cy="0"/>
+        </a:xfrm>
+      </p:grpSpPr>
+      <p:sp>
+        <p:nvSpPr>
+          <p:cNvPr id="2" name="Title 1">
+            <a:extLst>
+              <a:ext uri="{FF2B5EF4-FFF2-40B4-BE49-F238E27FC236}">
+                <a16:creationId xmlns:a16="http://schemas.microsoft.com/office/drawing/2014/main" id="{B458143E-40F3-DFC6-37A6-DA30F78830E6}"/>
+              </a:ext>
+            </a:extLst>
+          </p:cNvPr>
+          <p:cNvSpPr>
+            <a:spLocks noGrp="1"/>
+          </p:cNvSpPr>
+          <p:nvPr>
+            <p:ph type="title"/>
+          </p:nvPr>
+        </p:nvSpPr>
+        <p:spPr/>
+        <p:txBody>
+          <a:bodyPr/>
+          <a:lstStyle/>
+          <a:p>
+            <a:r>
+              <a:rPr lang="en-US"/>
+              <a:t>Managing Outputs &amp; Next Steps</a:t>
+            </a:r>
+          </a:p>
+        </p:txBody>
+      </p:sp>
+      <p:sp>
+        <p:nvSpPr>
+          <p:cNvPr id="3" name="Content Placeholder 2">
+            <a:extLst>
+              <a:ext uri="{FF2B5EF4-FFF2-40B4-BE49-F238E27FC236}">
+                <a16:creationId xmlns:a16="http://schemas.microsoft.com/office/drawing/2014/main" id="{62AA70CD-152D-D02C-E980-242A19DE303F}"/>
+              </a:ext>
+            </a:extLst>
+          </p:cNvPr>
+          <p:cNvSpPr>
+            <a:spLocks noGrp="1"/>
+          </p:cNvSpPr>
+          <p:nvPr>
+            <p:ph idx="1"/>
+          </p:nvPr>
+        </p:nvSpPr>
+        <p:spPr/>
+        <p:txBody>
+          <a:bodyPr>
+            <a:normAutofit/>
+          </a:bodyPr>
+          <a:lstStyle/>
+          <a:p>
+            <a:r>
+              <a:rPr lang="en-US" sz="1800"/>
+              <a:t>Decide what each workflow should leave behind: a record, an email, a decision
+Make outputs traceable — a log row or reference number
+Feed one workflow's output into the next as input
+Notify the right people at the right moment
+Review logs regularly to spot bottlenecks and improve</a:t>
+            </a:r>
+          </a:p>
+        </p:txBody>
+      </p:sp>
+    </p:spTree>
+    <p:extLst>
+      <p:ext uri="{BB962C8B-B14F-4D97-AF65-F5344CB8AC3E}">
+        <p14:creationId xmlns:p14="http://schemas.microsoft.com/office/powerpoint/2010/main" val="1712158698"/>
+      </p:ext>
+    </p:extLst>
+  </p:cSld>
+  <p:clrMapOvr>
+    <a:masterClrMapping/>
+  </p:clrMapOvr>
+</p:sld>
+</file>
+
+<file path=ppt/slides/slide7.xml><?xml version="1.0" encoding="utf-8"?>
+<p:sld xmlns:a="http://schemas.openxmlformats.org/drawingml/2006/main" xmlns:r="http://schemas.openxmlformats.org/officeDocument/2006/relationships" xmlns:p="http://schemas.openxmlformats.org/presentationml/2006/main">
+  <p:cSld>
+    <p:spTree>
+      <p:nvGrpSpPr>
+        <p:cNvPr id="1" name=""/>
+        <p:cNvGrpSpPr/>
+        <p:nvPr/>
+      </p:nvGrpSpPr>
+      <p:grpSpPr>
+        <a:xfrm>
+          <a:off x="0" y="0"/>
+          <a:ext cx="0" cy="0"/>
+          <a:chOff x="0" y="0"/>
+          <a:chExt cx="0" cy="0"/>
+        </a:xfrm>
+      </p:grpSpPr>
+      <p:sp>
+        <p:nvSpPr>
+          <p:cNvPr id="2" name="Title 1">
+            <a:extLst>
+              <a:ext uri="{FF2B5EF4-FFF2-40B4-BE49-F238E27FC236}">
+                <a16:creationId xmlns:a16="http://schemas.microsoft.com/office/drawing/2014/main" id="{D68F3E1D-8293-17EA-02D6-126EFD28E80F}"/>
+              </a:ext>
+            </a:extLst>
+          </p:cNvPr>
+          <p:cNvSpPr>
+            <a:spLocks noGrp="1"/>
+          </p:cNvSpPr>
+          <p:nvPr>
+            <p:ph type="title"/>
+          </p:nvPr>
+        </p:nvSpPr>
+        <p:spPr/>
+        <p:txBody>
+          <a:bodyPr/>
+          <a:lstStyle/>
+          <a:p>
+            <a:r>
+              <a:rPr lang="en-US"/>
+              <a:t>What Is Business Workflow Automation?</a:t>
+            </a:r>
+          </a:p>
+        </p:txBody>
+      </p:sp>
+      <p:sp>
+        <p:nvSpPr>
+          <p:cNvPr id="3" name="Content Placeholder 2">
+            <a:extLst>
+              <a:ext uri="{FF2B5EF4-FFF2-40B4-BE49-F238E27FC236}">
+                <a16:creationId xmlns:a16="http://schemas.microsoft.com/office/drawing/2014/main" id="{635CBD14-D291-22AB-6BBC-F33D92DC2BEA}"/>
+              </a:ext>
+            </a:extLst>
+          </p:cNvPr>
+          <p:cNvSpPr>
+            <a:spLocks noGrp="1"/>
+          </p:cNvSpPr>
+          <p:nvPr>
+            <p:ph idx="1"/>
+          </p:nvPr>
+        </p:nvSpPr>
+        <p:spPr/>
+        <p:txBody>
+          <a:bodyPr>
+            <a:normAutofit/>
+          </a:bodyPr>
+          <a:lstStyle/>
+          <a:p>
+            <a:r>
+              <a:rPr lang="en-US" sz="1800"/>
+              <a:t>A workflow is a repeatable series of steps that gets work done
+Automation lets software run those steps for you
+It replaces manual, repetitive tasks — copying data, sending emails, chasing approvals
+Runs reliably and consistently, with far fewer errors
+People focus on judgement; software handles the routine</a:t>
+            </a:r>
+          </a:p>
+        </p:txBody>
+      </p:sp>
+    </p:spTree>
+    <p:extLst>
+      <p:ext uri="{BB962C8B-B14F-4D97-AF65-F5344CB8AC3E}">
+        <p14:creationId xmlns:p14="http://schemas.microsoft.com/office/powerpoint/2010/main" val="2507022519"/>
+      </p:ext>
+    </p:extLst>
+  </p:cSld>
+  <p:clrMapOvr>
+    <a:masterClrMapping/>
+  </p:clrMapOvr>
+</p:sld>
+</file>
+
+<file path=ppt/slides/slide70.xml><?xml version="1.0" encoding="utf-8"?>
+<p:sld xmlns:a="http://schemas.openxmlformats.org/drawingml/2006/main" xmlns:r="http://schemas.openxmlformats.org/officeDocument/2006/relationships" xmlns:p="http://schemas.openxmlformats.org/presentationml/2006/main">
+  <p:cSld>
+    <p:spTree>
+      <p:nvGrpSpPr>
+        <p:cNvPr id="1" name=""/>
+        <p:cNvGrpSpPr/>
+        <p:nvPr/>
+      </p:nvGrpSpPr>
+      <p:grpSpPr>
+        <a:xfrm>
+          <a:off x="0" y="0"/>
+          <a:ext cx="0" cy="0"/>
+          <a:chOff x="0" y="0"/>
+          <a:chExt cx="0" cy="0"/>
+        </a:xfrm>
+      </p:grpSpPr>
+      <p:sp>
+        <p:nvSpPr>
+          <p:cNvPr id="2" name="Title 1">
+            <a:extLst>
+              <a:ext uri="{FF2B5EF4-FFF2-40B4-BE49-F238E27FC236}">
+                <a16:creationId xmlns:a16="http://schemas.microsoft.com/office/drawing/2014/main" id="{A5EF1490-BC6F-3E78-6615-320E2385856F}"/>
+              </a:ext>
+            </a:extLst>
+          </p:cNvPr>
+          <p:cNvSpPr>
+            <a:spLocks noGrp="1"/>
+          </p:cNvSpPr>
+          <p:nvPr>
+            <p:ph type="title"/>
+          </p:nvPr>
+        </p:nvSpPr>
+        <p:spPr/>
+        <p:txBody>
+          <a:bodyPr/>
+          <a:lstStyle/>
+          <a:p>
+            <a:r>
+              <a:rPr lang="en-US"/>
+              <a:t>Error Handling &amp; Monitoring</a:t>
+            </a:r>
+          </a:p>
+        </p:txBody>
+      </p:sp>
+      <p:sp>
+        <p:nvSpPr>
+          <p:cNvPr id="3" name="Content Placeholder 2">
+            <a:extLst>
+              <a:ext uri="{FF2B5EF4-FFF2-40B4-BE49-F238E27FC236}">
+                <a16:creationId xmlns:a16="http://schemas.microsoft.com/office/drawing/2014/main" id="{1EF55AE5-B915-D401-BC5F-2C76C93FC2FD}"/>
+              </a:ext>
+            </a:extLst>
+          </p:cNvPr>
+          <p:cNvSpPr>
+            <a:spLocks noGrp="1"/>
+          </p:cNvSpPr>
+          <p:nvPr>
+            <p:ph idx="1"/>
+          </p:nvPr>
+        </p:nvSpPr>
+        <p:spPr/>
+        <p:txBody>
+          <a:bodyPr>
+            <a:normAutofit/>
+          </a:bodyPr>
+          <a:lstStyle/>
+          <a:p>
+            <a:r>
+              <a:rPr lang="en-US" sz="1800"/>
+              <a:t>Things fail — plan for it so the process stays reliable
+Add conditions to catch missing or invalid data
+Configure run-after steps to handle failures gracefully
+Notify someone when a flow errors — don't fail silently
+Watch the run history to monitor health and fix issues fast</a:t>
+            </a:r>
+          </a:p>
+        </p:txBody>
+      </p:sp>
+    </p:spTree>
+    <p:extLst>
+      <p:ext uri="{BB962C8B-B14F-4D97-AF65-F5344CB8AC3E}">
+        <p14:creationId xmlns:p14="http://schemas.microsoft.com/office/powerpoint/2010/main" val="2939944548"/>
+      </p:ext>
+    </p:extLst>
+  </p:cSld>
+  <p:clrMapOvr>
+    <a:masterClrMapping/>
+  </p:clrMapOvr>
+</p:sld>
+</file>
+
+<file path=ppt/slides/slide71.xml><?xml version="1.0" encoding="utf-8"?>
+<p:sld xmlns:a="http://schemas.openxmlformats.org/drawingml/2006/main" xmlns:r="http://schemas.openxmlformats.org/officeDocument/2006/relationships" xmlns:p="http://schemas.openxmlformats.org/presentationml/2006/main">
+  <p:cSld>
+    <p:spTree>
+      <p:nvGrpSpPr>
+        <p:cNvPr id="1" name=""/>
+        <p:cNvGrpSpPr/>
+        <p:nvPr/>
+      </p:nvGrpSpPr>
+      <p:grpSpPr>
+        <a:xfrm>
+          <a:off x="0" y="0"/>
+          <a:ext cx="0" cy="0"/>
+          <a:chOff x="0" y="0"/>
+          <a:chExt cx="0" cy="0"/>
+        </a:xfrm>
+      </p:grpSpPr>
+      <p:sp>
+        <p:nvSpPr>
+          <p:cNvPr id="2" name="Title 1">
+            <a:extLst>
+              <a:ext uri="{FF2B5EF4-FFF2-40B4-BE49-F238E27FC236}">
                 <a16:creationId xmlns:a16="http://schemas.microsoft.com/office/drawing/2014/main" id="{C024F231-4EAC-F626-C6FA-8948B63B3374}"/>
               </a:ext>
             </a:extLst>
@@ -10601,7 +11333,7 @@
 </p:sld>
 </file>
 
-<file path=ppt/slides/slide67.xml><?xml version="1.0" encoding="utf-8"?>
+<file path=ppt/slides/slide72.xml><?xml version="1.0" encoding="utf-8"?>
 <p:sld xmlns:a="http://schemas.openxmlformats.org/drawingml/2006/main" xmlns:r="http://schemas.openxmlformats.org/officeDocument/2006/relationships" xmlns:p="http://schemas.openxmlformats.org/presentationml/2006/main">
   <p:cSld>
     <p:spTree>
@@ -11273,7 +12005,7 @@
 </p:sld>
 </file>
 
-<file path=ppt/slides/slide68.xml><?xml version="1.0" encoding="utf-8"?>
+<file path=ppt/slides/slide73.xml><?xml version="1.0" encoding="utf-8"?>
 <p:sld xmlns:a="http://schemas.openxmlformats.org/drawingml/2006/main" xmlns:r="http://schemas.openxmlformats.org/officeDocument/2006/relationships" xmlns:p="http://schemas.openxmlformats.org/presentationml/2006/main">
   <p:cSld>
     <p:spTree>
@@ -11945,7 +12677,7 @@
 </p:sld>
 </file>
 
-<file path=ppt/slides/slide69.xml><?xml version="1.0" encoding="utf-8"?>
+<file path=ppt/slides/slide74.xml><?xml version="1.0" encoding="utf-8"?>
 <p:sld xmlns:a="http://schemas.openxmlformats.org/drawingml/2006/main" xmlns:r="http://schemas.openxmlformats.org/officeDocument/2006/relationships" xmlns:p="http://schemas.openxmlformats.org/presentationml/2006/main">
   <p:cSld>
     <p:spTree>
@@ -12617,2755 +13349,7 @@
 </p:sld>
 </file>
 
-<file path=ppt/slides/slide7.xml><?xml version="1.0" encoding="utf-8"?>
-<p:sld xmlns:a="http://schemas.openxmlformats.org/drawingml/2006/main" xmlns:r="http://schemas.openxmlformats.org/officeDocument/2006/relationships" xmlns:p="http://schemas.openxmlformats.org/presentationml/2006/main">
-  <p:cSld>
-    <p:spTree>
-      <p:nvGrpSpPr>
-        <p:cNvPr id="1" name=""/>
-        <p:cNvGrpSpPr/>
-        <p:nvPr/>
-      </p:nvGrpSpPr>
-      <p:grpSpPr>
-        <a:xfrm>
-          <a:off x="0" y="0"/>
-          <a:ext cx="0" cy="0"/>
-          <a:chOff x="0" y="0"/>
-          <a:chExt cx="0" cy="0"/>
-        </a:xfrm>
-      </p:grpSpPr>
-      <p:sp>
-        <p:nvSpPr>
-          <p:cNvPr id="2" name="Title 1">
-            <a:extLst>
-              <a:ext uri="{FF2B5EF4-FFF2-40B4-BE49-F238E27FC236}">
-                <a16:creationId xmlns:a16="http://schemas.microsoft.com/office/drawing/2014/main" id="{D68F3E1D-8293-17EA-02D6-126EFD28E80F}"/>
-              </a:ext>
-            </a:extLst>
-          </p:cNvPr>
-          <p:cNvSpPr>
-            <a:spLocks noGrp="1"/>
-          </p:cNvSpPr>
-          <p:nvPr>
-            <p:ph type="title"/>
-          </p:nvPr>
-        </p:nvSpPr>
-        <p:spPr/>
-        <p:txBody>
-          <a:bodyPr/>
-          <a:lstStyle/>
-          <a:p>
-            <a:r>
-              <a:rPr lang="en-US"/>
-              <a:t>What Is Business Workflow Automation?</a:t>
-            </a:r>
-          </a:p>
-        </p:txBody>
-      </p:sp>
-      <p:sp>
-        <p:nvSpPr>
-          <p:cNvPr id="3" name="Content Placeholder 2">
-            <a:extLst>
-              <a:ext uri="{FF2B5EF4-FFF2-40B4-BE49-F238E27FC236}">
-                <a16:creationId xmlns:a16="http://schemas.microsoft.com/office/drawing/2014/main" id="{635CBD14-D291-22AB-6BBC-F33D92DC2BEA}"/>
-              </a:ext>
-            </a:extLst>
-          </p:cNvPr>
-          <p:cNvSpPr>
-            <a:spLocks noGrp="1"/>
-          </p:cNvSpPr>
-          <p:nvPr>
-            <p:ph idx="1"/>
-          </p:nvPr>
-        </p:nvSpPr>
-        <p:spPr/>
-        <p:txBody>
-          <a:bodyPr>
-            <a:normAutofit/>
-          </a:bodyPr>
-          <a:lstStyle/>
-          <a:p>
-            <a:r>
-              <a:rPr lang="en-US" sz="1800"/>
-              <a:t>A workflow is a repeatable series of steps that gets work done
-Automation lets software run those steps for you
-It replaces manual, repetitive tasks — copying data, sending emails, chasing approvals
-Runs reliably and consistently, with far fewer errors
-People focus on judgement; software handles the routine</a:t>
-            </a:r>
-          </a:p>
-        </p:txBody>
-      </p:sp>
-    </p:spTree>
-    <p:extLst>
-      <p:ext uri="{BB962C8B-B14F-4D97-AF65-F5344CB8AC3E}">
-        <p14:creationId xmlns:p14="http://schemas.microsoft.com/office/powerpoint/2010/main" val="2507022519"/>
-      </p:ext>
-    </p:extLst>
-  </p:cSld>
-  <p:clrMapOvr>
-    <a:masterClrMapping/>
-  </p:clrMapOvr>
-</p:sld>
-</file>
-
-<file path=ppt/slides/slide70.xml><?xml version="1.0" encoding="utf-8"?>
-<p:sld xmlns:a="http://schemas.openxmlformats.org/drawingml/2006/main" xmlns:r="http://schemas.openxmlformats.org/officeDocument/2006/relationships" xmlns:p="http://schemas.openxmlformats.org/presentationml/2006/main">
-  <p:cSld>
-    <p:spTree>
-      <p:nvGrpSpPr>
-        <p:cNvPr id="1" name=""/>
-        <p:cNvGrpSpPr/>
-        <p:nvPr/>
-      </p:nvGrpSpPr>
-      <p:grpSpPr>
-        <a:xfrm>
-          <a:off x="0" y="0"/>
-          <a:ext cx="0" cy="0"/>
-          <a:chOff x="0" y="0"/>
-          <a:chExt cx="0" cy="0"/>
-        </a:xfrm>
-      </p:grpSpPr>
-      <p:sp>
-        <p:nvSpPr>
-          <p:cNvPr id="2" name="Title 1">
-            <a:extLst>
-              <a:ext uri="{FF2B5EF4-FFF2-40B4-BE49-F238E27FC236}">
-                <a16:creationId xmlns:a16="http://schemas.microsoft.com/office/drawing/2014/main" id="{9334C532-9A83-A31D-7A7E-F78038EDF121}"/>
-              </a:ext>
-            </a:extLst>
-          </p:cNvPr>
-          <p:cNvSpPr>
-            <a:spLocks noGrp="1"/>
-          </p:cNvSpPr>
-          <p:nvPr>
-            <p:ph type="title"/>
-          </p:nvPr>
-        </p:nvSpPr>
-        <p:spPr/>
-        <p:txBody>
-          <a:bodyPr/>
-          <a:lstStyle/>
-          <a:p>
-            <a:r>
-              <a:rPr lang="en-US"/>
-              <a:t>Module 4 Recap</a:t>
-            </a:r>
-          </a:p>
-        </p:txBody>
-      </p:sp>
-      <p:sp>
-        <p:nvSpPr>
-          <p:cNvPr id="3" name="Content Placeholder 2">
-            <a:extLst>
-              <a:ext uri="{FF2B5EF4-FFF2-40B4-BE49-F238E27FC236}">
-                <a16:creationId xmlns:a16="http://schemas.microsoft.com/office/drawing/2014/main" id="{A05B6A36-EB52-051E-719B-C37632BCB71D}"/>
-              </a:ext>
-            </a:extLst>
-          </p:cNvPr>
-          <p:cNvSpPr>
-            <a:spLocks noGrp="1"/>
-          </p:cNvSpPr>
-          <p:nvPr>
-            <p:ph idx="1"/>
-          </p:nvPr>
-        </p:nvSpPr>
-        <p:spPr/>
-        <p:txBody>
-          <a:bodyPr>
-            <a:normAutofit/>
-          </a:bodyPr>
-          <a:lstStyle/>
-          <a:p>
-            <a:r>
-              <a:rPr lang="en-US" sz="1800"/>
-              <a:t>Agents and flows combine into complete business processes
-Orchestration sequences, branches and chains the steps
-Plan outputs and next steps so work flows on automatically
-Handle errors and monitor runs to stay reliable
-You saw four real workflows — and Order Processing — from trigger to result</a:t>
-            </a:r>
-          </a:p>
-        </p:txBody>
-      </p:sp>
-    </p:spTree>
-    <p:extLst>
-      <p:ext uri="{BB962C8B-B14F-4D97-AF65-F5344CB8AC3E}">
-        <p14:creationId xmlns:p14="http://schemas.microsoft.com/office/powerpoint/2010/main" val="2992847287"/>
-      </p:ext>
-    </p:extLst>
-  </p:cSld>
-  <p:clrMapOvr>
-    <a:masterClrMapping/>
-  </p:clrMapOvr>
-</p:sld>
-</file>
-
-<file path=ppt/slides/slide71.xml><?xml version="1.0" encoding="utf-8"?>
-<p:sld xmlns:a="http://schemas.openxmlformats.org/drawingml/2006/main" xmlns:r="http://schemas.openxmlformats.org/officeDocument/2006/relationships" xmlns:p="http://schemas.openxmlformats.org/presentationml/2006/main">
-  <p:cSld>
-    <p:spTree>
-      <p:nvGrpSpPr>
-        <p:cNvPr id="1" name=""/>
-        <p:cNvGrpSpPr/>
-        <p:nvPr/>
-      </p:nvGrpSpPr>
-      <p:grpSpPr>
-        <a:xfrm>
-          <a:off x="0" y="0"/>
-          <a:ext cx="0" cy="0"/>
-          <a:chOff x="0" y="0"/>
-          <a:chExt cx="0" cy="0"/>
-        </a:xfrm>
-      </p:grpSpPr>
-      <p:sp>
-        <p:nvSpPr>
-          <p:cNvPr id="2" name="Title 1">
-            <a:extLst>
-              <a:ext uri="{FF2B5EF4-FFF2-40B4-BE49-F238E27FC236}">
-                <a16:creationId xmlns:a16="http://schemas.microsoft.com/office/drawing/2014/main" id="{092EBA00-D067-C868-BD69-750A73377203}"/>
-              </a:ext>
-            </a:extLst>
-          </p:cNvPr>
-          <p:cNvSpPr>
-            <a:spLocks noGrp="1"/>
-          </p:cNvSpPr>
-          <p:nvPr>
-            <p:ph type="title"/>
-          </p:nvPr>
-        </p:nvSpPr>
-        <p:spPr/>
-        <p:txBody>
-          <a:bodyPr/>
-          <a:lstStyle/>
-          <a:p>
-            <a:r>
-              <a:rPr lang="en-US"/>
-              <a:t>Module 5 · Business Workflow Workshop</a:t>
-            </a:r>
-          </a:p>
-        </p:txBody>
-      </p:sp>
-      <p:sp>
-        <p:nvSpPr>
-          <p:cNvPr id="3" name="Text Placeholder 2">
-            <a:extLst>
-              <a:ext uri="{FF2B5EF4-FFF2-40B4-BE49-F238E27FC236}">
-                <a16:creationId xmlns:a16="http://schemas.microsoft.com/office/drawing/2014/main" id="{26717F27-B77C-ADE7-256B-D474F90AF915}"/>
-              </a:ext>
-            </a:extLst>
-          </p:cNvPr>
-          <p:cNvSpPr>
-            <a:spLocks noGrp="1"/>
-          </p:cNvSpPr>
-          <p:nvPr>
-            <p:ph type="body" idx="1"/>
-          </p:nvPr>
-        </p:nvSpPr>
-        <p:spPr/>
-        <p:txBody>
-          <a:bodyPr>
-            <a:normAutofit/>
-          </a:bodyPr>
-          <a:lstStyle/>
-          <a:p>
-            <a:r>
-              <a:rPr lang="en-US" sz="1800" b="1">
-                <a:solidFill>
-                  <a:srgbClr val="7C3AED"/>
-                </a:solidFill>
-              </a:rPr>
-              <a:t>Put it all together — build a real end-to-end workflow</a:t>
-            </a:r>
-          </a:p>
-        </p:txBody>
-      </p:sp>
-    </p:spTree>
-    <p:extLst>
-      <p:ext uri="{BB962C8B-B14F-4D97-AF65-F5344CB8AC3E}">
-        <p14:creationId xmlns:p14="http://schemas.microsoft.com/office/powerpoint/2010/main" val="1216735399"/>
-      </p:ext>
-    </p:extLst>
-  </p:cSld>
-  <p:clrMapOvr>
-    <a:masterClrMapping/>
-  </p:clrMapOvr>
-</p:sld>
-</file>
-
-<file path=ppt/slides/slide72.xml><?xml version="1.0" encoding="utf-8"?>
-<p:sld xmlns:a="http://schemas.openxmlformats.org/drawingml/2006/main" xmlns:r="http://schemas.openxmlformats.org/officeDocument/2006/relationships" xmlns:p="http://schemas.openxmlformats.org/presentationml/2006/main">
-  <p:cSld>
-    <p:spTree>
-      <p:nvGrpSpPr>
-        <p:cNvPr id="1" name=""/>
-        <p:cNvGrpSpPr/>
-        <p:nvPr/>
-      </p:nvGrpSpPr>
-      <p:grpSpPr>
-        <a:xfrm>
-          <a:off x="0" y="0"/>
-          <a:ext cx="0" cy="0"/>
-          <a:chOff x="0" y="0"/>
-          <a:chExt cx="0" cy="0"/>
-        </a:xfrm>
-      </p:grpSpPr>
-      <p:sp>
-        <p:nvSpPr>
-          <p:cNvPr id="2" name="Title 1">
-            <a:extLst>
-              <a:ext uri="{FF2B5EF4-FFF2-40B4-BE49-F238E27FC236}">
-                <a16:creationId xmlns:a16="http://schemas.microsoft.com/office/drawing/2014/main" id="{A4510BF0-62E8-02C4-BD0D-8EACA32C19C8}"/>
-              </a:ext>
-            </a:extLst>
-          </p:cNvPr>
-          <p:cNvSpPr>
-            <a:spLocks noGrp="1"/>
-          </p:cNvSpPr>
-          <p:nvPr>
-            <p:ph type="title"/>
-          </p:nvPr>
-        </p:nvSpPr>
-        <p:spPr/>
-        <p:txBody>
-          <a:bodyPr/>
-          <a:lstStyle/>
-          <a:p>
-            <a:r>
-              <a:rPr lang="en-US"/>
-              <a:t>Workshop Overview</a:t>
-            </a:r>
-          </a:p>
-        </p:txBody>
-      </p:sp>
-      <p:sp>
-        <p:nvSpPr>
-          <p:cNvPr id="3" name="Content Placeholder 2">
-            <a:extLst>
-              <a:ext uri="{FF2B5EF4-FFF2-40B4-BE49-F238E27FC236}">
-                <a16:creationId xmlns:a16="http://schemas.microsoft.com/office/drawing/2014/main" id="{1C7B9D00-1350-7F51-4F13-5915A319FE90}"/>
-              </a:ext>
-            </a:extLst>
-          </p:cNvPr>
-          <p:cNvSpPr>
-            <a:spLocks noGrp="1"/>
-          </p:cNvSpPr>
-          <p:nvPr>
-            <p:ph idx="1"/>
-          </p:nvPr>
-        </p:nvSpPr>
-        <p:spPr/>
-        <p:txBody>
-          <a:bodyPr>
-            <a:normAutofit/>
-          </a:bodyPr>
-          <a:lstStyle/>
-          <a:p>
-            <a:r>
-              <a:rPr lang="en-US" sz="1800"/>
-              <a:t>Your Lab 16 capstone: build a practical, end-to-end workflow
-Choose a track: Sales, Finance, Procurement or Order Processing
-Combine an agent and one or more Power Automate flows
-Use the patterns and labs from the past three days
-Demo your working solution at the end</a:t>
-            </a:r>
-          </a:p>
-        </p:txBody>
-      </p:sp>
-    </p:spTree>
-    <p:extLst>
-      <p:ext uri="{BB962C8B-B14F-4D97-AF65-F5344CB8AC3E}">
-        <p14:creationId xmlns:p14="http://schemas.microsoft.com/office/powerpoint/2010/main" val="1983163968"/>
-      </p:ext>
-    </p:extLst>
-  </p:cSld>
-  <p:clrMapOvr>
-    <a:masterClrMapping/>
-  </p:clrMapOvr>
-</p:sld>
-</file>
-
-<file path=ppt/slides/slide73.xml><?xml version="1.0" encoding="utf-8"?>
-<p:sld xmlns:a="http://schemas.openxmlformats.org/drawingml/2006/main" xmlns:r="http://schemas.openxmlformats.org/officeDocument/2006/relationships" xmlns:p="http://schemas.openxmlformats.org/presentationml/2006/main">
-  <p:cSld>
-    <p:spTree>
-      <p:nvGrpSpPr>
-        <p:cNvPr id="1" name=""/>
-        <p:cNvGrpSpPr/>
-        <p:nvPr/>
-      </p:nvGrpSpPr>
-      <p:grpSpPr>
-        <a:xfrm>
-          <a:off x="0" y="0"/>
-          <a:ext cx="0" cy="0"/>
-          <a:chOff x="0" y="0"/>
-          <a:chExt cx="0" cy="0"/>
-        </a:xfrm>
-      </p:grpSpPr>
-      <p:sp>
-        <p:nvSpPr>
-          <p:cNvPr id="2" name="Title 1">
-            <a:extLst>
-              <a:ext uri="{FF2B5EF4-FFF2-40B4-BE49-F238E27FC236}">
-                <a16:creationId xmlns:a16="http://schemas.microsoft.com/office/drawing/2014/main" id="{B306D309-2D11-720F-BD8D-54ADFAE44193}"/>
-              </a:ext>
-            </a:extLst>
-          </p:cNvPr>
-          <p:cNvSpPr>
-            <a:spLocks noGrp="1"/>
-          </p:cNvSpPr>
-          <p:nvPr>
-            <p:ph type="title"/>
-          </p:nvPr>
-        </p:nvSpPr>
-        <p:spPr/>
-        <p:txBody>
-          <a:bodyPr/>
-          <a:lstStyle/>
-          <a:p>
-            <a:r>
-              <a:rPr lang="en-US"/>
-              <a:t>How the Workshop Works</a:t>
-            </a:r>
-          </a:p>
-        </p:txBody>
-      </p:sp>
-      <p:sp>
-        <p:nvSpPr>
-          <p:cNvPr id="3" name="Content Placeholder 2">
-            <a:extLst>
-              <a:ext uri="{FF2B5EF4-FFF2-40B4-BE49-F238E27FC236}">
-                <a16:creationId xmlns:a16="http://schemas.microsoft.com/office/drawing/2014/main" id="{D0C9DA5F-3EF2-4E2D-4CBA-CCAD55185269}"/>
-              </a:ext>
-            </a:extLst>
-          </p:cNvPr>
-          <p:cNvSpPr>
-            <a:spLocks noGrp="1"/>
-          </p:cNvSpPr>
-          <p:nvPr>
-            <p:ph idx="1"/>
-          </p:nvPr>
-        </p:nvSpPr>
-        <p:spPr/>
-        <p:txBody>
-          <a:bodyPr>
-            <a:normAutofit/>
-          </a:bodyPr>
-          <a:lstStyle/>
-          <a:p>
-            <a:r>
-              <a:rPr lang="en-US" sz="1800"/>
-              <a:t>Work solo or in small teams
-Pick a track and sketch the workflow: trigger → actions → output
-Build it: create the flow, add an agent where it helps
-Test with realistic data and fix what breaks
-Present: show the trigger, the steps and the result</a:t>
-            </a:r>
-          </a:p>
-        </p:txBody>
-      </p:sp>
-    </p:spTree>
-    <p:extLst>
-      <p:ext uri="{BB962C8B-B14F-4D97-AF65-F5344CB8AC3E}">
-        <p14:creationId xmlns:p14="http://schemas.microsoft.com/office/powerpoint/2010/main" val="3589608900"/>
-      </p:ext>
-    </p:extLst>
-  </p:cSld>
-  <p:clrMapOvr>
-    <a:masterClrMapping/>
-  </p:clrMapOvr>
-</p:sld>
-</file>
-
-<file path=ppt/slides/slide74.xml><?xml version="1.0" encoding="utf-8"?>
-<p:sld xmlns:a="http://schemas.openxmlformats.org/drawingml/2006/main" xmlns:r="http://schemas.openxmlformats.org/officeDocument/2006/relationships" xmlns:p="http://schemas.openxmlformats.org/presentationml/2006/main">
-  <p:cSld>
-    <p:spTree>
-      <p:nvGrpSpPr>
-        <p:cNvPr id="1" name=""/>
-        <p:cNvGrpSpPr/>
-        <p:nvPr/>
-      </p:nvGrpSpPr>
-      <p:grpSpPr>
-        <a:xfrm>
-          <a:off x="0" y="0"/>
-          <a:ext cx="0" cy="0"/>
-          <a:chOff x="0" y="0"/>
-          <a:chExt cx="0" cy="0"/>
-        </a:xfrm>
-      </p:grpSpPr>
-      <p:sp>
-        <p:nvSpPr>
-          <p:cNvPr id="2" name="Title 1">
-            <a:extLst>
-              <a:ext uri="{FF2B5EF4-FFF2-40B4-BE49-F238E27FC236}">
-                <a16:creationId xmlns:a16="http://schemas.microsoft.com/office/drawing/2014/main" id="{C3FB1C71-98F9-1E58-B9CC-1D73738E4149}"/>
-              </a:ext>
-            </a:extLst>
-          </p:cNvPr>
-          <p:cNvSpPr>
-            <a:spLocks noGrp="1"/>
-          </p:cNvSpPr>
-          <p:nvPr>
-            <p:ph type="title"/>
-          </p:nvPr>
-        </p:nvSpPr>
-        <p:spPr/>
-        <p:txBody>
-          <a:bodyPr/>
-          <a:lstStyle/>
-          <a:p>
-            <a:r>
-              <a:rPr lang="en-US"/>
-              <a:t>Track A — Sales</a:t>
-            </a:r>
-          </a:p>
-        </p:txBody>
-      </p:sp>
-      <p:sp>
-        <p:nvSpPr>
-          <p:cNvPr id="3" name="Content Placeholder 2">
-            <a:extLst>
-              <a:ext uri="{FF2B5EF4-FFF2-40B4-BE49-F238E27FC236}">
-                <a16:creationId xmlns:a16="http://schemas.microsoft.com/office/drawing/2014/main" id="{D5E98FF7-C3E4-3CD0-E5CD-3A2D1DAB6140}"/>
-              </a:ext>
-            </a:extLst>
-          </p:cNvPr>
-          <p:cNvSpPr>
-            <a:spLocks noGrp="1"/>
-          </p:cNvSpPr>
-          <p:nvPr>
-            <p:ph sz="half" idx="1"/>
-          </p:nvPr>
-        </p:nvSpPr>
-        <p:spPr/>
-        <p:txBody>
-          <a:bodyPr>
-            <a:normAutofit/>
-          </a:bodyPr>
-          <a:lstStyle/>
-          <a:p>
-            <a:r>
-              <a:rPr lang="en-US" sz="1600"/>
-              <a:t>SCENARIO
-Capture inbound sales enquiries,
-log them, and reply automatically.
-OUTPUT
-A logged lead and a tailored response</a:t>
-            </a:r>
-          </a:p>
-        </p:txBody>
-      </p:sp>
-      <p:sp>
-        <p:nvSpPr>
-          <p:cNvPr id="4" name="Content Placeholder 3">
-            <a:extLst>
-              <a:ext uri="{FF2B5EF4-FFF2-40B4-BE49-F238E27FC236}">
-                <a16:creationId xmlns:a16="http://schemas.microsoft.com/office/drawing/2014/main" id="{D7B1CB0A-92CE-4E80-9D8A-8E99136ADFD9}"/>
-              </a:ext>
-            </a:extLst>
-          </p:cNvPr>
-          <p:cNvSpPr>
-            <a:spLocks noGrp="1"/>
-          </p:cNvSpPr>
-          <p:nvPr>
-            <p:ph sz="half" idx="2"/>
-          </p:nvPr>
-        </p:nvSpPr>
-        <p:spPr/>
-        <p:txBody>
-          <a:bodyPr>
-            <a:normAutofit/>
-          </a:bodyPr>
-          <a:lstStyle/>
-          <a:p>
-            <a:r>
-              <a:rPr lang="en-US" sz="1600"/>
-              <a:t>BUILD IT
-Agent: extract customer, product, quantity
-Flow: add a row to the leads table
-Flow: send a personalised reply
-Notify the sales team in Teams
-Test with three sample enquiries</a:t>
-            </a:r>
-          </a:p>
-        </p:txBody>
-      </p:sp>
-    </p:spTree>
-    <p:extLst>
-      <p:ext uri="{BB962C8B-B14F-4D97-AF65-F5344CB8AC3E}">
-        <p14:creationId xmlns:p14="http://schemas.microsoft.com/office/powerpoint/2010/main" val="148744488"/>
-      </p:ext>
-    </p:extLst>
-  </p:cSld>
-  <p:clrMapOvr>
-    <a:masterClrMapping/>
-  </p:clrMapOvr>
-</p:sld>
-</file>
-
 <file path=ppt/slides/slide75.xml><?xml version="1.0" encoding="utf-8"?>
-<p:sld xmlns:a="http://schemas.openxmlformats.org/drawingml/2006/main" xmlns:r="http://schemas.openxmlformats.org/officeDocument/2006/relationships" xmlns:p="http://schemas.openxmlformats.org/presentationml/2006/main">
-  <p:cSld>
-    <p:spTree>
-      <p:nvGrpSpPr>
-        <p:cNvPr id="1" name=""/>
-        <p:cNvGrpSpPr/>
-        <p:nvPr/>
-      </p:nvGrpSpPr>
-      <p:grpSpPr>
-        <a:xfrm>
-          <a:off x="0" y="0"/>
-          <a:ext cx="0" cy="0"/>
-          <a:chOff x="0" y="0"/>
-          <a:chExt cx="0" cy="0"/>
-        </a:xfrm>
-      </p:grpSpPr>
-      <p:sp>
-        <p:nvSpPr>
-          <p:cNvPr id="2" name="Title 1">
-            <a:extLst>
-              <a:ext uri="{FF2B5EF4-FFF2-40B4-BE49-F238E27FC236}">
-                <a16:creationId xmlns:a16="http://schemas.microsoft.com/office/drawing/2014/main" id="{4D95FE35-BD0B-B87D-1C03-09535E998116}"/>
-              </a:ext>
-            </a:extLst>
-          </p:cNvPr>
-          <p:cNvSpPr>
-            <a:spLocks noGrp="1"/>
-          </p:cNvSpPr>
-          <p:nvPr>
-            <p:ph type="title"/>
-          </p:nvPr>
-        </p:nvSpPr>
-        <p:spPr/>
-        <p:txBody>
-          <a:bodyPr/>
-          <a:lstStyle/>
-          <a:p>
-            <a:r>
-              <a:rPr lang="en-US"/>
-              <a:t>Track B — Finance</a:t>
-            </a:r>
-          </a:p>
-        </p:txBody>
-      </p:sp>
-      <p:sp>
-        <p:nvSpPr>
-          <p:cNvPr id="3" name="Content Placeholder 2">
-            <a:extLst>
-              <a:ext uri="{FF2B5EF4-FFF2-40B4-BE49-F238E27FC236}">
-                <a16:creationId xmlns:a16="http://schemas.microsoft.com/office/drawing/2014/main" id="{A9E3D5A1-E013-9E92-7C37-E92D0D24AF57}"/>
-              </a:ext>
-            </a:extLst>
-          </p:cNvPr>
-          <p:cNvSpPr>
-            <a:spLocks noGrp="1"/>
-          </p:cNvSpPr>
-          <p:nvPr>
-            <p:ph sz="half" idx="1"/>
-          </p:nvPr>
-        </p:nvSpPr>
-        <p:spPr/>
-        <p:txBody>
-          <a:bodyPr>
-            <a:normAutofit/>
-          </a:bodyPr>
-          <a:lstStyle/>
-          <a:p>
-            <a:r>
-              <a:rPr lang="en-US" sz="1600"/>
-              <a:t>SCENARIO
-Process uploaded invoices through
-an approval and record the outcome.
-OUTPUT
-An approved invoice with an audit trail</a:t>
-            </a:r>
-          </a:p>
-        </p:txBody>
-      </p:sp>
-      <p:sp>
-        <p:nvSpPr>
-          <p:cNvPr id="4" name="Content Placeholder 3">
-            <a:extLst>
-              <a:ext uri="{FF2B5EF4-FFF2-40B4-BE49-F238E27FC236}">
-                <a16:creationId xmlns:a16="http://schemas.microsoft.com/office/drawing/2014/main" id="{FB83B344-9A0C-B52B-1A5A-F215861222DC}"/>
-              </a:ext>
-            </a:extLst>
-          </p:cNvPr>
-          <p:cNvSpPr>
-            <a:spLocks noGrp="1"/>
-          </p:cNvSpPr>
-          <p:nvPr>
-            <p:ph sz="half" idx="2"/>
-          </p:nvPr>
-        </p:nvSpPr>
-        <p:spPr/>
-        <p:txBody>
-          <a:bodyPr>
-            <a:normAutofit/>
-          </a:bodyPr>
-          <a:lstStyle/>
-          <a:p>
-            <a:r>
-              <a:rPr lang="en-US" sz="1600"/>
-              <a:t>BUILD IT
-Trigger: invoice uploaded to SharePoint
-Flow: start and wait for approval
-Branch on approve / reject
-Record the decision in Excel
-Email finance the outcome</a:t>
-            </a:r>
-          </a:p>
-        </p:txBody>
-      </p:sp>
-    </p:spTree>
-    <p:extLst>
-      <p:ext uri="{BB962C8B-B14F-4D97-AF65-F5344CB8AC3E}">
-        <p14:creationId xmlns:p14="http://schemas.microsoft.com/office/powerpoint/2010/main" val="940827506"/>
-      </p:ext>
-    </p:extLst>
-  </p:cSld>
-  <p:clrMapOvr>
-    <a:masterClrMapping/>
-  </p:clrMapOvr>
-</p:sld>
-</file>
-
-<file path=ppt/slides/slide76.xml><?xml version="1.0" encoding="utf-8"?>
-<p:sld xmlns:a="http://schemas.openxmlformats.org/drawingml/2006/main" xmlns:r="http://schemas.openxmlformats.org/officeDocument/2006/relationships" xmlns:p="http://schemas.openxmlformats.org/presentationml/2006/main">
-  <p:cSld>
-    <p:spTree>
-      <p:nvGrpSpPr>
-        <p:cNvPr id="1" name=""/>
-        <p:cNvGrpSpPr/>
-        <p:nvPr/>
-      </p:nvGrpSpPr>
-      <p:grpSpPr>
-        <a:xfrm>
-          <a:off x="0" y="0"/>
-          <a:ext cx="0" cy="0"/>
-          <a:chOff x="0" y="0"/>
-          <a:chExt cx="0" cy="0"/>
-        </a:xfrm>
-      </p:grpSpPr>
-      <p:sp>
-        <p:nvSpPr>
-          <p:cNvPr id="2" name="Title 1">
-            <a:extLst>
-              <a:ext uri="{FF2B5EF4-FFF2-40B4-BE49-F238E27FC236}">
-                <a16:creationId xmlns:a16="http://schemas.microsoft.com/office/drawing/2014/main" id="{68ACBD62-39B4-D02B-6516-8BC9FD2EB11A}"/>
-              </a:ext>
-            </a:extLst>
-          </p:cNvPr>
-          <p:cNvSpPr>
-            <a:spLocks noGrp="1"/>
-          </p:cNvSpPr>
-          <p:nvPr>
-            <p:ph type="title"/>
-          </p:nvPr>
-        </p:nvSpPr>
-        <p:spPr/>
-        <p:txBody>
-          <a:bodyPr/>
-          <a:lstStyle/>
-          <a:p>
-            <a:r>
-              <a:rPr lang="en-US"/>
-              <a:t>Track C — Procurement</a:t>
-            </a:r>
-          </a:p>
-        </p:txBody>
-      </p:sp>
-      <p:sp>
-        <p:nvSpPr>
-          <p:cNvPr id="3" name="Content Placeholder 2">
-            <a:extLst>
-              <a:ext uri="{FF2B5EF4-FFF2-40B4-BE49-F238E27FC236}">
-                <a16:creationId xmlns:a16="http://schemas.microsoft.com/office/drawing/2014/main" id="{F98C2358-729D-C5DB-A16F-F52AC077F353}"/>
-              </a:ext>
-            </a:extLst>
-          </p:cNvPr>
-          <p:cNvSpPr>
-            <a:spLocks noGrp="1"/>
-          </p:cNvSpPr>
-          <p:nvPr>
-            <p:ph sz="half" idx="1"/>
-          </p:nvPr>
-        </p:nvSpPr>
-        <p:spPr/>
-        <p:txBody>
-          <a:bodyPr>
-            <a:normAutofit/>
-          </a:bodyPr>
-          <a:lstStyle/>
-          <a:p>
-            <a:r>
-              <a:rPr lang="en-US" sz="1600"/>
-              <a:t>SCENARIO
-Take purchase requests, route them
-to a manager, and confirm.
-OUTPUT
-A routed, approved purchase request</a:t>
-            </a:r>
-          </a:p>
-        </p:txBody>
-      </p:sp>
-      <p:sp>
-        <p:nvSpPr>
-          <p:cNvPr id="4" name="Content Placeholder 3">
-            <a:extLst>
-              <a:ext uri="{FF2B5EF4-FFF2-40B4-BE49-F238E27FC236}">
-                <a16:creationId xmlns:a16="http://schemas.microsoft.com/office/drawing/2014/main" id="{E1FE476B-D558-5A5C-E26F-8D3AA7EB599F}"/>
-              </a:ext>
-            </a:extLst>
-          </p:cNvPr>
-          <p:cNvSpPr>
-            <a:spLocks noGrp="1"/>
-          </p:cNvSpPr>
-          <p:nvPr>
-            <p:ph sz="half" idx="2"/>
-          </p:nvPr>
-        </p:nvSpPr>
-        <p:spPr/>
-        <p:txBody>
-          <a:bodyPr>
-            <a:normAutofit/>
-          </a:bodyPr>
-          <a:lstStyle/>
-          <a:p>
-            <a:r>
-              <a:rPr lang="en-US" sz="1600"/>
-              <a:t>BUILD IT
-Agent or form: capture request details
-Flow: route to the manager for approval
-Branch on the decision
-Log the request and its status
-Notify the requester of the outcome</a:t>
-            </a:r>
-          </a:p>
-        </p:txBody>
-      </p:sp>
-    </p:spTree>
-    <p:extLst>
-      <p:ext uri="{BB962C8B-B14F-4D97-AF65-F5344CB8AC3E}">
-        <p14:creationId xmlns:p14="http://schemas.microsoft.com/office/powerpoint/2010/main" val="2201874944"/>
-      </p:ext>
-    </p:extLst>
-  </p:cSld>
-  <p:clrMapOvr>
-    <a:masterClrMapping/>
-  </p:clrMapOvr>
-</p:sld>
-</file>
-
-<file path=ppt/slides/slide77.xml><?xml version="1.0" encoding="utf-8"?>
-<p:sld xmlns:a="http://schemas.openxmlformats.org/drawingml/2006/main" xmlns:r="http://schemas.openxmlformats.org/officeDocument/2006/relationships" xmlns:p="http://schemas.openxmlformats.org/presentationml/2006/main">
-  <p:cSld>
-    <p:spTree>
-      <p:nvGrpSpPr>
-        <p:cNvPr id="1" name=""/>
-        <p:cNvGrpSpPr/>
-        <p:nvPr/>
-      </p:nvGrpSpPr>
-      <p:grpSpPr>
-        <a:xfrm>
-          <a:off x="0" y="0"/>
-          <a:ext cx="0" cy="0"/>
-          <a:chOff x="0" y="0"/>
-          <a:chExt cx="0" cy="0"/>
-        </a:xfrm>
-      </p:grpSpPr>
-      <p:sp>
-        <p:nvSpPr>
-          <p:cNvPr id="2" name="Title 1">
-            <a:extLst>
-              <a:ext uri="{FF2B5EF4-FFF2-40B4-BE49-F238E27FC236}">
-                <a16:creationId xmlns:a16="http://schemas.microsoft.com/office/drawing/2014/main" id="{AEB41813-082D-7443-F837-5373C57957F0}"/>
-              </a:ext>
-            </a:extLst>
-          </p:cNvPr>
-          <p:cNvSpPr>
-            <a:spLocks noGrp="1"/>
-          </p:cNvSpPr>
-          <p:nvPr>
-            <p:ph type="title"/>
-          </p:nvPr>
-        </p:nvSpPr>
-        <p:spPr/>
-        <p:txBody>
-          <a:bodyPr/>
-          <a:lstStyle/>
-          <a:p>
-            <a:r>
-              <a:rPr lang="en-US"/>
-              <a:t>Track D — Order Processing</a:t>
-            </a:r>
-          </a:p>
-        </p:txBody>
-      </p:sp>
-      <p:sp>
-        <p:nvSpPr>
-          <p:cNvPr id="3" name="Content Placeholder 2">
-            <a:extLst>
-              <a:ext uri="{FF2B5EF4-FFF2-40B4-BE49-F238E27FC236}">
-                <a16:creationId xmlns:a16="http://schemas.microsoft.com/office/drawing/2014/main" id="{6E5B7CC6-98F4-1BD5-62CE-844B7337B969}"/>
-              </a:ext>
-            </a:extLst>
-          </p:cNvPr>
-          <p:cNvSpPr>
-            <a:spLocks noGrp="1"/>
-          </p:cNvSpPr>
-          <p:nvPr>
-            <p:ph sz="half" idx="1"/>
-          </p:nvPr>
-        </p:nvSpPr>
-        <p:spPr/>
-        <p:txBody>
-          <a:bodyPr>
-            <a:normAutofit/>
-          </a:bodyPr>
-          <a:lstStyle/>
-          <a:p>
-            <a:r>
-              <a:rPr lang="en-US" sz="1600"/>
-              <a:t>SCENARIO
-Turn submitted orders into logged,
-confirmed and fulfilled records.
-OUTPUT
-A confirmed order and a clean log</a:t>
-            </a:r>
-          </a:p>
-        </p:txBody>
-      </p:sp>
-      <p:sp>
-        <p:nvSpPr>
-          <p:cNvPr id="4" name="Content Placeholder 3">
-            <a:extLst>
-              <a:ext uri="{FF2B5EF4-FFF2-40B4-BE49-F238E27FC236}">
-                <a16:creationId xmlns:a16="http://schemas.microsoft.com/office/drawing/2014/main" id="{71A2F846-BD07-B5C4-EEFF-B689983BBF9F}"/>
-              </a:ext>
-            </a:extLst>
-          </p:cNvPr>
-          <p:cNvSpPr>
-            <a:spLocks noGrp="1"/>
-          </p:cNvSpPr>
-          <p:nvPr>
-            <p:ph sz="half" idx="2"/>
-          </p:nvPr>
-        </p:nvSpPr>
-        <p:spPr/>
-        <p:txBody>
-          <a:bodyPr>
-            <a:normAutofit/>
-          </a:bodyPr>
-          <a:lstStyle/>
-          <a:p>
-            <a:r>
-              <a:rPr lang="en-US" sz="1600"/>
-              <a:t>BUILD IT
-Trigger: an order form is submitted
-Flow: log the order to Excel
-Flow: send an order confirmation
-Notify fulfilment / operations
-Flag large orders for approval first</a:t>
-            </a:r>
-          </a:p>
-        </p:txBody>
-      </p:sp>
-    </p:spTree>
-    <p:extLst>
-      <p:ext uri="{BB962C8B-B14F-4D97-AF65-F5344CB8AC3E}">
-        <p14:creationId xmlns:p14="http://schemas.microsoft.com/office/powerpoint/2010/main" val="73937436"/>
-      </p:ext>
-    </p:extLst>
-  </p:cSld>
-  <p:clrMapOvr>
-    <a:masterClrMapping/>
-  </p:clrMapOvr>
-</p:sld>
-</file>
-
-<file path=ppt/slides/slide78.xml><?xml version="1.0" encoding="utf-8"?>
-<p:sld xmlns:a="http://schemas.openxmlformats.org/drawingml/2006/main" xmlns:r="http://schemas.openxmlformats.org/officeDocument/2006/relationships" xmlns:p="http://schemas.openxmlformats.org/presentationml/2006/main">
-  <p:cSld>
-    <p:spTree>
-      <p:nvGrpSpPr>
-        <p:cNvPr id="1" name=""/>
-        <p:cNvGrpSpPr/>
-        <p:nvPr/>
-      </p:nvGrpSpPr>
-      <p:grpSpPr>
-        <a:xfrm>
-          <a:off x="0" y="0"/>
-          <a:ext cx="0" cy="0"/>
-          <a:chOff x="0" y="0"/>
-          <a:chExt cx="0" cy="0"/>
-        </a:xfrm>
-      </p:grpSpPr>
-      <p:sp>
-        <p:nvSpPr>
-          <p:cNvPr id="2" name="Title 1">
-            <a:extLst>
-              <a:ext uri="{FF2B5EF4-FFF2-40B4-BE49-F238E27FC236}">
-                <a16:creationId xmlns:a16="http://schemas.microsoft.com/office/drawing/2014/main" id="{7EF62778-87DE-3313-58A3-1BC38555DC61}"/>
-              </a:ext>
-            </a:extLst>
-          </p:cNvPr>
-          <p:cNvSpPr>
-            <a:spLocks noGrp="1"/>
-          </p:cNvSpPr>
-          <p:nvPr>
-            <p:ph type="title"/>
-          </p:nvPr>
-        </p:nvSpPr>
-        <p:spPr/>
-        <p:txBody>
-          <a:bodyPr/>
-          <a:lstStyle/>
-          <a:p>
-            <a:r>
-              <a:rPr lang="en-US"/>
-              <a:t>Build Guidelines &amp; Success Criteria</a:t>
-            </a:r>
-          </a:p>
-        </p:txBody>
-      </p:sp>
-      <p:sp>
-        <p:nvSpPr>
-          <p:cNvPr id="3" name="Content Placeholder 2">
-            <a:extLst>
-              <a:ext uri="{FF2B5EF4-FFF2-40B4-BE49-F238E27FC236}">
-                <a16:creationId xmlns:a16="http://schemas.microsoft.com/office/drawing/2014/main" id="{5713F4E9-4D54-09A6-B010-2CC22CD7C6BA}"/>
-              </a:ext>
-            </a:extLst>
-          </p:cNvPr>
-          <p:cNvSpPr>
-            <a:spLocks noGrp="1"/>
-          </p:cNvSpPr>
-          <p:nvPr>
-            <p:ph idx="1"/>
-          </p:nvPr>
-        </p:nvSpPr>
-        <p:spPr/>
-        <p:txBody>
-          <a:bodyPr>
-            <a:normAutofit/>
-          </a:bodyPr>
-          <a:lstStyle/>
-          <a:p>
-            <a:r>
-              <a:rPr lang="en-US" sz="1800"/>
-              <a:t>Start simple — get one trigger and one action working first
-Name your flow clearly and add a short description
-Use realistic test data before going live
-Success = the right output happens automatically, every time
-Bonus: add a notification and an error path</a:t>
-            </a:r>
-          </a:p>
-        </p:txBody>
-      </p:sp>
-    </p:spTree>
-    <p:extLst>
-      <p:ext uri="{BB962C8B-B14F-4D97-AF65-F5344CB8AC3E}">
-        <p14:creationId xmlns:p14="http://schemas.microsoft.com/office/powerpoint/2010/main" val="2881515441"/>
-      </p:ext>
-    </p:extLst>
-  </p:cSld>
-  <p:clrMapOvr>
-    <a:masterClrMapping/>
-  </p:clrMapOvr>
-</p:sld>
-</file>
-
-<file path=ppt/slides/slide79.xml><?xml version="1.0" encoding="utf-8"?>
-<p:sld xmlns:a="http://schemas.openxmlformats.org/drawingml/2006/main" xmlns:r="http://schemas.openxmlformats.org/officeDocument/2006/relationships" xmlns:p="http://schemas.openxmlformats.org/presentationml/2006/main">
-  <p:cSld>
-    <p:spTree>
-      <p:nvGrpSpPr>
-        <p:cNvPr id="1" name=""/>
-        <p:cNvGrpSpPr/>
-        <p:nvPr/>
-      </p:nvGrpSpPr>
-      <p:grpSpPr>
-        <a:xfrm>
-          <a:off x="0" y="0"/>
-          <a:ext cx="0" cy="0"/>
-          <a:chOff x="0" y="0"/>
-          <a:chExt cx="0" cy="0"/>
-        </a:xfrm>
-      </p:grpSpPr>
-      <p:sp>
-        <p:nvSpPr>
-          <p:cNvPr id="2" name="Title 1">
-            <a:extLst>
-              <a:ext uri="{FF2B5EF4-FFF2-40B4-BE49-F238E27FC236}">
-                <a16:creationId xmlns:a16="http://schemas.microsoft.com/office/drawing/2014/main" id="{7F0739FD-1A56-2880-C640-B81C61871D59}"/>
-              </a:ext>
-            </a:extLst>
-          </p:cNvPr>
-          <p:cNvSpPr>
-            <a:spLocks noGrp="1"/>
-          </p:cNvSpPr>
-          <p:nvPr>
-            <p:ph type="title"/>
-          </p:nvPr>
-        </p:nvSpPr>
-        <p:spPr/>
-        <p:txBody>
-          <a:bodyPr/>
-          <a:lstStyle/>
-          <a:p>
-            <a:r>
-              <a:rPr lang="en-US"/>
-              <a:t>Present &amp; Get Feedback</a:t>
-            </a:r>
-          </a:p>
-        </p:txBody>
-      </p:sp>
-      <p:sp>
-        <p:nvSpPr>
-          <p:cNvPr id="3" name="Content Placeholder 2">
-            <a:extLst>
-              <a:ext uri="{FF2B5EF4-FFF2-40B4-BE49-F238E27FC236}">
-                <a16:creationId xmlns:a16="http://schemas.microsoft.com/office/drawing/2014/main" id="{941948D6-A375-C996-8CCE-99FF9226F73C}"/>
-              </a:ext>
-            </a:extLst>
-          </p:cNvPr>
-          <p:cNvSpPr>
-            <a:spLocks noGrp="1"/>
-          </p:cNvSpPr>
-          <p:nvPr>
-            <p:ph idx="1"/>
-          </p:nvPr>
-        </p:nvSpPr>
-        <p:spPr/>
-        <p:txBody>
-          <a:bodyPr>
-            <a:normAutofit/>
-          </a:bodyPr>
-          <a:lstStyle/>
-          <a:p>
-            <a:r>
-              <a:rPr lang="en-US" sz="1800"/>
-              <a:t>Show the business problem you solved
-Walk through the trigger, key actions and output
-Run it live, or show a recent successful run
-Share one thing that was tricky and how you fixed it
-Capture ideas to extend it further</a:t>
-            </a:r>
-          </a:p>
-        </p:txBody>
-      </p:sp>
-    </p:spTree>
-    <p:extLst>
-      <p:ext uri="{BB962C8B-B14F-4D97-AF65-F5344CB8AC3E}">
-        <p14:creationId xmlns:p14="http://schemas.microsoft.com/office/powerpoint/2010/main" val="3815234056"/>
-      </p:ext>
-    </p:extLst>
-  </p:cSld>
-  <p:clrMapOvr>
-    <a:masterClrMapping/>
-  </p:clrMapOvr>
-</p:sld>
-</file>
-
-<file path=ppt/slides/slide8.xml><?xml version="1.0" encoding="utf-8"?>
-<p:sld xmlns:a="http://schemas.openxmlformats.org/drawingml/2006/main" xmlns:r="http://schemas.openxmlformats.org/officeDocument/2006/relationships" xmlns:p="http://schemas.openxmlformats.org/presentationml/2006/main">
-  <p:cSld>
-    <p:spTree>
-      <p:nvGrpSpPr>
-        <p:cNvPr id="1" name=""/>
-        <p:cNvGrpSpPr/>
-        <p:nvPr/>
-      </p:nvGrpSpPr>
-      <p:grpSpPr>
-        <a:xfrm>
-          <a:off x="0" y="0"/>
-          <a:ext cx="0" cy="0"/>
-          <a:chOff x="0" y="0"/>
-          <a:chExt cx="0" cy="0"/>
-        </a:xfrm>
-      </p:grpSpPr>
-      <p:sp>
-        <p:nvSpPr>
-          <p:cNvPr id="2" name="Title 1">
-            <a:extLst>
-              <a:ext uri="{FF2B5EF4-FFF2-40B4-BE49-F238E27FC236}">
-                <a16:creationId xmlns:a16="http://schemas.microsoft.com/office/drawing/2014/main" id="{A929970F-766C-166A-5620-4126F34ABFF3}"/>
-              </a:ext>
-            </a:extLst>
-          </p:cNvPr>
-          <p:cNvSpPr>
-            <a:spLocks noGrp="1"/>
-          </p:cNvSpPr>
-          <p:nvPr>
-            <p:ph type="title"/>
-          </p:nvPr>
-        </p:nvSpPr>
-        <p:spPr/>
-        <p:txBody>
-          <a:bodyPr/>
-          <a:lstStyle/>
-          <a:p>
-            <a:r>
-              <a:rPr lang="en-US"/>
-              <a:t>Why Automate?</a:t>
-            </a:r>
-          </a:p>
-        </p:txBody>
-      </p:sp>
-      <p:sp>
-        <p:nvSpPr>
-          <p:cNvPr id="3" name="Content Placeholder 2">
-            <a:extLst>
-              <a:ext uri="{FF2B5EF4-FFF2-40B4-BE49-F238E27FC236}">
-                <a16:creationId xmlns:a16="http://schemas.microsoft.com/office/drawing/2014/main" id="{98BCE675-06D6-7CA1-31B0-216798C26704}"/>
-              </a:ext>
-            </a:extLst>
-          </p:cNvPr>
-          <p:cNvSpPr>
-            <a:spLocks noGrp="1"/>
-          </p:cNvSpPr>
-          <p:nvPr>
-            <p:ph idx="1"/>
-          </p:nvPr>
-        </p:nvSpPr>
-        <p:spPr/>
-        <p:txBody>
-          <a:bodyPr>
-            <a:normAutofit/>
-          </a:bodyPr>
-          <a:lstStyle/>
-          <a:p>
-            <a:r>
-              <a:rPr lang="en-US" sz="1800"/>
-              <a:t>Save time — reclaim hours of manual work every week
-Reduce errors — consistent, rule-based execution every time
-Respond faster — instant notifications and approvals
-Gain visibility — every step is logged and traceable
-Scale easily — handle more volume without more headcount</a:t>
-            </a:r>
-          </a:p>
-        </p:txBody>
-      </p:sp>
-    </p:spTree>
-    <p:extLst>
-      <p:ext uri="{BB962C8B-B14F-4D97-AF65-F5344CB8AC3E}">
-        <p14:creationId xmlns:p14="http://schemas.microsoft.com/office/powerpoint/2010/main" val="2083644524"/>
-      </p:ext>
-    </p:extLst>
-  </p:cSld>
-  <p:clrMapOvr>
-    <a:masterClrMapping/>
-  </p:clrMapOvr>
-</p:sld>
-</file>
-
-<file path=ppt/slides/slide80.xml><?xml version="1.0" encoding="utf-8"?>
-<p:sld xmlns:a="http://schemas.openxmlformats.org/drawingml/2006/main" xmlns:r="http://schemas.openxmlformats.org/officeDocument/2006/relationships" xmlns:p="http://schemas.openxmlformats.org/presentationml/2006/main">
-  <p:cSld>
-    <p:spTree>
-      <p:nvGrpSpPr>
-        <p:cNvPr id="1" name=""/>
-        <p:cNvGrpSpPr/>
-        <p:nvPr/>
-      </p:nvGrpSpPr>
-      <p:grpSpPr>
-        <a:xfrm>
-          <a:off x="0" y="0"/>
-          <a:ext cx="0" cy="0"/>
-          <a:chOff x="0" y="0"/>
-          <a:chExt cx="0" cy="0"/>
-        </a:xfrm>
-      </p:grpSpPr>
-      <p:sp>
-        <p:nvSpPr>
-          <p:cNvPr id="2" name="Title 1">
-            <a:extLst>
-              <a:ext uri="{FF2B5EF4-FFF2-40B4-BE49-F238E27FC236}">
-                <a16:creationId xmlns:a16="http://schemas.microsoft.com/office/drawing/2014/main" id="{9A2DF2F9-984B-A755-BAA7-933929938195}"/>
-              </a:ext>
-            </a:extLst>
-          </p:cNvPr>
-          <p:cNvSpPr>
-            <a:spLocks noGrp="1"/>
-          </p:cNvSpPr>
-          <p:nvPr>
-            <p:ph type="title"/>
-          </p:nvPr>
-        </p:nvSpPr>
-        <p:spPr/>
-        <p:txBody>
-          <a:bodyPr/>
-          <a:lstStyle/>
-          <a:p>
-            <a:r>
-              <a:rPr lang="en-US"/>
-              <a:t>What You Can Automate Next</a:t>
-            </a:r>
-          </a:p>
-        </p:txBody>
-      </p:sp>
-      <p:sp>
-        <p:nvSpPr>
-          <p:cNvPr id="3" name="Content Placeholder 2">
-            <a:extLst>
-              <a:ext uri="{FF2B5EF4-FFF2-40B4-BE49-F238E27FC236}">
-                <a16:creationId xmlns:a16="http://schemas.microsoft.com/office/drawing/2014/main" id="{5CCF4860-8303-9DF0-5924-44910D4B4C5F}"/>
-              </a:ext>
-            </a:extLst>
-          </p:cNvPr>
-          <p:cNvSpPr>
-            <a:spLocks noGrp="1"/>
-          </p:cNvSpPr>
-          <p:nvPr>
-            <p:ph idx="1"/>
-          </p:nvPr>
-        </p:nvSpPr>
-        <p:spPr/>
-        <p:txBody>
-          <a:bodyPr>
-            <a:normAutofit/>
-          </a:bodyPr>
-          <a:lstStyle/>
-          <a:p>
-            <a:r>
-              <a:rPr lang="en-US" sz="1800"/>
-              <a:t>Onboarding: new-hire checklists and welcome emails
-Reporting: scheduled data pulls and summaries
-Helpdesk: triage and route incoming requests
-Document handling: filing, approvals and reminders
-Anywhere people copy data or chase approvals by hand</a:t>
-            </a:r>
-          </a:p>
-        </p:txBody>
-      </p:sp>
-    </p:spTree>
-    <p:extLst>
-      <p:ext uri="{BB962C8B-B14F-4D97-AF65-F5344CB8AC3E}">
-        <p14:creationId xmlns:p14="http://schemas.microsoft.com/office/powerpoint/2010/main" val="4057355895"/>
-      </p:ext>
-    </p:extLst>
-  </p:cSld>
-  <p:clrMapOvr>
-    <a:masterClrMapping/>
-  </p:clrMapOvr>
-</p:sld>
-</file>
-
-<file path=ppt/slides/slide81.xml><?xml version="1.0" encoding="utf-8"?>
-<p:sld xmlns:a="http://schemas.openxmlformats.org/drawingml/2006/main" xmlns:r="http://schemas.openxmlformats.org/officeDocument/2006/relationships" xmlns:p="http://schemas.openxmlformats.org/presentationml/2006/main">
-  <p:cSld>
-    <p:spTree>
-      <p:nvGrpSpPr>
-        <p:cNvPr id="1" name=""/>
-        <p:cNvGrpSpPr/>
-        <p:nvPr/>
-      </p:nvGrpSpPr>
-      <p:grpSpPr>
-        <a:xfrm>
-          <a:off x="0" y="0"/>
-          <a:ext cx="0" cy="0"/>
-          <a:chOff x="0" y="0"/>
-          <a:chExt cx="0" cy="0"/>
-        </a:xfrm>
-      </p:grpSpPr>
-      <p:sp>
-        <p:nvSpPr>
-          <p:cNvPr id="2" name="Title 1">
-            <a:extLst>
-              <a:ext uri="{FF2B5EF4-FFF2-40B4-BE49-F238E27FC236}">
-                <a16:creationId xmlns:a16="http://schemas.microsoft.com/office/drawing/2014/main" id="{62449BD2-2DB5-77C8-285D-9067CB1F67DF}"/>
-              </a:ext>
-            </a:extLst>
-          </p:cNvPr>
-          <p:cNvSpPr>
-            <a:spLocks noGrp="1"/>
-          </p:cNvSpPr>
-          <p:nvPr>
-            <p:ph type="title"/>
-          </p:nvPr>
-        </p:nvSpPr>
-        <p:spPr/>
-        <p:txBody>
-          <a:bodyPr/>
-          <a:lstStyle/>
-          <a:p>
-            <a:r>
-              <a:rPr lang="en-US"/>
-              <a:t>Common Pitfalls to Avoid</a:t>
-            </a:r>
-          </a:p>
-        </p:txBody>
-      </p:sp>
-      <p:sp>
-        <p:nvSpPr>
-          <p:cNvPr id="3" name="Content Placeholder 2">
-            <a:extLst>
-              <a:ext uri="{FF2B5EF4-FFF2-40B4-BE49-F238E27FC236}">
-                <a16:creationId xmlns:a16="http://schemas.microsoft.com/office/drawing/2014/main" id="{C26A95F9-E88D-D0F4-A860-1BA06E232A45}"/>
-              </a:ext>
-            </a:extLst>
-          </p:cNvPr>
-          <p:cNvSpPr>
-            <a:spLocks noGrp="1"/>
-          </p:cNvSpPr>
-          <p:nvPr>
-            <p:ph idx="1"/>
-          </p:nvPr>
-        </p:nvSpPr>
-        <p:spPr/>
-        <p:txBody>
-          <a:bodyPr>
-            <a:normAutofit/>
-          </a:bodyPr>
-          <a:lstStyle/>
-          <a:p>
-            <a:r>
-              <a:rPr lang="en-US" sz="1800"/>
-              <a:t>Automating a broken process — fix the process first
-Trying to build everything in one giant flow
-Skipping tests, then surprises in production
-No error handling — failures go unnoticed
-Vague agent prompts that return inconsistent data</a:t>
-            </a:r>
-          </a:p>
-        </p:txBody>
-      </p:sp>
-    </p:spTree>
-    <p:extLst>
-      <p:ext uri="{BB962C8B-B14F-4D97-AF65-F5344CB8AC3E}">
-        <p14:creationId xmlns:p14="http://schemas.microsoft.com/office/powerpoint/2010/main" val="1787957932"/>
-      </p:ext>
-    </p:extLst>
-  </p:cSld>
-  <p:clrMapOvr>
-    <a:masterClrMapping/>
-  </p:clrMapOvr>
-</p:sld>
-</file>
-
-<file path=ppt/slides/slide82.xml><?xml version="1.0" encoding="utf-8"?>
-<p:sld xmlns:a="http://schemas.openxmlformats.org/drawingml/2006/main" xmlns:r="http://schemas.openxmlformats.org/officeDocument/2006/relationships" xmlns:p="http://schemas.openxmlformats.org/presentationml/2006/main">
-  <p:cSld>
-    <p:spTree>
-      <p:nvGrpSpPr>
-        <p:cNvPr id="1" name=""/>
-        <p:cNvGrpSpPr/>
-        <p:nvPr/>
-      </p:nvGrpSpPr>
-      <p:grpSpPr>
-        <a:xfrm>
-          <a:off x="0" y="0"/>
-          <a:ext cx="0" cy="0"/>
-          <a:chOff x="0" y="0"/>
-          <a:chExt cx="0" cy="0"/>
-        </a:xfrm>
-      </p:grpSpPr>
-      <p:sp>
-        <p:nvSpPr>
-          <p:cNvPr id="2" name="Title 1">
-            <a:extLst>
-              <a:ext uri="{FF2B5EF4-FFF2-40B4-BE49-F238E27FC236}">
-                <a16:creationId xmlns:a16="http://schemas.microsoft.com/office/drawing/2014/main" id="{FBB2B063-FE71-8DB0-46FB-13E6AB1CEA40}"/>
-              </a:ext>
-            </a:extLst>
-          </p:cNvPr>
-          <p:cNvSpPr>
-            <a:spLocks noGrp="1"/>
-          </p:cNvSpPr>
-          <p:nvPr>
-            <p:ph type="title"/>
-          </p:nvPr>
-        </p:nvSpPr>
-        <p:spPr/>
-        <p:txBody>
-          <a:bodyPr/>
-          <a:lstStyle/>
-          <a:p>
-            <a:r>
-              <a:rPr lang="en-US"/>
-              <a:t>Governance &amp; Security Basics</a:t>
-            </a:r>
-          </a:p>
-        </p:txBody>
-      </p:sp>
-      <p:sp>
-        <p:nvSpPr>
-          <p:cNvPr id="3" name="Content Placeholder 2">
-            <a:extLst>
-              <a:ext uri="{FF2B5EF4-FFF2-40B4-BE49-F238E27FC236}">
-                <a16:creationId xmlns:a16="http://schemas.microsoft.com/office/drawing/2014/main" id="{45B09298-679E-BC7E-0C15-59E0B78D509B}"/>
-              </a:ext>
-            </a:extLst>
-          </p:cNvPr>
-          <p:cNvSpPr>
-            <a:spLocks noGrp="1"/>
-          </p:cNvSpPr>
-          <p:nvPr>
-            <p:ph idx="1"/>
-          </p:nvPr>
-        </p:nvSpPr>
-        <p:spPr/>
-        <p:txBody>
-          <a:bodyPr>
-            <a:normAutofit/>
-          </a:bodyPr>
-          <a:lstStyle/>
-          <a:p>
-            <a:r>
-              <a:rPr lang="en-US" sz="1800"/>
-              <a:t>Use connections and permissions you're authorised to use
-Keep sensitive data out of emails and logs where possible
-Follow your organisation's data and approval policies
-Document what each flow does and who owns it
-Review and retire flows that are no longer needed</a:t>
-            </a:r>
-          </a:p>
-        </p:txBody>
-      </p:sp>
-    </p:spTree>
-    <p:extLst>
-      <p:ext uri="{BB962C8B-B14F-4D97-AF65-F5344CB8AC3E}">
-        <p14:creationId xmlns:p14="http://schemas.microsoft.com/office/powerpoint/2010/main" val="2262335789"/>
-      </p:ext>
-    </p:extLst>
-  </p:cSld>
-  <p:clrMapOvr>
-    <a:masterClrMapping/>
-  </p:clrMapOvr>
-</p:sld>
-</file>
-
-<file path=ppt/slides/slide83.xml><?xml version="1.0" encoding="utf-8"?>
-<p:sld xmlns:a="http://schemas.openxmlformats.org/drawingml/2006/main" xmlns:r="http://schemas.openxmlformats.org/officeDocument/2006/relationships" xmlns:p="http://schemas.openxmlformats.org/presentationml/2006/main">
-  <p:cSld>
-    <p:spTree>
-      <p:nvGrpSpPr>
-        <p:cNvPr id="1" name=""/>
-        <p:cNvGrpSpPr/>
-        <p:nvPr/>
-      </p:nvGrpSpPr>
-      <p:grpSpPr>
-        <a:xfrm>
-          <a:off x="0" y="0"/>
-          <a:ext cx="0" cy="0"/>
-          <a:chOff x="0" y="0"/>
-          <a:chExt cx="0" cy="0"/>
-        </a:xfrm>
-      </p:grpSpPr>
-      <p:sp>
-        <p:nvSpPr>
-          <p:cNvPr id="2" name="Title 1">
-            <a:extLst>
-              <a:ext uri="{FF2B5EF4-FFF2-40B4-BE49-F238E27FC236}">
-                <a16:creationId xmlns:a16="http://schemas.microsoft.com/office/drawing/2014/main" id="{8359F0DE-8506-42F9-AD61-C1755B9C6456}"/>
-              </a:ext>
-            </a:extLst>
-          </p:cNvPr>
-          <p:cNvSpPr>
-            <a:spLocks noGrp="1"/>
-          </p:cNvSpPr>
-          <p:nvPr>
-            <p:ph type="title"/>
-          </p:nvPr>
-        </p:nvSpPr>
-        <p:spPr/>
-        <p:txBody>
-          <a:bodyPr/>
-          <a:lstStyle/>
-          <a:p>
-            <a:r>
-              <a:rPr lang="en-US"/>
-              <a:t>Rolling This Out at Work</a:t>
-            </a:r>
-          </a:p>
-        </p:txBody>
-      </p:sp>
-      <p:sp>
-        <p:nvSpPr>
-          <p:cNvPr id="3" name="Content Placeholder 2">
-            <a:extLst>
-              <a:ext uri="{FF2B5EF4-FFF2-40B4-BE49-F238E27FC236}">
-                <a16:creationId xmlns:a16="http://schemas.microsoft.com/office/drawing/2014/main" id="{A5D77EA5-6EF6-BB98-A2E2-5494A12ADFAD}"/>
-              </a:ext>
-            </a:extLst>
-          </p:cNvPr>
-          <p:cNvSpPr>
-            <a:spLocks noGrp="1"/>
-          </p:cNvSpPr>
-          <p:nvPr>
-            <p:ph idx="1"/>
-          </p:nvPr>
-        </p:nvSpPr>
-        <p:spPr/>
-        <p:txBody>
-          <a:bodyPr>
-            <a:normAutofit/>
-          </a:bodyPr>
-          <a:lstStyle/>
-          <a:p>
-            <a:r>
-              <a:rPr lang="en-US" sz="1800"/>
-              <a:t>Pick one painful, repetitive task to automate first
-Prove the value, then share the win with your team
-Build a small library of reusable flows and agents
-Involve the people who do the work in the design
-Iterate — improve flows as needs change</a:t>
-            </a:r>
-          </a:p>
-        </p:txBody>
-      </p:sp>
-    </p:spTree>
-    <p:extLst>
-      <p:ext uri="{BB962C8B-B14F-4D97-AF65-F5344CB8AC3E}">
-        <p14:creationId xmlns:p14="http://schemas.microsoft.com/office/powerpoint/2010/main" val="1917962558"/>
-      </p:ext>
-    </p:extLst>
-  </p:cSld>
-  <p:clrMapOvr>
-    <a:masterClrMapping/>
-  </p:clrMapOvr>
-</p:sld>
-</file>
-
-<file path=ppt/slides/slide84.xml><?xml version="1.0" encoding="utf-8"?>
-<p:sld xmlns:a="http://schemas.openxmlformats.org/drawingml/2006/main" xmlns:r="http://schemas.openxmlformats.org/officeDocument/2006/relationships" xmlns:p="http://schemas.openxmlformats.org/presentationml/2006/main">
-  <p:cSld>
-    <p:spTree>
-      <p:nvGrpSpPr>
-        <p:cNvPr id="1" name=""/>
-        <p:cNvGrpSpPr/>
-        <p:nvPr/>
-      </p:nvGrpSpPr>
-      <p:grpSpPr>
-        <a:xfrm>
-          <a:off x="0" y="0"/>
-          <a:ext cx="0" cy="0"/>
-          <a:chOff x="0" y="0"/>
-          <a:chExt cx="0" cy="0"/>
-        </a:xfrm>
-      </p:grpSpPr>
-      <p:sp>
-        <p:nvSpPr>
-          <p:cNvPr id="2" name="Title 1">
-            <a:extLst>
-              <a:ext uri="{FF2B5EF4-FFF2-40B4-BE49-F238E27FC236}">
-                <a16:creationId xmlns:a16="http://schemas.microsoft.com/office/drawing/2014/main" id="{8D14DB8B-0314-C578-F18D-F0C7D5C8B018}"/>
-              </a:ext>
-            </a:extLst>
-          </p:cNvPr>
-          <p:cNvSpPr>
-            <a:spLocks noGrp="1"/>
-          </p:cNvSpPr>
-          <p:nvPr>
-            <p:ph type="title"/>
-          </p:nvPr>
-        </p:nvSpPr>
-        <p:spPr/>
-        <p:txBody>
-          <a:bodyPr/>
-          <a:lstStyle/>
-          <a:p>
-            <a:r>
-              <a:rPr lang="en-US"/>
-              <a:t>Course Recap — The Big Picture</a:t>
-            </a:r>
-          </a:p>
-        </p:txBody>
-      </p:sp>
-      <p:sp>
-        <p:nvSpPr>
-          <p:cNvPr id="3" name="Content Placeholder 2">
-            <a:extLst>
-              <a:ext uri="{FF2B5EF4-FFF2-40B4-BE49-F238E27FC236}">
-                <a16:creationId xmlns:a16="http://schemas.microsoft.com/office/drawing/2014/main" id="{D445FF6A-643A-36F6-288C-4418016B3CB9}"/>
-              </a:ext>
-            </a:extLst>
-          </p:cNvPr>
-          <p:cNvSpPr>
-            <a:spLocks noGrp="1"/>
-          </p:cNvSpPr>
-          <p:nvPr>
-            <p:ph idx="1"/>
-          </p:nvPr>
-        </p:nvSpPr>
-        <p:spPr/>
-        <p:txBody>
-          <a:bodyPr>
-            <a:normAutofit/>
-          </a:bodyPr>
-          <a:lstStyle/>
-          <a:p>
-            <a:r>
-              <a:rPr lang="en-US" sz="1800"/>
-              <a:t>Day 1: automation logic and Power Automate flows
-Day 2: building business agents in Copilot Studio
-Day 3: orchestrating agents + flows end to end
-You built working automations for real scenarios
-You can now design, build and run your own workflows</a:t>
-            </a:r>
-          </a:p>
-        </p:txBody>
-      </p:sp>
-    </p:spTree>
-    <p:extLst>
-      <p:ext uri="{BB962C8B-B14F-4D97-AF65-F5344CB8AC3E}">
-        <p14:creationId xmlns:p14="http://schemas.microsoft.com/office/powerpoint/2010/main" val="2766648414"/>
-      </p:ext>
-    </p:extLst>
-  </p:cSld>
-  <p:clrMapOvr>
-    <a:masterClrMapping/>
-  </p:clrMapOvr>
-</p:sld>
-</file>
-
-<file path=ppt/slides/slide85.xml><?xml version="1.0" encoding="utf-8"?>
-<p:sld xmlns:a="http://schemas.openxmlformats.org/drawingml/2006/main" xmlns:r="http://schemas.openxmlformats.org/officeDocument/2006/relationships" xmlns:p="http://schemas.openxmlformats.org/presentationml/2006/main">
-  <p:cSld>
-    <p:spTree>
-      <p:nvGrpSpPr>
-        <p:cNvPr id="1" name=""/>
-        <p:cNvGrpSpPr/>
-        <p:nvPr/>
-      </p:nvGrpSpPr>
-      <p:grpSpPr>
-        <a:xfrm>
-          <a:off x="0" y="0"/>
-          <a:ext cx="0" cy="0"/>
-          <a:chOff x="0" y="0"/>
-          <a:chExt cx="0" cy="0"/>
-        </a:xfrm>
-      </p:grpSpPr>
-      <p:sp>
-        <p:nvSpPr>
-          <p:cNvPr id="2" name="Title 1">
-            <a:extLst>
-              <a:ext uri="{FF2B5EF4-FFF2-40B4-BE49-F238E27FC236}">
-                <a16:creationId xmlns:a16="http://schemas.microsoft.com/office/drawing/2014/main" id="{329056BF-B5B7-F33E-DEEB-DC95C630F1F1}"/>
-              </a:ext>
-            </a:extLst>
-          </p:cNvPr>
-          <p:cNvSpPr>
-            <a:spLocks noGrp="1"/>
-          </p:cNvSpPr>
-          <p:nvPr>
-            <p:ph type="title"/>
-          </p:nvPr>
-        </p:nvSpPr>
-        <p:spPr/>
-        <p:txBody>
-          <a:bodyPr/>
-          <a:lstStyle/>
-          <a:p>
-            <a:r>
-              <a:rPr lang="en-US"/>
-              <a:t>Key Takeaways</a:t>
-            </a:r>
-          </a:p>
-        </p:txBody>
-      </p:sp>
-      <p:sp>
-        <p:nvSpPr>
-          <p:cNvPr id="3" name="Content Placeholder 2">
-            <a:extLst>
-              <a:ext uri="{FF2B5EF4-FFF2-40B4-BE49-F238E27FC236}">
-                <a16:creationId xmlns:a16="http://schemas.microsoft.com/office/drawing/2014/main" id="{1C9D97EE-B4BF-F57E-5A6F-E19E27A9B88B}"/>
-              </a:ext>
-            </a:extLst>
-          </p:cNvPr>
-          <p:cNvSpPr>
-            <a:spLocks noGrp="1"/>
-          </p:cNvSpPr>
-          <p:nvPr>
-            <p:ph idx="1"/>
-          </p:nvPr>
-        </p:nvSpPr>
-        <p:spPr/>
-        <p:txBody>
-          <a:bodyPr>
-            <a:normAutofit/>
-          </a:bodyPr>
-          <a:lstStyle/>
-          <a:p>
-            <a:r>
-              <a:rPr lang="en-US" sz="1800"/>
-              <a:t>Every workflow is Trigger → Actions → Output
-Power Automate does the work; Copilot Studio adds the intelligence
-Structured agent outputs make flows reliable
-Orchestration turns steps into complete processes
-Start small, test, and improve — then scale</a:t>
-            </a:r>
-          </a:p>
-        </p:txBody>
-      </p:sp>
-    </p:spTree>
-    <p:extLst>
-      <p:ext uri="{BB962C8B-B14F-4D97-AF65-F5344CB8AC3E}">
-        <p14:creationId xmlns:p14="http://schemas.microsoft.com/office/powerpoint/2010/main" val="2343113792"/>
-      </p:ext>
-    </p:extLst>
-  </p:cSld>
-  <p:clrMapOvr>
-    <a:masterClrMapping/>
-  </p:clrMapOvr>
-</p:sld>
-</file>
-
-<file path=ppt/slides/slide86.xml><?xml version="1.0" encoding="utf-8"?>
-<p:sld xmlns:a="http://schemas.openxmlformats.org/drawingml/2006/main" xmlns:r="http://schemas.openxmlformats.org/officeDocument/2006/relationships" xmlns:p="http://schemas.openxmlformats.org/presentationml/2006/main">
-  <p:cSld>
-    <p:spTree>
-      <p:nvGrpSpPr>
-        <p:cNvPr id="1" name=""/>
-        <p:cNvGrpSpPr/>
-        <p:nvPr/>
-      </p:nvGrpSpPr>
-      <p:grpSpPr>
-        <a:xfrm>
-          <a:off x="0" y="0"/>
-          <a:ext cx="0" cy="0"/>
-          <a:chOff x="0" y="0"/>
-          <a:chExt cx="0" cy="0"/>
-        </a:xfrm>
-      </p:grpSpPr>
-      <p:sp>
-        <p:nvSpPr>
-          <p:cNvPr id="2" name="Title 1">
-            <a:extLst>
-              <a:ext uri="{FF2B5EF4-FFF2-40B4-BE49-F238E27FC236}">
-                <a16:creationId xmlns:a16="http://schemas.microsoft.com/office/drawing/2014/main" id="{18849F80-0CCC-1E84-EF12-A7286325895B}"/>
-              </a:ext>
-            </a:extLst>
-          </p:cNvPr>
-          <p:cNvSpPr>
-            <a:spLocks noGrp="1"/>
-          </p:cNvSpPr>
-          <p:nvPr>
-            <p:ph type="title"/>
-          </p:nvPr>
-        </p:nvSpPr>
-        <p:spPr/>
-        <p:txBody>
-          <a:bodyPr/>
-          <a:lstStyle/>
-          <a:p>
-            <a:r>
-              <a:rPr lang="en-US"/>
-              <a:t>Resources &amp; Where to Go Next</a:t>
-            </a:r>
-          </a:p>
-        </p:txBody>
-      </p:sp>
-      <p:sp>
-        <p:nvSpPr>
-          <p:cNvPr id="3" name="Content Placeholder 2">
-            <a:extLst>
-              <a:ext uri="{FF2B5EF4-FFF2-40B4-BE49-F238E27FC236}">
-                <a16:creationId xmlns:a16="http://schemas.microsoft.com/office/drawing/2014/main" id="{60EAC2A6-1F1A-FD31-7E7A-A792B9661E72}"/>
-              </a:ext>
-            </a:extLst>
-          </p:cNvPr>
-          <p:cNvSpPr>
-            <a:spLocks noGrp="1"/>
-          </p:cNvSpPr>
-          <p:nvPr>
-            <p:ph idx="1"/>
-          </p:nvPr>
-        </p:nvSpPr>
-        <p:spPr/>
-        <p:txBody>
-          <a:bodyPr>
-            <a:normAutofit/>
-          </a:bodyPr>
-          <a:lstStyle/>
-          <a:p>
-            <a:r>
-              <a:rPr lang="en-US" sz="1800"/>
-              <a:t>make.powerautomate.com — build and manage your flows
-copilotstudio.microsoft.com — create and publish agents
-Microsoft Learn — free guided learning paths
-Templates gallery — start from pre-built flows
-Your community — share flows and patterns with colleagues</a:t>
-            </a:r>
-          </a:p>
-        </p:txBody>
-      </p:sp>
-    </p:spTree>
-    <p:extLst>
-      <p:ext uri="{BB962C8B-B14F-4D97-AF65-F5344CB8AC3E}">
-        <p14:creationId xmlns:p14="http://schemas.microsoft.com/office/powerpoint/2010/main" val="2032098328"/>
-      </p:ext>
-    </p:extLst>
-  </p:cSld>
-  <p:clrMapOvr>
-    <a:masterClrMapping/>
-  </p:clrMapOvr>
-</p:sld>
-</file>
-
-<file path=ppt/slides/slide87.xml><?xml version="1.0" encoding="utf-8"?>
-<p:sld xmlns:a="http://schemas.openxmlformats.org/drawingml/2006/main" xmlns:r="http://schemas.openxmlformats.org/officeDocument/2006/relationships" xmlns:p="http://schemas.openxmlformats.org/presentationml/2006/main">
-  <p:cSld>
-    <p:spTree>
-      <p:nvGrpSpPr>
-        <p:cNvPr id="1" name=""/>
-        <p:cNvGrpSpPr/>
-        <p:nvPr/>
-      </p:nvGrpSpPr>
-      <p:grpSpPr>
-        <a:xfrm>
-          <a:off x="0" y="0"/>
-          <a:ext cx="0" cy="0"/>
-          <a:chOff x="0" y="0"/>
-          <a:chExt cx="0" cy="0"/>
-        </a:xfrm>
-      </p:grpSpPr>
-      <p:sp>
-        <p:nvSpPr>
-          <p:cNvPr id="2" name="Title 1">
-            <a:extLst>
-              <a:ext uri="{FF2B5EF4-FFF2-40B4-BE49-F238E27FC236}">
-                <a16:creationId xmlns:a16="http://schemas.microsoft.com/office/drawing/2014/main" id="{D23FF29D-2E00-A7A1-232C-5186174A1FA9}"/>
-              </a:ext>
-            </a:extLst>
-          </p:cNvPr>
-          <p:cNvSpPr>
-            <a:spLocks noGrp="1"/>
-          </p:cNvSpPr>
-          <p:nvPr>
-            <p:ph type="title"/>
-          </p:nvPr>
-        </p:nvSpPr>
-        <p:spPr/>
-        <p:txBody>
-          <a:bodyPr/>
-          <a:lstStyle/>
-          <a:p>
-            <a:r>
-              <a:rPr lang="en-US"/>
-              <a:t>Thank You</a:t>
-            </a:r>
-          </a:p>
-        </p:txBody>
-      </p:sp>
-      <p:sp>
-        <p:nvSpPr>
-          <p:cNvPr id="3" name="Text Placeholder 2">
-            <a:extLst>
-              <a:ext uri="{FF2B5EF4-FFF2-40B4-BE49-F238E27FC236}">
-                <a16:creationId xmlns:a16="http://schemas.microsoft.com/office/drawing/2014/main" id="{0E5E0239-BFD9-3216-03B0-6B956507258A}"/>
-              </a:ext>
-            </a:extLst>
-          </p:cNvPr>
-          <p:cNvSpPr>
-            <a:spLocks noGrp="1"/>
-          </p:cNvSpPr>
-          <p:nvPr>
-            <p:ph type="body" idx="1"/>
-          </p:nvPr>
-        </p:nvSpPr>
-        <p:spPr/>
-        <p:txBody>
-          <a:bodyPr>
-            <a:normAutofit/>
-          </a:bodyPr>
-          <a:lstStyle/>
-          <a:p>
-            <a:r>
-              <a:rPr lang="en-US" sz="1800" b="1">
-                <a:solidFill>
-                  <a:srgbClr val="7C3AED"/>
-                </a:solidFill>
-              </a:rPr>
-              <a:t>Now go automate something — questions welcome</a:t>
-            </a:r>
-          </a:p>
-        </p:txBody>
-      </p:sp>
-    </p:spTree>
-    <p:extLst>
-      <p:ext uri="{BB962C8B-B14F-4D97-AF65-F5344CB8AC3E}">
-        <p14:creationId xmlns:p14="http://schemas.microsoft.com/office/powerpoint/2010/main" val="3938712014"/>
-      </p:ext>
-    </p:extLst>
-  </p:cSld>
-  <p:clrMapOvr>
-    <a:masterClrMapping/>
-  </p:clrMapOvr>
-</p:sld>
-</file>
-
-<file path=ppt/slides/slide88.xml><?xml version="1.0" encoding="utf-8"?>
-<p:sld xmlns:a="http://schemas.openxmlformats.org/drawingml/2006/main" xmlns:r="http://schemas.openxmlformats.org/officeDocument/2006/relationships" xmlns:p="http://schemas.openxmlformats.org/presentationml/2006/main">
-  <p:cSld>
-    <p:spTree>
-      <p:nvGrpSpPr>
-        <p:cNvPr id="1" name=""/>
-        <p:cNvGrpSpPr/>
-        <p:nvPr/>
-      </p:nvGrpSpPr>
-      <p:grpSpPr>
-        <a:xfrm>
-          <a:off x="0" y="0"/>
-          <a:ext cx="0" cy="0"/>
-          <a:chOff x="0" y="0"/>
-          <a:chExt cx="0" cy="0"/>
-        </a:xfrm>
-      </p:grpSpPr>
-      <p:sp>
-        <p:nvSpPr>
-          <p:cNvPr id="2" name="Title 1">
-            <a:extLst>
-              <a:ext uri="{FF2B5EF4-FFF2-40B4-BE49-F238E27FC236}">
-                <a16:creationId xmlns:a16="http://schemas.microsoft.com/office/drawing/2014/main" id="{489C4941-4D0E-5C2B-5C04-A18FE6E4CC24}"/>
-              </a:ext>
-            </a:extLst>
-          </p:cNvPr>
-          <p:cNvSpPr>
-            <a:spLocks noGrp="1"/>
-          </p:cNvSpPr>
-          <p:nvPr>
-            <p:ph type="title"/>
-          </p:nvPr>
-        </p:nvSpPr>
-        <p:spPr/>
-        <p:txBody>
-          <a:bodyPr/>
-          <a:lstStyle/>
-          <a:p>
-            <a:r>
-              <a:rPr lang="en-US"/>
-              <a:t>Lab 4 — Scheduled Trigger Workflow</a:t>
-            </a:r>
-          </a:p>
-        </p:txBody>
-      </p:sp>
-      <p:sp>
-        <p:nvSpPr>
-          <p:cNvPr id="3" name="Content Placeholder 2">
-            <a:extLst>
-              <a:ext uri="{FF2B5EF4-FFF2-40B4-BE49-F238E27FC236}">
-                <a16:creationId xmlns:a16="http://schemas.microsoft.com/office/drawing/2014/main" id="{D967F280-F155-A084-A7DC-5A9A21D152B2}"/>
-              </a:ext>
-            </a:extLst>
-          </p:cNvPr>
-          <p:cNvSpPr>
-            <a:spLocks noGrp="1"/>
-          </p:cNvSpPr>
-          <p:nvPr>
-            <p:ph sz="half" idx="1"/>
-          </p:nvPr>
-        </p:nvSpPr>
-        <p:spPr/>
-        <p:txBody>
-          <a:bodyPr>
-            <a:normAutofit/>
-          </a:bodyPr>
-          <a:lstStyle/>
-          <a:p>
-            <a:r>
-              <a:rPr lang="en-US" sz="1600"/>
-              <a:t>GOAL
-Send a daily reminder / digest automatically
-YOU'LL USE
-Recurrence (schedule) trigger
-Send an email action
-Optional: List rows from Excel</a:t>
-            </a:r>
-          </a:p>
-        </p:txBody>
-      </p:sp>
-      <p:sp>
-        <p:nvSpPr>
-          <p:cNvPr id="4" name="Content Placeholder 3">
-            <a:extLst>
-              <a:ext uri="{FF2B5EF4-FFF2-40B4-BE49-F238E27FC236}">
-                <a16:creationId xmlns:a16="http://schemas.microsoft.com/office/drawing/2014/main" id="{073DA2BB-4E22-9731-A736-3DE77AD8FC1E}"/>
-              </a:ext>
-            </a:extLst>
-          </p:cNvPr>
-          <p:cNvSpPr>
-            <a:spLocks noGrp="1"/>
-          </p:cNvSpPr>
-          <p:nvPr>
-            <p:ph sz="half" idx="2"/>
-          </p:nvPr>
-        </p:nvSpPr>
-        <p:spPr/>
-        <p:txBody>
-          <a:bodyPr>
-            <a:normAutofit/>
-          </a:bodyPr>
-          <a:lstStyle/>
-          <a:p>
-            <a:r>
-              <a:rPr lang="en-US" sz="1600"/>
-              <a:t>STEPS
-1.  Trigger: Recurrence — weekdays 9 AM
-2.  Set the correct time zone
-3.  Action: send a reminder email
-4.  Optional: add a live count from Excel
-5.  Test now, then let it run on schedule</a:t>
-            </a:r>
-          </a:p>
-        </p:txBody>
-      </p:sp>
-    </p:spTree>
-    <p:extLst>
-      <p:ext uri="{BB962C8B-B14F-4D97-AF65-F5344CB8AC3E}">
-        <p14:creationId xmlns:p14="http://schemas.microsoft.com/office/powerpoint/2010/main" val="586675484"/>
-      </p:ext>
-    </p:extLst>
-  </p:cSld>
-  <p:clrMapOvr>
-    <a:masterClrMapping/>
-  </p:clrMapOvr>
-</p:sld>
-</file>
-
-<file path=ppt/slides/slide89.xml><?xml version="1.0" encoding="utf-8"?>
-<p:sld xmlns:a="http://schemas.openxmlformats.org/drawingml/2006/main" xmlns:r="http://schemas.openxmlformats.org/officeDocument/2006/relationships" xmlns:p="http://schemas.openxmlformats.org/presentationml/2006/main">
-  <p:cSld>
-    <p:spTree>
-      <p:nvGrpSpPr>
-        <p:cNvPr id="1" name=""/>
-        <p:cNvGrpSpPr/>
-        <p:nvPr/>
-      </p:nvGrpSpPr>
-      <p:grpSpPr>
-        <a:xfrm>
-          <a:off x="0" y="0"/>
-          <a:ext cx="0" cy="0"/>
-          <a:chOff x="0" y="0"/>
-          <a:chExt cx="0" cy="0"/>
-        </a:xfrm>
-      </p:grpSpPr>
-      <p:sp>
-        <p:nvSpPr>
-          <p:cNvPr id="2" name="Title 1">
-            <a:extLst>
-              <a:ext uri="{FF2B5EF4-FFF2-40B4-BE49-F238E27FC236}">
-                <a16:creationId xmlns:a16="http://schemas.microsoft.com/office/drawing/2014/main" id="{489C4941-4D0E-5C2B-5C04-A18FE6E4CC24}"/>
-              </a:ext>
-            </a:extLst>
-          </p:cNvPr>
-          <p:cNvSpPr>
-            <a:spLocks noGrp="1"/>
-          </p:cNvSpPr>
-          <p:nvPr>
-            <p:ph type="title"/>
-          </p:nvPr>
-        </p:nvSpPr>
-        <p:spPr/>
-        <p:txBody>
-          <a:bodyPr/>
-          <a:lstStyle/>
-          <a:p>
-            <a:r>
-              <a:rPr lang="en-US"/>
-              <a:t>Lab 5 — Form Submission Workflow</a:t>
-            </a:r>
-          </a:p>
-        </p:txBody>
-      </p:sp>
-      <p:sp>
-        <p:nvSpPr>
-          <p:cNvPr id="3" name="Content Placeholder 2">
-            <a:extLst>
-              <a:ext uri="{FF2B5EF4-FFF2-40B4-BE49-F238E27FC236}">
-                <a16:creationId xmlns:a16="http://schemas.microsoft.com/office/drawing/2014/main" id="{D967F280-F155-A084-A7DC-5A9A21D152B2}"/>
-              </a:ext>
-            </a:extLst>
-          </p:cNvPr>
-          <p:cNvSpPr>
-            <a:spLocks noGrp="1"/>
-          </p:cNvSpPr>
-          <p:nvPr>
-            <p:ph sz="half" idx="1"/>
-          </p:nvPr>
-        </p:nvSpPr>
-        <p:spPr/>
-        <p:txBody>
-          <a:bodyPr>
-            <a:normAutofit/>
-          </a:bodyPr>
-          <a:lstStyle/>
-          <a:p>
-            <a:r>
-              <a:rPr lang="en-US" sz="1600"/>
-              <a:t>GOAL
-Capture form submissions to email and Excel
-YOU'LL USE
-Microsoft Forms trigger
-Get response details
-Send email + Add a row to Excel</a:t>
-            </a:r>
-          </a:p>
-        </p:txBody>
-      </p:sp>
-      <p:sp>
-        <p:nvSpPr>
-          <p:cNvPr id="4" name="Content Placeholder 3">
-            <a:extLst>
-              <a:ext uri="{FF2B5EF4-FFF2-40B4-BE49-F238E27FC236}">
-                <a16:creationId xmlns:a16="http://schemas.microsoft.com/office/drawing/2014/main" id="{073DA2BB-4E22-9731-A736-3DE77AD8FC1E}"/>
-              </a:ext>
-            </a:extLst>
-          </p:cNvPr>
-          <p:cNvSpPr>
-            <a:spLocks noGrp="1"/>
-          </p:cNvSpPr>
-          <p:nvPr>
-            <p:ph sz="half" idx="2"/>
-          </p:nvPr>
-        </p:nvSpPr>
-        <p:spPr/>
-        <p:txBody>
-          <a:bodyPr>
-            <a:normAutofit/>
-          </a:bodyPr>
-          <a:lstStyle/>
-          <a:p>
-            <a:r>
-              <a:rPr lang="en-US" sz="1600"/>
-              <a:t>STEPS
-1.  Build a Microsoft Form (shareable URL)
-2.  Trigger: when a response is submitted
-3.  Get response details
-4.  Email the team the new submission
-5.  Log the submission to an Excel table</a:t>
-            </a:r>
-          </a:p>
-        </p:txBody>
-      </p:sp>
-    </p:spTree>
-    <p:extLst>
-      <p:ext uri="{BB962C8B-B14F-4D97-AF65-F5344CB8AC3E}">
-        <p14:creationId xmlns:p14="http://schemas.microsoft.com/office/powerpoint/2010/main" val="586675484"/>
-      </p:ext>
-    </p:extLst>
-  </p:cSld>
-  <p:clrMapOvr>
-    <a:masterClrMapping/>
-  </p:clrMapOvr>
-</p:sld>
-</file>
-
-<file path=ppt/slides/slide9.xml><?xml version="1.0" encoding="utf-8"?>
-<p:sld xmlns:a="http://schemas.openxmlformats.org/drawingml/2006/main" xmlns:r="http://schemas.openxmlformats.org/officeDocument/2006/relationships" xmlns:p="http://schemas.openxmlformats.org/presentationml/2006/main">
-  <p:cSld>
-    <p:spTree>
-      <p:nvGrpSpPr>
-        <p:cNvPr id="1" name=""/>
-        <p:cNvGrpSpPr/>
-        <p:nvPr/>
-      </p:nvGrpSpPr>
-      <p:grpSpPr>
-        <a:xfrm>
-          <a:off x="0" y="0"/>
-          <a:ext cx="0" cy="0"/>
-          <a:chOff x="0" y="0"/>
-          <a:chExt cx="0" cy="0"/>
-        </a:xfrm>
-      </p:grpSpPr>
-      <p:sp>
-        <p:nvSpPr>
-          <p:cNvPr id="2" name="Title 1">
-            <a:extLst>
-              <a:ext uri="{FF2B5EF4-FFF2-40B4-BE49-F238E27FC236}">
-                <a16:creationId xmlns:a16="http://schemas.microsoft.com/office/drawing/2014/main" id="{C2C77996-099F-A63F-A74A-2367E5BDA414}"/>
-              </a:ext>
-            </a:extLst>
-          </p:cNvPr>
-          <p:cNvSpPr>
-            <a:spLocks noGrp="1"/>
-          </p:cNvSpPr>
-          <p:nvPr>
-            <p:ph type="title"/>
-          </p:nvPr>
-        </p:nvSpPr>
-        <p:spPr/>
-        <p:txBody>
-          <a:bodyPr/>
-          <a:lstStyle/>
-          <a:p>
-            <a:r>
-              <a:rPr lang="en-US"/>
-              <a:t>Manual Process vs. Automated Workflow</a:t>
-            </a:r>
-          </a:p>
-        </p:txBody>
-      </p:sp>
-      <p:sp>
-        <p:nvSpPr>
-          <p:cNvPr id="3" name="Content Placeholder 2">
-            <a:extLst>
-              <a:ext uri="{FF2B5EF4-FFF2-40B4-BE49-F238E27FC236}">
-                <a16:creationId xmlns:a16="http://schemas.microsoft.com/office/drawing/2014/main" id="{4454D47B-ECAD-EC96-AB7D-650BD30634F7}"/>
-              </a:ext>
-            </a:extLst>
-          </p:cNvPr>
-          <p:cNvSpPr>
-            <a:spLocks noGrp="1"/>
-          </p:cNvSpPr>
-          <p:nvPr>
-            <p:ph sz="half" idx="1"/>
-          </p:nvPr>
-        </p:nvSpPr>
-        <p:spPr/>
-        <p:txBody>
-          <a:bodyPr>
-            <a:normAutofit/>
-          </a:bodyPr>
-          <a:lstStyle/>
-          <a:p>
-            <a:r>
-              <a:rPr lang="en-US" sz="1600"/>
-              <a:t>MANUAL PROCESS
-Emails get missed in busy inboxes
-Data re-keyed by hand between apps
-Approvals stall and get forgotten
-No audit trail of what happened
-Slow, inconsistent, hard to scale</a:t>
-            </a:r>
-          </a:p>
-        </p:txBody>
-      </p:sp>
-      <p:sp>
-        <p:nvSpPr>
-          <p:cNvPr id="4" name="Content Placeholder 3">
-            <a:extLst>
-              <a:ext uri="{FF2B5EF4-FFF2-40B4-BE49-F238E27FC236}">
-                <a16:creationId xmlns:a16="http://schemas.microsoft.com/office/drawing/2014/main" id="{B5836758-6433-6420-CC9D-069C47E7EDF1}"/>
-              </a:ext>
-            </a:extLst>
-          </p:cNvPr>
-          <p:cNvSpPr>
-            <a:spLocks noGrp="1"/>
-          </p:cNvSpPr>
-          <p:nvPr>
-            <p:ph sz="half" idx="2"/>
-          </p:nvPr>
-        </p:nvSpPr>
-        <p:spPr/>
-        <p:txBody>
-          <a:bodyPr>
-            <a:normAutofit/>
-          </a:bodyPr>
-          <a:lstStyle/>
-          <a:p>
-            <a:r>
-              <a:rPr lang="en-US" sz="1600"/>
-              <a:t>AUTOMATED WORKFLOW
-Triggers fire the moment an event happens
-Data flows automatically between systems
-Approvals routed, tracked and reminded
-Every action logged automatically
-Fast, consistent and scalable</a:t>
-            </a:r>
-          </a:p>
-        </p:txBody>
-      </p:sp>
-    </p:spTree>
-    <p:extLst>
-      <p:ext uri="{BB962C8B-B14F-4D97-AF65-F5344CB8AC3E}">
-        <p14:creationId xmlns:p14="http://schemas.microsoft.com/office/powerpoint/2010/main" val="2049180939"/>
-      </p:ext>
-    </p:extLst>
-  </p:cSld>
-  <p:clrMapOvr>
-    <a:masterClrMapping/>
-  </p:clrMapOvr>
-</p:sld>
-</file>
-
-<file path=ppt/slides/slide90.xml><?xml version="1.0" encoding="utf-8"?>
-<p:sld xmlns:a="http://schemas.openxmlformats.org/drawingml/2006/main" xmlns:r="http://schemas.openxmlformats.org/officeDocument/2006/relationships" xmlns:p="http://schemas.openxmlformats.org/presentationml/2006/main">
-  <p:cSld>
-    <p:spTree>
-      <p:nvGrpSpPr>
-        <p:cNvPr id="1" name=""/>
-        <p:cNvGrpSpPr/>
-        <p:nvPr/>
-      </p:nvGrpSpPr>
-      <p:grpSpPr>
-        <a:xfrm>
-          <a:off x="0" y="0"/>
-          <a:ext cx="0" cy="0"/>
-          <a:chOff x="0" y="0"/>
-          <a:chExt cx="0" cy="0"/>
-        </a:xfrm>
-      </p:grpSpPr>
-      <p:sp>
-        <p:nvSpPr>
-          <p:cNvPr id="2" name="Title 1">
-            <a:extLst>
-              <a:ext uri="{FF2B5EF4-FFF2-40B4-BE49-F238E27FC236}">
-                <a16:creationId xmlns:a16="http://schemas.microsoft.com/office/drawing/2014/main" id="{571666CC-AAE9-06B8-D1A6-1E5F90632537}"/>
-              </a:ext>
-            </a:extLst>
-          </p:cNvPr>
-          <p:cNvSpPr>
-            <a:spLocks noGrp="1"/>
-          </p:cNvSpPr>
-          <p:nvPr>
-            <p:ph type="title"/>
-          </p:nvPr>
-        </p:nvSpPr>
-        <p:spPr/>
-        <p:txBody>
-          <a:bodyPr/>
-          <a:lstStyle/>
-          <a:p>
-            <a:r>
-              <a:rPr lang="en-US"/>
-              <a:t>Lab 6 — Create Your First Agent</a:t>
-            </a:r>
-          </a:p>
-        </p:txBody>
-      </p:sp>
-      <p:sp>
-        <p:nvSpPr>
-          <p:cNvPr id="3" name="Content Placeholder 2">
-            <a:extLst>
-              <a:ext uri="{FF2B5EF4-FFF2-40B4-BE49-F238E27FC236}">
-                <a16:creationId xmlns:a16="http://schemas.microsoft.com/office/drawing/2014/main" id="{14102613-EFF2-DF81-651A-F3779CF9FC37}"/>
-              </a:ext>
-            </a:extLst>
-          </p:cNvPr>
-          <p:cNvSpPr>
-            <a:spLocks noGrp="1"/>
-          </p:cNvSpPr>
-          <p:nvPr>
-            <p:ph sz="half" idx="1"/>
-          </p:nvPr>
-        </p:nvSpPr>
-        <p:spPr/>
-        <p:txBody>
-          <a:bodyPr>
-            <a:normAutofit/>
-          </a:bodyPr>
-          <a:lstStyle/>
-          <a:p>
-            <a:r>
-              <a:rPr lang="en-US" sz="1600"/>
-              <a:t>GOAL
-Build, configure and test your
-first Copilot Studio agent
-YOU'LL USE
-Copilot Studio agent
-Instructions + built-in Test pane</a:t>
-            </a:r>
-          </a:p>
-        </p:txBody>
-      </p:sp>
-      <p:sp>
-        <p:nvSpPr>
-          <p:cNvPr id="4" name="Content Placeholder 3">
-            <a:extLst>
-              <a:ext uri="{FF2B5EF4-FFF2-40B4-BE49-F238E27FC236}">
-                <a16:creationId xmlns:a16="http://schemas.microsoft.com/office/drawing/2014/main" id="{CF24EF09-D57E-0B33-E277-90D95CAA3229}"/>
-              </a:ext>
-            </a:extLst>
-          </p:cNvPr>
-          <p:cNvSpPr>
-            <a:spLocks noGrp="1"/>
-          </p:cNvSpPr>
-          <p:nvPr>
-            <p:ph sz="half" idx="2"/>
-          </p:nvPr>
-        </p:nvSpPr>
-        <p:spPr/>
-        <p:txBody>
-          <a:bodyPr>
-            <a:normAutofit/>
-          </a:bodyPr>
-          <a:lstStyle/>
-          <a:p>
-            <a:r>
-              <a:rPr lang="en-US" sz="1600"/>
-              <a:t>STEPS
-1.  Create a new agent (skip to configure)
-2.  Write clear instructions (role + tone)
-3.  Add a knowledge source
-4.  Test it live in the chat panel
-5.  Refine instructions, then publish</a:t>
-            </a:r>
-          </a:p>
-        </p:txBody>
-      </p:sp>
-    </p:spTree>
-    <p:extLst>
-      <p:ext uri="{BB962C8B-B14F-4D97-AF65-F5344CB8AC3E}">
-        <p14:creationId xmlns:p14="http://schemas.microsoft.com/office/powerpoint/2010/main" val="1750854078"/>
-      </p:ext>
-    </p:extLst>
-  </p:cSld>
-  <p:clrMapOvr>
-    <a:masterClrMapping/>
-  </p:clrMapOvr>
-</p:sld>
-</file>
-
-<file path=ppt/slides/slide91.xml><?xml version="1.0" encoding="utf-8"?>
-<p:sld xmlns:a="http://schemas.openxmlformats.org/drawingml/2006/main" xmlns:r="http://schemas.openxmlformats.org/officeDocument/2006/relationships" xmlns:p="http://schemas.openxmlformats.org/presentationml/2006/main">
-  <p:cSld>
-    <p:spTree>
-      <p:nvGrpSpPr>
-        <p:cNvPr id="1" name=""/>
-        <p:cNvGrpSpPr/>
-        <p:nvPr/>
-      </p:nvGrpSpPr>
-      <p:grpSpPr>
-        <a:xfrm>
-          <a:off x="0" y="0"/>
-          <a:ext cx="0" cy="0"/>
-          <a:chOff x="0" y="0"/>
-          <a:chExt cx="0" cy="0"/>
-        </a:xfrm>
-      </p:grpSpPr>
-      <p:sp>
-        <p:nvSpPr>
-          <p:cNvPr id="2" name="Title 1">
-            <a:extLst>
-              <a:ext uri="{FF2B5EF4-FFF2-40B4-BE49-F238E27FC236}">
-                <a16:creationId xmlns:a16="http://schemas.microsoft.com/office/drawing/2014/main" id="{571666CC-AAE9-06B8-D1A6-1E5F90632537}"/>
-              </a:ext>
-            </a:extLst>
-          </p:cNvPr>
-          <p:cNvSpPr>
-            <a:spLocks noGrp="1"/>
-          </p:cNvSpPr>
-          <p:nvPr>
-            <p:ph type="title"/>
-          </p:nvPr>
-        </p:nvSpPr>
-        <p:spPr/>
-        <p:txBody>
-          <a:bodyPr/>
-          <a:lstStyle/>
-          <a:p>
-            <a:r>
-              <a:rPr lang="en-US"/>
-              <a:t>Lab 7 — Add Knowledge to Your Agent (RAG)</a:t>
-            </a:r>
-          </a:p>
-        </p:txBody>
-      </p:sp>
-      <p:sp>
-        <p:nvSpPr>
-          <p:cNvPr id="3" name="Content Placeholder 2">
-            <a:extLst>
-              <a:ext uri="{FF2B5EF4-FFF2-40B4-BE49-F238E27FC236}">
-                <a16:creationId xmlns:a16="http://schemas.microsoft.com/office/drawing/2014/main" id="{14102613-EFF2-DF81-651A-F3779CF9FC37}"/>
-              </a:ext>
-            </a:extLst>
-          </p:cNvPr>
-          <p:cNvSpPr>
-            <a:spLocks noGrp="1"/>
-          </p:cNvSpPr>
-          <p:nvPr>
-            <p:ph sz="half" idx="1"/>
-          </p:nvPr>
-        </p:nvSpPr>
-        <p:spPr/>
-        <p:txBody>
-          <a:bodyPr>
-            <a:normAutofit/>
-          </a:bodyPr>
-          <a:lstStyle/>
-          <a:p>
-            <a:r>
-              <a:rPr lang="en-US" sz="1600"/>
-              <a:t>GOAL
-Ground the agent in your own
-documents (RAG) with citations
-YOU'LL USE
-Knowledge sources (files / website)
-Copilot Studio agent</a:t>
-            </a:r>
-          </a:p>
-        </p:txBody>
-      </p:sp>
-      <p:sp>
-        <p:nvSpPr>
-          <p:cNvPr id="4" name="Content Placeholder 3">
-            <a:extLst>
-              <a:ext uri="{FF2B5EF4-FFF2-40B4-BE49-F238E27FC236}">
-                <a16:creationId xmlns:a16="http://schemas.microsoft.com/office/drawing/2014/main" id="{CF24EF09-D57E-0B33-E277-90D95CAA3229}"/>
-              </a:ext>
-            </a:extLst>
-          </p:cNvPr>
-          <p:cNvSpPr>
-            <a:spLocks noGrp="1"/>
-          </p:cNvSpPr>
-          <p:nvPr>
-            <p:ph sz="half" idx="2"/>
-          </p:nvPr>
-        </p:nvSpPr>
-        <p:spPr/>
-        <p:txBody>
-          <a:bodyPr>
-            <a:normAutofit/>
-          </a:bodyPr>
-          <a:lstStyle/>
-          <a:p>
-            <a:r>
-              <a:rPr lang="en-US" sz="1600"/>
-              <a:t>STEPS
-1.  Prepare a document or website
-2.  Add it as a knowledge source
-3.  Wait until the source is Ready
-4.  Ask questions answered from your content
-5.  Check the citations; tune the sources</a:t>
-            </a:r>
-          </a:p>
-        </p:txBody>
-      </p:sp>
-    </p:spTree>
-    <p:extLst>
-      <p:ext uri="{BB962C8B-B14F-4D97-AF65-F5344CB8AC3E}">
-        <p14:creationId xmlns:p14="http://schemas.microsoft.com/office/powerpoint/2010/main" val="1750854078"/>
-      </p:ext>
-    </p:extLst>
-  </p:cSld>
-  <p:clrMapOvr>
-    <a:masterClrMapping/>
-  </p:clrMapOvr>
-</p:sld>
-</file>
-
-<file path=ppt/slides/slide92.xml><?xml version="1.0" encoding="utf-8"?>
-<p:sld xmlns:a="http://schemas.openxmlformats.org/drawingml/2006/main" xmlns:r="http://schemas.openxmlformats.org/officeDocument/2006/relationships" xmlns:p="http://schemas.openxmlformats.org/presentationml/2006/main">
-  <p:cSld>
-    <p:spTree>
-      <p:nvGrpSpPr>
-        <p:cNvPr id="1" name=""/>
-        <p:cNvGrpSpPr/>
-        <p:nvPr/>
-      </p:nvGrpSpPr>
-      <p:grpSpPr>
-        <a:xfrm>
-          <a:off x="0" y="0"/>
-          <a:ext cx="0" cy="0"/>
-          <a:chOff x="0" y="0"/>
-          <a:chExt cx="0" cy="0"/>
-        </a:xfrm>
-      </p:grpSpPr>
-      <p:sp>
-        <p:nvSpPr>
-          <p:cNvPr id="2" name="Title 1">
-            <a:extLst>
-              <a:ext uri="{FF2B5EF4-FFF2-40B4-BE49-F238E27FC236}">
-                <a16:creationId xmlns:a16="http://schemas.microsoft.com/office/drawing/2014/main" id="{571666CC-AAE9-06B8-D1A6-1E5F90632537}"/>
-              </a:ext>
-            </a:extLst>
-          </p:cNvPr>
-          <p:cNvSpPr>
-            <a:spLocks noGrp="1"/>
-          </p:cNvSpPr>
-          <p:nvPr>
-            <p:ph type="title"/>
-          </p:nvPr>
-        </p:nvSpPr>
-        <p:spPr/>
-        <p:txBody>
-          <a:bodyPr/>
-          <a:lstStyle/>
-          <a:p>
-            <a:r>
-              <a:rPr lang="en-US"/>
-              <a:t>Lab 8 — Add Tools and Actions</a:t>
-            </a:r>
-          </a:p>
-        </p:txBody>
-      </p:sp>
-      <p:sp>
-        <p:nvSpPr>
-          <p:cNvPr id="3" name="Content Placeholder 2">
-            <a:extLst>
-              <a:ext uri="{FF2B5EF4-FFF2-40B4-BE49-F238E27FC236}">
-                <a16:creationId xmlns:a16="http://schemas.microsoft.com/office/drawing/2014/main" id="{14102613-EFF2-DF81-651A-F3779CF9FC37}"/>
-              </a:ext>
-            </a:extLst>
-          </p:cNvPr>
-          <p:cNvSpPr>
-            <a:spLocks noGrp="1"/>
-          </p:cNvSpPr>
-          <p:nvPr>
-            <p:ph sz="half" idx="1"/>
-          </p:nvPr>
-        </p:nvSpPr>
-        <p:spPr/>
-        <p:txBody>
-          <a:bodyPr>
-            <a:normAutofit/>
-          </a:bodyPr>
-          <a:lstStyle/>
-          <a:p>
-            <a:r>
-              <a:rPr lang="en-US" sz="1600"/>
-              <a:t>GOAL
-Give the agent tools so it can
-act, not just answer
-YOU'LL USE
-Connector / prebuilt action
-A Power Automate flow as a tool</a:t>
-            </a:r>
-          </a:p>
-        </p:txBody>
-      </p:sp>
-      <p:sp>
-        <p:nvSpPr>
-          <p:cNvPr id="4" name="Content Placeholder 3">
-            <a:extLst>
-              <a:ext uri="{FF2B5EF4-FFF2-40B4-BE49-F238E27FC236}">
-                <a16:creationId xmlns:a16="http://schemas.microsoft.com/office/drawing/2014/main" id="{CF24EF09-D57E-0B33-E277-90D95CAA3229}"/>
-              </a:ext>
-            </a:extLst>
-          </p:cNvPr>
-          <p:cNvSpPr>
-            <a:spLocks noGrp="1"/>
-          </p:cNvSpPr>
-          <p:nvPr>
-            <p:ph sz="half" idx="2"/>
-          </p:nvPr>
-        </p:nvSpPr>
-        <p:spPr/>
-        <p:txBody>
-          <a:bodyPr>
-            <a:normAutofit/>
-          </a:bodyPr>
-          <a:lstStyle/>
-          <a:p>
-            <a:r>
-              <a:rPr lang="en-US" sz="1600"/>
-              <a:t>STEPS
-1.  Open the Tools tab, add a tool
-2.  Add a connector action (e.g. send email)
-3.  Describe when the agent should use it
-4.  Or add a flow as a tool with inputs
-5.  Test the agent performing the action</a:t>
-            </a:r>
-          </a:p>
-        </p:txBody>
-      </p:sp>
-    </p:spTree>
-    <p:extLst>
-      <p:ext uri="{BB962C8B-B14F-4D97-AF65-F5344CB8AC3E}">
-        <p14:creationId xmlns:p14="http://schemas.microsoft.com/office/powerpoint/2010/main" val="1750854078"/>
-      </p:ext>
-    </p:extLst>
-  </p:cSld>
-  <p:clrMapOvr>
-    <a:masterClrMapping/>
-  </p:clrMapOvr>
-</p:sld>
-</file>
-
-<file path=ppt/slides/slide93.xml><?xml version="1.0" encoding="utf-8"?>
 <p:sld xmlns:a="http://schemas.openxmlformats.org/drawingml/2006/main" xmlns:r="http://schemas.openxmlformats.org/officeDocument/2006/relationships" xmlns:p="http://schemas.openxmlformats.org/presentationml/2006/main">
   <p:cSld>
     <p:spTree>
@@ -16037,6 +14021,2022 @@
 </p:sld>
 </file>
 
+<file path=ppt/slides/slide76.xml><?xml version="1.0" encoding="utf-8"?>
+<p:sld xmlns:a="http://schemas.openxmlformats.org/drawingml/2006/main" xmlns:r="http://schemas.openxmlformats.org/officeDocument/2006/relationships" xmlns:p="http://schemas.openxmlformats.org/presentationml/2006/main">
+  <p:cSld>
+    <p:spTree>
+      <p:nvGrpSpPr>
+        <p:cNvPr id="1" name=""/>
+        <p:cNvGrpSpPr/>
+        <p:nvPr/>
+      </p:nvGrpSpPr>
+      <p:grpSpPr>
+        <a:xfrm>
+          <a:off x="0" y="0"/>
+          <a:ext cx="0" cy="0"/>
+          <a:chOff x="0" y="0"/>
+          <a:chExt cx="0" cy="0"/>
+        </a:xfrm>
+      </p:grpSpPr>
+      <p:sp>
+        <p:nvSpPr>
+          <p:cNvPr id="2" name="Title 1">
+            <a:extLst>
+              <a:ext uri="{FF2B5EF4-FFF2-40B4-BE49-F238E27FC236}">
+                <a16:creationId xmlns:a16="http://schemas.microsoft.com/office/drawing/2014/main" id="{9334C532-9A83-A31D-7A7E-F78038EDF121}"/>
+              </a:ext>
+            </a:extLst>
+          </p:cNvPr>
+          <p:cNvSpPr>
+            <a:spLocks noGrp="1"/>
+          </p:cNvSpPr>
+          <p:nvPr>
+            <p:ph type="title"/>
+          </p:nvPr>
+        </p:nvSpPr>
+        <p:spPr/>
+        <p:txBody>
+          <a:bodyPr/>
+          <a:lstStyle/>
+          <a:p>
+            <a:r>
+              <a:rPr lang="en-US"/>
+              <a:t>Module 4 Recap</a:t>
+            </a:r>
+          </a:p>
+        </p:txBody>
+      </p:sp>
+      <p:sp>
+        <p:nvSpPr>
+          <p:cNvPr id="3" name="Content Placeholder 2">
+            <a:extLst>
+              <a:ext uri="{FF2B5EF4-FFF2-40B4-BE49-F238E27FC236}">
+                <a16:creationId xmlns:a16="http://schemas.microsoft.com/office/drawing/2014/main" id="{A05B6A36-EB52-051E-719B-C37632BCB71D}"/>
+              </a:ext>
+            </a:extLst>
+          </p:cNvPr>
+          <p:cNvSpPr>
+            <a:spLocks noGrp="1"/>
+          </p:cNvSpPr>
+          <p:nvPr>
+            <p:ph idx="1"/>
+          </p:nvPr>
+        </p:nvSpPr>
+        <p:spPr/>
+        <p:txBody>
+          <a:bodyPr>
+            <a:normAutofit/>
+          </a:bodyPr>
+          <a:lstStyle/>
+          <a:p>
+            <a:r>
+              <a:rPr lang="en-US" sz="1800"/>
+              <a:t>Agents and flows combine into complete business processes
+Orchestration sequences, branches and chains the steps
+Plan outputs and next steps so work flows on automatically
+Handle errors and monitor runs to stay reliable
+You saw four real workflows — and Order Processing — from trigger to result</a:t>
+            </a:r>
+          </a:p>
+        </p:txBody>
+      </p:sp>
+    </p:spTree>
+    <p:extLst>
+      <p:ext uri="{BB962C8B-B14F-4D97-AF65-F5344CB8AC3E}">
+        <p14:creationId xmlns:p14="http://schemas.microsoft.com/office/powerpoint/2010/main" val="2992847287"/>
+      </p:ext>
+    </p:extLst>
+  </p:cSld>
+  <p:clrMapOvr>
+    <a:masterClrMapping/>
+  </p:clrMapOvr>
+</p:sld>
+</file>
+
+<file path=ppt/slides/slide77.xml><?xml version="1.0" encoding="utf-8"?>
+<p:sld xmlns:a="http://schemas.openxmlformats.org/drawingml/2006/main" xmlns:r="http://schemas.openxmlformats.org/officeDocument/2006/relationships" xmlns:p="http://schemas.openxmlformats.org/presentationml/2006/main">
+  <p:cSld>
+    <p:spTree>
+      <p:nvGrpSpPr>
+        <p:cNvPr id="1" name=""/>
+        <p:cNvGrpSpPr/>
+        <p:nvPr/>
+      </p:nvGrpSpPr>
+      <p:grpSpPr>
+        <a:xfrm>
+          <a:off x="0" y="0"/>
+          <a:ext cx="0" cy="0"/>
+          <a:chOff x="0" y="0"/>
+          <a:chExt cx="0" cy="0"/>
+        </a:xfrm>
+      </p:grpSpPr>
+      <p:sp>
+        <p:nvSpPr>
+          <p:cNvPr id="2" name="Title 1">
+            <a:extLst>
+              <a:ext uri="{FF2B5EF4-FFF2-40B4-BE49-F238E27FC236}">
+                <a16:creationId xmlns:a16="http://schemas.microsoft.com/office/drawing/2014/main" id="{092EBA00-D067-C868-BD69-750A73377203}"/>
+              </a:ext>
+            </a:extLst>
+          </p:cNvPr>
+          <p:cNvSpPr>
+            <a:spLocks noGrp="1"/>
+          </p:cNvSpPr>
+          <p:nvPr>
+            <p:ph type="title"/>
+          </p:nvPr>
+        </p:nvSpPr>
+        <p:spPr/>
+        <p:txBody>
+          <a:bodyPr/>
+          <a:lstStyle/>
+          <a:p>
+            <a:r>
+              <a:rPr lang="en-US"/>
+              <a:t>Module 5 · Business Workflow Workshop</a:t>
+            </a:r>
+          </a:p>
+        </p:txBody>
+      </p:sp>
+      <p:sp>
+        <p:nvSpPr>
+          <p:cNvPr id="3" name="Text Placeholder 2">
+            <a:extLst>
+              <a:ext uri="{FF2B5EF4-FFF2-40B4-BE49-F238E27FC236}">
+                <a16:creationId xmlns:a16="http://schemas.microsoft.com/office/drawing/2014/main" id="{26717F27-B77C-ADE7-256B-D474F90AF915}"/>
+              </a:ext>
+            </a:extLst>
+          </p:cNvPr>
+          <p:cNvSpPr>
+            <a:spLocks noGrp="1"/>
+          </p:cNvSpPr>
+          <p:nvPr>
+            <p:ph type="body" idx="1"/>
+          </p:nvPr>
+        </p:nvSpPr>
+        <p:spPr/>
+        <p:txBody>
+          <a:bodyPr>
+            <a:normAutofit/>
+          </a:bodyPr>
+          <a:lstStyle/>
+          <a:p>
+            <a:r>
+              <a:rPr lang="en-US" sz="1800" b="1">
+                <a:solidFill>
+                  <a:srgbClr val="7C3AED"/>
+                </a:solidFill>
+              </a:rPr>
+              <a:t>Put it all together — build a real end-to-end workflow</a:t>
+            </a:r>
+          </a:p>
+        </p:txBody>
+      </p:sp>
+    </p:spTree>
+    <p:extLst>
+      <p:ext uri="{BB962C8B-B14F-4D97-AF65-F5344CB8AC3E}">
+        <p14:creationId xmlns:p14="http://schemas.microsoft.com/office/powerpoint/2010/main" val="1216735399"/>
+      </p:ext>
+    </p:extLst>
+  </p:cSld>
+  <p:clrMapOvr>
+    <a:masterClrMapping/>
+  </p:clrMapOvr>
+</p:sld>
+</file>
+
+<file path=ppt/slides/slide78.xml><?xml version="1.0" encoding="utf-8"?>
+<p:sld xmlns:a="http://schemas.openxmlformats.org/drawingml/2006/main" xmlns:r="http://schemas.openxmlformats.org/officeDocument/2006/relationships" xmlns:p="http://schemas.openxmlformats.org/presentationml/2006/main">
+  <p:cSld>
+    <p:spTree>
+      <p:nvGrpSpPr>
+        <p:cNvPr id="1" name=""/>
+        <p:cNvGrpSpPr/>
+        <p:nvPr/>
+      </p:nvGrpSpPr>
+      <p:grpSpPr>
+        <a:xfrm>
+          <a:off x="0" y="0"/>
+          <a:ext cx="0" cy="0"/>
+          <a:chOff x="0" y="0"/>
+          <a:chExt cx="0" cy="0"/>
+        </a:xfrm>
+      </p:grpSpPr>
+      <p:sp>
+        <p:nvSpPr>
+          <p:cNvPr id="2" name="Title 1">
+            <a:extLst>
+              <a:ext uri="{FF2B5EF4-FFF2-40B4-BE49-F238E27FC236}">
+                <a16:creationId xmlns:a16="http://schemas.microsoft.com/office/drawing/2014/main" id="{A4510BF0-62E8-02C4-BD0D-8EACA32C19C8}"/>
+              </a:ext>
+            </a:extLst>
+          </p:cNvPr>
+          <p:cNvSpPr>
+            <a:spLocks noGrp="1"/>
+          </p:cNvSpPr>
+          <p:nvPr>
+            <p:ph type="title"/>
+          </p:nvPr>
+        </p:nvSpPr>
+        <p:spPr/>
+        <p:txBody>
+          <a:bodyPr/>
+          <a:lstStyle/>
+          <a:p>
+            <a:r>
+              <a:rPr lang="en-US"/>
+              <a:t>Workshop Overview</a:t>
+            </a:r>
+          </a:p>
+        </p:txBody>
+      </p:sp>
+      <p:sp>
+        <p:nvSpPr>
+          <p:cNvPr id="3" name="Content Placeholder 2">
+            <a:extLst>
+              <a:ext uri="{FF2B5EF4-FFF2-40B4-BE49-F238E27FC236}">
+                <a16:creationId xmlns:a16="http://schemas.microsoft.com/office/drawing/2014/main" id="{1C7B9D00-1350-7F51-4F13-5915A319FE90}"/>
+              </a:ext>
+            </a:extLst>
+          </p:cNvPr>
+          <p:cNvSpPr>
+            <a:spLocks noGrp="1"/>
+          </p:cNvSpPr>
+          <p:nvPr>
+            <p:ph idx="1"/>
+          </p:nvPr>
+        </p:nvSpPr>
+        <p:spPr/>
+        <p:txBody>
+          <a:bodyPr>
+            <a:normAutofit/>
+          </a:bodyPr>
+          <a:lstStyle/>
+          <a:p>
+            <a:r>
+              <a:rPr lang="en-US" sz="1800"/>
+              <a:t>Your Lab 16 capstone: build a practical, end-to-end workflow
+Choose a track: Sales, Finance, Procurement or Order Processing
+Combine an agent and one or more Power Automate flows
+Use the patterns and labs from the past three days
+Demo your working solution at the end</a:t>
+            </a:r>
+          </a:p>
+        </p:txBody>
+      </p:sp>
+    </p:spTree>
+    <p:extLst>
+      <p:ext uri="{BB962C8B-B14F-4D97-AF65-F5344CB8AC3E}">
+        <p14:creationId xmlns:p14="http://schemas.microsoft.com/office/powerpoint/2010/main" val="1983163968"/>
+      </p:ext>
+    </p:extLst>
+  </p:cSld>
+  <p:clrMapOvr>
+    <a:masterClrMapping/>
+  </p:clrMapOvr>
+</p:sld>
+</file>
+
+<file path=ppt/slides/slide79.xml><?xml version="1.0" encoding="utf-8"?>
+<p:sld xmlns:a="http://schemas.openxmlformats.org/drawingml/2006/main" xmlns:r="http://schemas.openxmlformats.org/officeDocument/2006/relationships" xmlns:p="http://schemas.openxmlformats.org/presentationml/2006/main">
+  <p:cSld>
+    <p:spTree>
+      <p:nvGrpSpPr>
+        <p:cNvPr id="1" name=""/>
+        <p:cNvGrpSpPr/>
+        <p:nvPr/>
+      </p:nvGrpSpPr>
+      <p:grpSpPr>
+        <a:xfrm>
+          <a:off x="0" y="0"/>
+          <a:ext cx="0" cy="0"/>
+          <a:chOff x="0" y="0"/>
+          <a:chExt cx="0" cy="0"/>
+        </a:xfrm>
+      </p:grpSpPr>
+      <p:sp>
+        <p:nvSpPr>
+          <p:cNvPr id="2" name="Title 1">
+            <a:extLst>
+              <a:ext uri="{FF2B5EF4-FFF2-40B4-BE49-F238E27FC236}">
+                <a16:creationId xmlns:a16="http://schemas.microsoft.com/office/drawing/2014/main" id="{B306D309-2D11-720F-BD8D-54ADFAE44193}"/>
+              </a:ext>
+            </a:extLst>
+          </p:cNvPr>
+          <p:cNvSpPr>
+            <a:spLocks noGrp="1"/>
+          </p:cNvSpPr>
+          <p:nvPr>
+            <p:ph type="title"/>
+          </p:nvPr>
+        </p:nvSpPr>
+        <p:spPr/>
+        <p:txBody>
+          <a:bodyPr/>
+          <a:lstStyle/>
+          <a:p>
+            <a:r>
+              <a:rPr lang="en-US"/>
+              <a:t>How the Workshop Works</a:t>
+            </a:r>
+          </a:p>
+        </p:txBody>
+      </p:sp>
+      <p:sp>
+        <p:nvSpPr>
+          <p:cNvPr id="3" name="Content Placeholder 2">
+            <a:extLst>
+              <a:ext uri="{FF2B5EF4-FFF2-40B4-BE49-F238E27FC236}">
+                <a16:creationId xmlns:a16="http://schemas.microsoft.com/office/drawing/2014/main" id="{D0C9DA5F-3EF2-4E2D-4CBA-CCAD55185269}"/>
+              </a:ext>
+            </a:extLst>
+          </p:cNvPr>
+          <p:cNvSpPr>
+            <a:spLocks noGrp="1"/>
+          </p:cNvSpPr>
+          <p:nvPr>
+            <p:ph idx="1"/>
+          </p:nvPr>
+        </p:nvSpPr>
+        <p:spPr/>
+        <p:txBody>
+          <a:bodyPr>
+            <a:normAutofit/>
+          </a:bodyPr>
+          <a:lstStyle/>
+          <a:p>
+            <a:r>
+              <a:rPr lang="en-US" sz="1800"/>
+              <a:t>Work solo or in small teams
+Pick a track and sketch the workflow: trigger → actions → output
+Build it: create the flow, add an agent where it helps
+Test with realistic data and fix what breaks
+Present: show the trigger, the steps and the result</a:t>
+            </a:r>
+          </a:p>
+        </p:txBody>
+      </p:sp>
+    </p:spTree>
+    <p:extLst>
+      <p:ext uri="{BB962C8B-B14F-4D97-AF65-F5344CB8AC3E}">
+        <p14:creationId xmlns:p14="http://schemas.microsoft.com/office/powerpoint/2010/main" val="3589608900"/>
+      </p:ext>
+    </p:extLst>
+  </p:cSld>
+  <p:clrMapOvr>
+    <a:masterClrMapping/>
+  </p:clrMapOvr>
+</p:sld>
+</file>
+
+<file path=ppt/slides/slide8.xml><?xml version="1.0" encoding="utf-8"?>
+<p:sld xmlns:a="http://schemas.openxmlformats.org/drawingml/2006/main" xmlns:r="http://schemas.openxmlformats.org/officeDocument/2006/relationships" xmlns:p="http://schemas.openxmlformats.org/presentationml/2006/main">
+  <p:cSld>
+    <p:spTree>
+      <p:nvGrpSpPr>
+        <p:cNvPr id="1" name=""/>
+        <p:cNvGrpSpPr/>
+        <p:nvPr/>
+      </p:nvGrpSpPr>
+      <p:grpSpPr>
+        <a:xfrm>
+          <a:off x="0" y="0"/>
+          <a:ext cx="0" cy="0"/>
+          <a:chOff x="0" y="0"/>
+          <a:chExt cx="0" cy="0"/>
+        </a:xfrm>
+      </p:grpSpPr>
+      <p:sp>
+        <p:nvSpPr>
+          <p:cNvPr id="2" name="Title 1">
+            <a:extLst>
+              <a:ext uri="{FF2B5EF4-FFF2-40B4-BE49-F238E27FC236}">
+                <a16:creationId xmlns:a16="http://schemas.microsoft.com/office/drawing/2014/main" id="{A929970F-766C-166A-5620-4126F34ABFF3}"/>
+              </a:ext>
+            </a:extLst>
+          </p:cNvPr>
+          <p:cNvSpPr>
+            <a:spLocks noGrp="1"/>
+          </p:cNvSpPr>
+          <p:nvPr>
+            <p:ph type="title"/>
+          </p:nvPr>
+        </p:nvSpPr>
+        <p:spPr/>
+        <p:txBody>
+          <a:bodyPr/>
+          <a:lstStyle/>
+          <a:p>
+            <a:r>
+              <a:rPr lang="en-US"/>
+              <a:t>Why Automate?</a:t>
+            </a:r>
+          </a:p>
+        </p:txBody>
+      </p:sp>
+      <p:sp>
+        <p:nvSpPr>
+          <p:cNvPr id="3" name="Content Placeholder 2">
+            <a:extLst>
+              <a:ext uri="{FF2B5EF4-FFF2-40B4-BE49-F238E27FC236}">
+                <a16:creationId xmlns:a16="http://schemas.microsoft.com/office/drawing/2014/main" id="{98BCE675-06D6-7CA1-31B0-216798C26704}"/>
+              </a:ext>
+            </a:extLst>
+          </p:cNvPr>
+          <p:cNvSpPr>
+            <a:spLocks noGrp="1"/>
+          </p:cNvSpPr>
+          <p:nvPr>
+            <p:ph idx="1"/>
+          </p:nvPr>
+        </p:nvSpPr>
+        <p:spPr/>
+        <p:txBody>
+          <a:bodyPr>
+            <a:normAutofit/>
+          </a:bodyPr>
+          <a:lstStyle/>
+          <a:p>
+            <a:r>
+              <a:rPr lang="en-US" sz="1800"/>
+              <a:t>Save time — reclaim hours of manual work every week
+Reduce errors — consistent, rule-based execution every time
+Respond faster — instant notifications and approvals
+Gain visibility — every step is logged and traceable
+Scale easily — handle more volume without more headcount</a:t>
+            </a:r>
+          </a:p>
+        </p:txBody>
+      </p:sp>
+    </p:spTree>
+    <p:extLst>
+      <p:ext uri="{BB962C8B-B14F-4D97-AF65-F5344CB8AC3E}">
+        <p14:creationId xmlns:p14="http://schemas.microsoft.com/office/powerpoint/2010/main" val="2083644524"/>
+      </p:ext>
+    </p:extLst>
+  </p:cSld>
+  <p:clrMapOvr>
+    <a:masterClrMapping/>
+  </p:clrMapOvr>
+</p:sld>
+</file>
+
+<file path=ppt/slides/slide80.xml><?xml version="1.0" encoding="utf-8"?>
+<p:sld xmlns:a="http://schemas.openxmlformats.org/drawingml/2006/main" xmlns:r="http://schemas.openxmlformats.org/officeDocument/2006/relationships" xmlns:p="http://schemas.openxmlformats.org/presentationml/2006/main">
+  <p:cSld>
+    <p:spTree>
+      <p:nvGrpSpPr>
+        <p:cNvPr id="1" name=""/>
+        <p:cNvGrpSpPr/>
+        <p:nvPr/>
+      </p:nvGrpSpPr>
+      <p:grpSpPr>
+        <a:xfrm>
+          <a:off x="0" y="0"/>
+          <a:ext cx="0" cy="0"/>
+          <a:chOff x="0" y="0"/>
+          <a:chExt cx="0" cy="0"/>
+        </a:xfrm>
+      </p:grpSpPr>
+      <p:sp>
+        <p:nvSpPr>
+          <p:cNvPr id="2" name="Title 1">
+            <a:extLst>
+              <a:ext uri="{FF2B5EF4-FFF2-40B4-BE49-F238E27FC236}">
+                <a16:creationId xmlns:a16="http://schemas.microsoft.com/office/drawing/2014/main" id="{C3FB1C71-98F9-1E58-B9CC-1D73738E4149}"/>
+              </a:ext>
+            </a:extLst>
+          </p:cNvPr>
+          <p:cNvSpPr>
+            <a:spLocks noGrp="1"/>
+          </p:cNvSpPr>
+          <p:nvPr>
+            <p:ph type="title"/>
+          </p:nvPr>
+        </p:nvSpPr>
+        <p:spPr/>
+        <p:txBody>
+          <a:bodyPr/>
+          <a:lstStyle/>
+          <a:p>
+            <a:r>
+              <a:rPr lang="en-US"/>
+              <a:t>Track A — Sales</a:t>
+            </a:r>
+          </a:p>
+        </p:txBody>
+      </p:sp>
+      <p:sp>
+        <p:nvSpPr>
+          <p:cNvPr id="3" name="Content Placeholder 2">
+            <a:extLst>
+              <a:ext uri="{FF2B5EF4-FFF2-40B4-BE49-F238E27FC236}">
+                <a16:creationId xmlns:a16="http://schemas.microsoft.com/office/drawing/2014/main" id="{D5E98FF7-C3E4-3CD0-E5CD-3A2D1DAB6140}"/>
+              </a:ext>
+            </a:extLst>
+          </p:cNvPr>
+          <p:cNvSpPr>
+            <a:spLocks noGrp="1"/>
+          </p:cNvSpPr>
+          <p:nvPr>
+            <p:ph sz="half" idx="1"/>
+          </p:nvPr>
+        </p:nvSpPr>
+        <p:spPr/>
+        <p:txBody>
+          <a:bodyPr>
+            <a:normAutofit/>
+          </a:bodyPr>
+          <a:lstStyle/>
+          <a:p>
+            <a:r>
+              <a:rPr lang="en-US" sz="1600"/>
+              <a:t>SCENARIO
+Capture inbound sales enquiries,
+log them, and reply automatically.
+OUTPUT
+A logged lead and a tailored response</a:t>
+            </a:r>
+          </a:p>
+        </p:txBody>
+      </p:sp>
+      <p:sp>
+        <p:nvSpPr>
+          <p:cNvPr id="4" name="Content Placeholder 3">
+            <a:extLst>
+              <a:ext uri="{FF2B5EF4-FFF2-40B4-BE49-F238E27FC236}">
+                <a16:creationId xmlns:a16="http://schemas.microsoft.com/office/drawing/2014/main" id="{D7B1CB0A-92CE-4E80-9D8A-8E99136ADFD9}"/>
+              </a:ext>
+            </a:extLst>
+          </p:cNvPr>
+          <p:cNvSpPr>
+            <a:spLocks noGrp="1"/>
+          </p:cNvSpPr>
+          <p:nvPr>
+            <p:ph sz="half" idx="2"/>
+          </p:nvPr>
+        </p:nvSpPr>
+        <p:spPr/>
+        <p:txBody>
+          <a:bodyPr>
+            <a:normAutofit/>
+          </a:bodyPr>
+          <a:lstStyle/>
+          <a:p>
+            <a:r>
+              <a:rPr lang="en-US" sz="1600"/>
+              <a:t>BUILD IT
+Agent: extract customer, product, quantity
+Flow: add a row to the leads table
+Flow: send a personalised reply
+Notify the sales team in Teams
+Test with three sample enquiries</a:t>
+            </a:r>
+          </a:p>
+        </p:txBody>
+      </p:sp>
+    </p:spTree>
+    <p:extLst>
+      <p:ext uri="{BB962C8B-B14F-4D97-AF65-F5344CB8AC3E}">
+        <p14:creationId xmlns:p14="http://schemas.microsoft.com/office/powerpoint/2010/main" val="148744488"/>
+      </p:ext>
+    </p:extLst>
+  </p:cSld>
+  <p:clrMapOvr>
+    <a:masterClrMapping/>
+  </p:clrMapOvr>
+</p:sld>
+</file>
+
+<file path=ppt/slides/slide81.xml><?xml version="1.0" encoding="utf-8"?>
+<p:sld xmlns:a="http://schemas.openxmlformats.org/drawingml/2006/main" xmlns:r="http://schemas.openxmlformats.org/officeDocument/2006/relationships" xmlns:p="http://schemas.openxmlformats.org/presentationml/2006/main">
+  <p:cSld>
+    <p:spTree>
+      <p:nvGrpSpPr>
+        <p:cNvPr id="1" name=""/>
+        <p:cNvGrpSpPr/>
+        <p:nvPr/>
+      </p:nvGrpSpPr>
+      <p:grpSpPr>
+        <a:xfrm>
+          <a:off x="0" y="0"/>
+          <a:ext cx="0" cy="0"/>
+          <a:chOff x="0" y="0"/>
+          <a:chExt cx="0" cy="0"/>
+        </a:xfrm>
+      </p:grpSpPr>
+      <p:sp>
+        <p:nvSpPr>
+          <p:cNvPr id="2" name="Title 1">
+            <a:extLst>
+              <a:ext uri="{FF2B5EF4-FFF2-40B4-BE49-F238E27FC236}">
+                <a16:creationId xmlns:a16="http://schemas.microsoft.com/office/drawing/2014/main" id="{4D95FE35-BD0B-B87D-1C03-09535E998116}"/>
+              </a:ext>
+            </a:extLst>
+          </p:cNvPr>
+          <p:cNvSpPr>
+            <a:spLocks noGrp="1"/>
+          </p:cNvSpPr>
+          <p:nvPr>
+            <p:ph type="title"/>
+          </p:nvPr>
+        </p:nvSpPr>
+        <p:spPr/>
+        <p:txBody>
+          <a:bodyPr/>
+          <a:lstStyle/>
+          <a:p>
+            <a:r>
+              <a:rPr lang="en-US"/>
+              <a:t>Track B — Finance</a:t>
+            </a:r>
+          </a:p>
+        </p:txBody>
+      </p:sp>
+      <p:sp>
+        <p:nvSpPr>
+          <p:cNvPr id="3" name="Content Placeholder 2">
+            <a:extLst>
+              <a:ext uri="{FF2B5EF4-FFF2-40B4-BE49-F238E27FC236}">
+                <a16:creationId xmlns:a16="http://schemas.microsoft.com/office/drawing/2014/main" id="{A9E3D5A1-E013-9E92-7C37-E92D0D24AF57}"/>
+              </a:ext>
+            </a:extLst>
+          </p:cNvPr>
+          <p:cNvSpPr>
+            <a:spLocks noGrp="1"/>
+          </p:cNvSpPr>
+          <p:nvPr>
+            <p:ph sz="half" idx="1"/>
+          </p:nvPr>
+        </p:nvSpPr>
+        <p:spPr/>
+        <p:txBody>
+          <a:bodyPr>
+            <a:normAutofit/>
+          </a:bodyPr>
+          <a:lstStyle/>
+          <a:p>
+            <a:r>
+              <a:rPr lang="en-US" sz="1600"/>
+              <a:t>SCENARIO
+Process uploaded invoices through
+an approval and record the outcome.
+OUTPUT
+An approved invoice with an audit trail</a:t>
+            </a:r>
+          </a:p>
+        </p:txBody>
+      </p:sp>
+      <p:sp>
+        <p:nvSpPr>
+          <p:cNvPr id="4" name="Content Placeholder 3">
+            <a:extLst>
+              <a:ext uri="{FF2B5EF4-FFF2-40B4-BE49-F238E27FC236}">
+                <a16:creationId xmlns:a16="http://schemas.microsoft.com/office/drawing/2014/main" id="{FB83B344-9A0C-B52B-1A5A-F215861222DC}"/>
+              </a:ext>
+            </a:extLst>
+          </p:cNvPr>
+          <p:cNvSpPr>
+            <a:spLocks noGrp="1"/>
+          </p:cNvSpPr>
+          <p:nvPr>
+            <p:ph sz="half" idx="2"/>
+          </p:nvPr>
+        </p:nvSpPr>
+        <p:spPr/>
+        <p:txBody>
+          <a:bodyPr>
+            <a:normAutofit/>
+          </a:bodyPr>
+          <a:lstStyle/>
+          <a:p>
+            <a:r>
+              <a:rPr lang="en-US" sz="1600"/>
+              <a:t>BUILD IT
+Trigger: invoice uploaded to SharePoint
+Flow: start and wait for approval
+Branch on approve / reject
+Record the decision in Excel
+Email finance the outcome</a:t>
+            </a:r>
+          </a:p>
+        </p:txBody>
+      </p:sp>
+    </p:spTree>
+    <p:extLst>
+      <p:ext uri="{BB962C8B-B14F-4D97-AF65-F5344CB8AC3E}">
+        <p14:creationId xmlns:p14="http://schemas.microsoft.com/office/powerpoint/2010/main" val="940827506"/>
+      </p:ext>
+    </p:extLst>
+  </p:cSld>
+  <p:clrMapOvr>
+    <a:masterClrMapping/>
+  </p:clrMapOvr>
+</p:sld>
+</file>
+
+<file path=ppt/slides/slide82.xml><?xml version="1.0" encoding="utf-8"?>
+<p:sld xmlns:a="http://schemas.openxmlformats.org/drawingml/2006/main" xmlns:r="http://schemas.openxmlformats.org/officeDocument/2006/relationships" xmlns:p="http://schemas.openxmlformats.org/presentationml/2006/main">
+  <p:cSld>
+    <p:spTree>
+      <p:nvGrpSpPr>
+        <p:cNvPr id="1" name=""/>
+        <p:cNvGrpSpPr/>
+        <p:nvPr/>
+      </p:nvGrpSpPr>
+      <p:grpSpPr>
+        <a:xfrm>
+          <a:off x="0" y="0"/>
+          <a:ext cx="0" cy="0"/>
+          <a:chOff x="0" y="0"/>
+          <a:chExt cx="0" cy="0"/>
+        </a:xfrm>
+      </p:grpSpPr>
+      <p:sp>
+        <p:nvSpPr>
+          <p:cNvPr id="2" name="Title 1">
+            <a:extLst>
+              <a:ext uri="{FF2B5EF4-FFF2-40B4-BE49-F238E27FC236}">
+                <a16:creationId xmlns:a16="http://schemas.microsoft.com/office/drawing/2014/main" id="{68ACBD62-39B4-D02B-6516-8BC9FD2EB11A}"/>
+              </a:ext>
+            </a:extLst>
+          </p:cNvPr>
+          <p:cNvSpPr>
+            <a:spLocks noGrp="1"/>
+          </p:cNvSpPr>
+          <p:nvPr>
+            <p:ph type="title"/>
+          </p:nvPr>
+        </p:nvSpPr>
+        <p:spPr/>
+        <p:txBody>
+          <a:bodyPr/>
+          <a:lstStyle/>
+          <a:p>
+            <a:r>
+              <a:rPr lang="en-US"/>
+              <a:t>Track C — Procurement</a:t>
+            </a:r>
+          </a:p>
+        </p:txBody>
+      </p:sp>
+      <p:sp>
+        <p:nvSpPr>
+          <p:cNvPr id="3" name="Content Placeholder 2">
+            <a:extLst>
+              <a:ext uri="{FF2B5EF4-FFF2-40B4-BE49-F238E27FC236}">
+                <a16:creationId xmlns:a16="http://schemas.microsoft.com/office/drawing/2014/main" id="{F98C2358-729D-C5DB-A16F-F52AC077F353}"/>
+              </a:ext>
+            </a:extLst>
+          </p:cNvPr>
+          <p:cNvSpPr>
+            <a:spLocks noGrp="1"/>
+          </p:cNvSpPr>
+          <p:nvPr>
+            <p:ph sz="half" idx="1"/>
+          </p:nvPr>
+        </p:nvSpPr>
+        <p:spPr/>
+        <p:txBody>
+          <a:bodyPr>
+            <a:normAutofit/>
+          </a:bodyPr>
+          <a:lstStyle/>
+          <a:p>
+            <a:r>
+              <a:rPr lang="en-US" sz="1600"/>
+              <a:t>SCENARIO
+Take purchase requests, route them
+to a manager, and confirm.
+OUTPUT
+A routed, approved purchase request</a:t>
+            </a:r>
+          </a:p>
+        </p:txBody>
+      </p:sp>
+      <p:sp>
+        <p:nvSpPr>
+          <p:cNvPr id="4" name="Content Placeholder 3">
+            <a:extLst>
+              <a:ext uri="{FF2B5EF4-FFF2-40B4-BE49-F238E27FC236}">
+                <a16:creationId xmlns:a16="http://schemas.microsoft.com/office/drawing/2014/main" id="{E1FE476B-D558-5A5C-E26F-8D3AA7EB599F}"/>
+              </a:ext>
+            </a:extLst>
+          </p:cNvPr>
+          <p:cNvSpPr>
+            <a:spLocks noGrp="1"/>
+          </p:cNvSpPr>
+          <p:nvPr>
+            <p:ph sz="half" idx="2"/>
+          </p:nvPr>
+        </p:nvSpPr>
+        <p:spPr/>
+        <p:txBody>
+          <a:bodyPr>
+            <a:normAutofit/>
+          </a:bodyPr>
+          <a:lstStyle/>
+          <a:p>
+            <a:r>
+              <a:rPr lang="en-US" sz="1600"/>
+              <a:t>BUILD IT
+Agent or form: capture request details
+Flow: route to the manager for approval
+Branch on the decision
+Log the request and its status
+Notify the requester of the outcome</a:t>
+            </a:r>
+          </a:p>
+        </p:txBody>
+      </p:sp>
+    </p:spTree>
+    <p:extLst>
+      <p:ext uri="{BB962C8B-B14F-4D97-AF65-F5344CB8AC3E}">
+        <p14:creationId xmlns:p14="http://schemas.microsoft.com/office/powerpoint/2010/main" val="2201874944"/>
+      </p:ext>
+    </p:extLst>
+  </p:cSld>
+  <p:clrMapOvr>
+    <a:masterClrMapping/>
+  </p:clrMapOvr>
+</p:sld>
+</file>
+
+<file path=ppt/slides/slide83.xml><?xml version="1.0" encoding="utf-8"?>
+<p:sld xmlns:a="http://schemas.openxmlformats.org/drawingml/2006/main" xmlns:r="http://schemas.openxmlformats.org/officeDocument/2006/relationships" xmlns:p="http://schemas.openxmlformats.org/presentationml/2006/main">
+  <p:cSld>
+    <p:spTree>
+      <p:nvGrpSpPr>
+        <p:cNvPr id="1" name=""/>
+        <p:cNvGrpSpPr/>
+        <p:nvPr/>
+      </p:nvGrpSpPr>
+      <p:grpSpPr>
+        <a:xfrm>
+          <a:off x="0" y="0"/>
+          <a:ext cx="0" cy="0"/>
+          <a:chOff x="0" y="0"/>
+          <a:chExt cx="0" cy="0"/>
+        </a:xfrm>
+      </p:grpSpPr>
+      <p:sp>
+        <p:nvSpPr>
+          <p:cNvPr id="2" name="Title 1">
+            <a:extLst>
+              <a:ext uri="{FF2B5EF4-FFF2-40B4-BE49-F238E27FC236}">
+                <a16:creationId xmlns:a16="http://schemas.microsoft.com/office/drawing/2014/main" id="{AEB41813-082D-7443-F837-5373C57957F0}"/>
+              </a:ext>
+            </a:extLst>
+          </p:cNvPr>
+          <p:cNvSpPr>
+            <a:spLocks noGrp="1"/>
+          </p:cNvSpPr>
+          <p:nvPr>
+            <p:ph type="title"/>
+          </p:nvPr>
+        </p:nvSpPr>
+        <p:spPr/>
+        <p:txBody>
+          <a:bodyPr/>
+          <a:lstStyle/>
+          <a:p>
+            <a:r>
+              <a:rPr lang="en-US"/>
+              <a:t>Track D — Order Processing</a:t>
+            </a:r>
+          </a:p>
+        </p:txBody>
+      </p:sp>
+      <p:sp>
+        <p:nvSpPr>
+          <p:cNvPr id="3" name="Content Placeholder 2">
+            <a:extLst>
+              <a:ext uri="{FF2B5EF4-FFF2-40B4-BE49-F238E27FC236}">
+                <a16:creationId xmlns:a16="http://schemas.microsoft.com/office/drawing/2014/main" id="{6E5B7CC6-98F4-1BD5-62CE-844B7337B969}"/>
+              </a:ext>
+            </a:extLst>
+          </p:cNvPr>
+          <p:cNvSpPr>
+            <a:spLocks noGrp="1"/>
+          </p:cNvSpPr>
+          <p:nvPr>
+            <p:ph sz="half" idx="1"/>
+          </p:nvPr>
+        </p:nvSpPr>
+        <p:spPr/>
+        <p:txBody>
+          <a:bodyPr>
+            <a:normAutofit/>
+          </a:bodyPr>
+          <a:lstStyle/>
+          <a:p>
+            <a:r>
+              <a:rPr lang="en-US" sz="1600"/>
+              <a:t>SCENARIO
+Turn submitted orders into logged,
+confirmed and fulfilled records.
+OUTPUT
+A confirmed order and a clean log</a:t>
+            </a:r>
+          </a:p>
+        </p:txBody>
+      </p:sp>
+      <p:sp>
+        <p:nvSpPr>
+          <p:cNvPr id="4" name="Content Placeholder 3">
+            <a:extLst>
+              <a:ext uri="{FF2B5EF4-FFF2-40B4-BE49-F238E27FC236}">
+                <a16:creationId xmlns:a16="http://schemas.microsoft.com/office/drawing/2014/main" id="{71A2F846-BD07-B5C4-EEFF-B689983BBF9F}"/>
+              </a:ext>
+            </a:extLst>
+          </p:cNvPr>
+          <p:cNvSpPr>
+            <a:spLocks noGrp="1"/>
+          </p:cNvSpPr>
+          <p:nvPr>
+            <p:ph sz="half" idx="2"/>
+          </p:nvPr>
+        </p:nvSpPr>
+        <p:spPr/>
+        <p:txBody>
+          <a:bodyPr>
+            <a:normAutofit/>
+          </a:bodyPr>
+          <a:lstStyle/>
+          <a:p>
+            <a:r>
+              <a:rPr lang="en-US" sz="1600"/>
+              <a:t>BUILD IT
+Trigger: an order form is submitted
+Flow: log the order to Excel
+Flow: send an order confirmation
+Notify fulfilment / operations
+Flag large orders for approval first</a:t>
+            </a:r>
+          </a:p>
+        </p:txBody>
+      </p:sp>
+    </p:spTree>
+    <p:extLst>
+      <p:ext uri="{BB962C8B-B14F-4D97-AF65-F5344CB8AC3E}">
+        <p14:creationId xmlns:p14="http://schemas.microsoft.com/office/powerpoint/2010/main" val="73937436"/>
+      </p:ext>
+    </p:extLst>
+  </p:cSld>
+  <p:clrMapOvr>
+    <a:masterClrMapping/>
+  </p:clrMapOvr>
+</p:sld>
+</file>
+
+<file path=ppt/slides/slide84.xml><?xml version="1.0" encoding="utf-8"?>
+<p:sld xmlns:a="http://schemas.openxmlformats.org/drawingml/2006/main" xmlns:r="http://schemas.openxmlformats.org/officeDocument/2006/relationships" xmlns:p="http://schemas.openxmlformats.org/presentationml/2006/main">
+  <p:cSld>
+    <p:spTree>
+      <p:nvGrpSpPr>
+        <p:cNvPr id="1" name=""/>
+        <p:cNvGrpSpPr/>
+        <p:nvPr/>
+      </p:nvGrpSpPr>
+      <p:grpSpPr>
+        <a:xfrm>
+          <a:off x="0" y="0"/>
+          <a:ext cx="0" cy="0"/>
+          <a:chOff x="0" y="0"/>
+          <a:chExt cx="0" cy="0"/>
+        </a:xfrm>
+      </p:grpSpPr>
+      <p:sp>
+        <p:nvSpPr>
+          <p:cNvPr id="2" name="Title 1">
+            <a:extLst>
+              <a:ext uri="{FF2B5EF4-FFF2-40B4-BE49-F238E27FC236}">
+                <a16:creationId xmlns:a16="http://schemas.microsoft.com/office/drawing/2014/main" id="{7EF62778-87DE-3313-58A3-1BC38555DC61}"/>
+              </a:ext>
+            </a:extLst>
+          </p:cNvPr>
+          <p:cNvSpPr>
+            <a:spLocks noGrp="1"/>
+          </p:cNvSpPr>
+          <p:nvPr>
+            <p:ph type="title"/>
+          </p:nvPr>
+        </p:nvSpPr>
+        <p:spPr/>
+        <p:txBody>
+          <a:bodyPr/>
+          <a:lstStyle/>
+          <a:p>
+            <a:r>
+              <a:rPr lang="en-US"/>
+              <a:t>Build Guidelines &amp; Success Criteria</a:t>
+            </a:r>
+          </a:p>
+        </p:txBody>
+      </p:sp>
+      <p:sp>
+        <p:nvSpPr>
+          <p:cNvPr id="3" name="Content Placeholder 2">
+            <a:extLst>
+              <a:ext uri="{FF2B5EF4-FFF2-40B4-BE49-F238E27FC236}">
+                <a16:creationId xmlns:a16="http://schemas.microsoft.com/office/drawing/2014/main" id="{5713F4E9-4D54-09A6-B010-2CC22CD7C6BA}"/>
+              </a:ext>
+            </a:extLst>
+          </p:cNvPr>
+          <p:cNvSpPr>
+            <a:spLocks noGrp="1"/>
+          </p:cNvSpPr>
+          <p:nvPr>
+            <p:ph idx="1"/>
+          </p:nvPr>
+        </p:nvSpPr>
+        <p:spPr/>
+        <p:txBody>
+          <a:bodyPr>
+            <a:normAutofit/>
+          </a:bodyPr>
+          <a:lstStyle/>
+          <a:p>
+            <a:r>
+              <a:rPr lang="en-US" sz="1800"/>
+              <a:t>Start simple — get one trigger and one action working first
+Name your flow clearly and add a short description
+Use realistic test data before going live
+Success = the right output happens automatically, every time
+Bonus: add a notification and an error path</a:t>
+            </a:r>
+          </a:p>
+        </p:txBody>
+      </p:sp>
+    </p:spTree>
+    <p:extLst>
+      <p:ext uri="{BB962C8B-B14F-4D97-AF65-F5344CB8AC3E}">
+        <p14:creationId xmlns:p14="http://schemas.microsoft.com/office/powerpoint/2010/main" val="2881515441"/>
+      </p:ext>
+    </p:extLst>
+  </p:cSld>
+  <p:clrMapOvr>
+    <a:masterClrMapping/>
+  </p:clrMapOvr>
+</p:sld>
+</file>
+
+<file path=ppt/slides/slide85.xml><?xml version="1.0" encoding="utf-8"?>
+<p:sld xmlns:a="http://schemas.openxmlformats.org/drawingml/2006/main" xmlns:r="http://schemas.openxmlformats.org/officeDocument/2006/relationships" xmlns:p="http://schemas.openxmlformats.org/presentationml/2006/main">
+  <p:cSld>
+    <p:spTree>
+      <p:nvGrpSpPr>
+        <p:cNvPr id="1" name=""/>
+        <p:cNvGrpSpPr/>
+        <p:nvPr/>
+      </p:nvGrpSpPr>
+      <p:grpSpPr>
+        <a:xfrm>
+          <a:off x="0" y="0"/>
+          <a:ext cx="0" cy="0"/>
+          <a:chOff x="0" y="0"/>
+          <a:chExt cx="0" cy="0"/>
+        </a:xfrm>
+      </p:grpSpPr>
+      <p:sp>
+        <p:nvSpPr>
+          <p:cNvPr id="2" name="Title 1">
+            <a:extLst>
+              <a:ext uri="{FF2B5EF4-FFF2-40B4-BE49-F238E27FC236}">
+                <a16:creationId xmlns:a16="http://schemas.microsoft.com/office/drawing/2014/main" id="{7F0739FD-1A56-2880-C640-B81C61871D59}"/>
+              </a:ext>
+            </a:extLst>
+          </p:cNvPr>
+          <p:cNvSpPr>
+            <a:spLocks noGrp="1"/>
+          </p:cNvSpPr>
+          <p:nvPr>
+            <p:ph type="title"/>
+          </p:nvPr>
+        </p:nvSpPr>
+        <p:spPr/>
+        <p:txBody>
+          <a:bodyPr/>
+          <a:lstStyle/>
+          <a:p>
+            <a:r>
+              <a:rPr lang="en-US"/>
+              <a:t>Present &amp; Get Feedback</a:t>
+            </a:r>
+          </a:p>
+        </p:txBody>
+      </p:sp>
+      <p:sp>
+        <p:nvSpPr>
+          <p:cNvPr id="3" name="Content Placeholder 2">
+            <a:extLst>
+              <a:ext uri="{FF2B5EF4-FFF2-40B4-BE49-F238E27FC236}">
+                <a16:creationId xmlns:a16="http://schemas.microsoft.com/office/drawing/2014/main" id="{941948D6-A375-C996-8CCE-99FF9226F73C}"/>
+              </a:ext>
+            </a:extLst>
+          </p:cNvPr>
+          <p:cNvSpPr>
+            <a:spLocks noGrp="1"/>
+          </p:cNvSpPr>
+          <p:nvPr>
+            <p:ph idx="1"/>
+          </p:nvPr>
+        </p:nvSpPr>
+        <p:spPr/>
+        <p:txBody>
+          <a:bodyPr>
+            <a:normAutofit/>
+          </a:bodyPr>
+          <a:lstStyle/>
+          <a:p>
+            <a:r>
+              <a:rPr lang="en-US" sz="1800"/>
+              <a:t>Show the business problem you solved
+Walk through the trigger, key actions and output
+Run it live, or show a recent successful run
+Share one thing that was tricky and how you fixed it
+Capture ideas to extend it further</a:t>
+            </a:r>
+          </a:p>
+        </p:txBody>
+      </p:sp>
+    </p:spTree>
+    <p:extLst>
+      <p:ext uri="{BB962C8B-B14F-4D97-AF65-F5344CB8AC3E}">
+        <p14:creationId xmlns:p14="http://schemas.microsoft.com/office/powerpoint/2010/main" val="3815234056"/>
+      </p:ext>
+    </p:extLst>
+  </p:cSld>
+  <p:clrMapOvr>
+    <a:masterClrMapping/>
+  </p:clrMapOvr>
+</p:sld>
+</file>
+
+<file path=ppt/slides/slide86.xml><?xml version="1.0" encoding="utf-8"?>
+<p:sld xmlns:a="http://schemas.openxmlformats.org/drawingml/2006/main" xmlns:r="http://schemas.openxmlformats.org/officeDocument/2006/relationships" xmlns:p="http://schemas.openxmlformats.org/presentationml/2006/main">
+  <p:cSld>
+    <p:spTree>
+      <p:nvGrpSpPr>
+        <p:cNvPr id="1" name=""/>
+        <p:cNvGrpSpPr/>
+        <p:nvPr/>
+      </p:nvGrpSpPr>
+      <p:grpSpPr>
+        <a:xfrm>
+          <a:off x="0" y="0"/>
+          <a:ext cx="0" cy="0"/>
+          <a:chOff x="0" y="0"/>
+          <a:chExt cx="0" cy="0"/>
+        </a:xfrm>
+      </p:grpSpPr>
+      <p:sp>
+        <p:nvSpPr>
+          <p:cNvPr id="2" name="Title 1">
+            <a:extLst>
+              <a:ext uri="{FF2B5EF4-FFF2-40B4-BE49-F238E27FC236}">
+                <a16:creationId xmlns:a16="http://schemas.microsoft.com/office/drawing/2014/main" id="{9A2DF2F9-984B-A755-BAA7-933929938195}"/>
+              </a:ext>
+            </a:extLst>
+          </p:cNvPr>
+          <p:cNvSpPr>
+            <a:spLocks noGrp="1"/>
+          </p:cNvSpPr>
+          <p:nvPr>
+            <p:ph type="title"/>
+          </p:nvPr>
+        </p:nvSpPr>
+        <p:spPr/>
+        <p:txBody>
+          <a:bodyPr/>
+          <a:lstStyle/>
+          <a:p>
+            <a:r>
+              <a:rPr lang="en-US"/>
+              <a:t>What You Can Automate Next</a:t>
+            </a:r>
+          </a:p>
+        </p:txBody>
+      </p:sp>
+      <p:sp>
+        <p:nvSpPr>
+          <p:cNvPr id="3" name="Content Placeholder 2">
+            <a:extLst>
+              <a:ext uri="{FF2B5EF4-FFF2-40B4-BE49-F238E27FC236}">
+                <a16:creationId xmlns:a16="http://schemas.microsoft.com/office/drawing/2014/main" id="{5CCF4860-8303-9DF0-5924-44910D4B4C5F}"/>
+              </a:ext>
+            </a:extLst>
+          </p:cNvPr>
+          <p:cNvSpPr>
+            <a:spLocks noGrp="1"/>
+          </p:cNvSpPr>
+          <p:nvPr>
+            <p:ph idx="1"/>
+          </p:nvPr>
+        </p:nvSpPr>
+        <p:spPr/>
+        <p:txBody>
+          <a:bodyPr>
+            <a:normAutofit/>
+          </a:bodyPr>
+          <a:lstStyle/>
+          <a:p>
+            <a:r>
+              <a:rPr lang="en-US" sz="1800"/>
+              <a:t>Onboarding: new-hire checklists and welcome emails
+Reporting: scheduled data pulls and summaries
+Helpdesk: triage and route incoming requests
+Document handling: filing, approvals and reminders
+Anywhere people copy data or chase approvals by hand</a:t>
+            </a:r>
+          </a:p>
+        </p:txBody>
+      </p:sp>
+    </p:spTree>
+    <p:extLst>
+      <p:ext uri="{BB962C8B-B14F-4D97-AF65-F5344CB8AC3E}">
+        <p14:creationId xmlns:p14="http://schemas.microsoft.com/office/powerpoint/2010/main" val="4057355895"/>
+      </p:ext>
+    </p:extLst>
+  </p:cSld>
+  <p:clrMapOvr>
+    <a:masterClrMapping/>
+  </p:clrMapOvr>
+</p:sld>
+</file>
+
+<file path=ppt/slides/slide87.xml><?xml version="1.0" encoding="utf-8"?>
+<p:sld xmlns:a="http://schemas.openxmlformats.org/drawingml/2006/main" xmlns:r="http://schemas.openxmlformats.org/officeDocument/2006/relationships" xmlns:p="http://schemas.openxmlformats.org/presentationml/2006/main">
+  <p:cSld>
+    <p:spTree>
+      <p:nvGrpSpPr>
+        <p:cNvPr id="1" name=""/>
+        <p:cNvGrpSpPr/>
+        <p:nvPr/>
+      </p:nvGrpSpPr>
+      <p:grpSpPr>
+        <a:xfrm>
+          <a:off x="0" y="0"/>
+          <a:ext cx="0" cy="0"/>
+          <a:chOff x="0" y="0"/>
+          <a:chExt cx="0" cy="0"/>
+        </a:xfrm>
+      </p:grpSpPr>
+      <p:sp>
+        <p:nvSpPr>
+          <p:cNvPr id="2" name="Title 1">
+            <a:extLst>
+              <a:ext uri="{FF2B5EF4-FFF2-40B4-BE49-F238E27FC236}">
+                <a16:creationId xmlns:a16="http://schemas.microsoft.com/office/drawing/2014/main" id="{62449BD2-2DB5-77C8-285D-9067CB1F67DF}"/>
+              </a:ext>
+            </a:extLst>
+          </p:cNvPr>
+          <p:cNvSpPr>
+            <a:spLocks noGrp="1"/>
+          </p:cNvSpPr>
+          <p:nvPr>
+            <p:ph type="title"/>
+          </p:nvPr>
+        </p:nvSpPr>
+        <p:spPr/>
+        <p:txBody>
+          <a:bodyPr/>
+          <a:lstStyle/>
+          <a:p>
+            <a:r>
+              <a:rPr lang="en-US"/>
+              <a:t>Common Pitfalls to Avoid</a:t>
+            </a:r>
+          </a:p>
+        </p:txBody>
+      </p:sp>
+      <p:sp>
+        <p:nvSpPr>
+          <p:cNvPr id="3" name="Content Placeholder 2">
+            <a:extLst>
+              <a:ext uri="{FF2B5EF4-FFF2-40B4-BE49-F238E27FC236}">
+                <a16:creationId xmlns:a16="http://schemas.microsoft.com/office/drawing/2014/main" id="{C26A95F9-E88D-D0F4-A860-1BA06E232A45}"/>
+              </a:ext>
+            </a:extLst>
+          </p:cNvPr>
+          <p:cNvSpPr>
+            <a:spLocks noGrp="1"/>
+          </p:cNvSpPr>
+          <p:nvPr>
+            <p:ph idx="1"/>
+          </p:nvPr>
+        </p:nvSpPr>
+        <p:spPr/>
+        <p:txBody>
+          <a:bodyPr>
+            <a:normAutofit/>
+          </a:bodyPr>
+          <a:lstStyle/>
+          <a:p>
+            <a:r>
+              <a:rPr lang="en-US" sz="1800"/>
+              <a:t>Automating a broken process — fix the process first
+Trying to build everything in one giant flow
+Skipping tests, then surprises in production
+No error handling — failures go unnoticed
+Vague agent prompts that return inconsistent data</a:t>
+            </a:r>
+          </a:p>
+        </p:txBody>
+      </p:sp>
+    </p:spTree>
+    <p:extLst>
+      <p:ext uri="{BB962C8B-B14F-4D97-AF65-F5344CB8AC3E}">
+        <p14:creationId xmlns:p14="http://schemas.microsoft.com/office/powerpoint/2010/main" val="1787957932"/>
+      </p:ext>
+    </p:extLst>
+  </p:cSld>
+  <p:clrMapOvr>
+    <a:masterClrMapping/>
+  </p:clrMapOvr>
+</p:sld>
+</file>
+
+<file path=ppt/slides/slide88.xml><?xml version="1.0" encoding="utf-8"?>
+<p:sld xmlns:a="http://schemas.openxmlformats.org/drawingml/2006/main" xmlns:r="http://schemas.openxmlformats.org/officeDocument/2006/relationships" xmlns:p="http://schemas.openxmlformats.org/presentationml/2006/main">
+  <p:cSld>
+    <p:spTree>
+      <p:nvGrpSpPr>
+        <p:cNvPr id="1" name=""/>
+        <p:cNvGrpSpPr/>
+        <p:nvPr/>
+      </p:nvGrpSpPr>
+      <p:grpSpPr>
+        <a:xfrm>
+          <a:off x="0" y="0"/>
+          <a:ext cx="0" cy="0"/>
+          <a:chOff x="0" y="0"/>
+          <a:chExt cx="0" cy="0"/>
+        </a:xfrm>
+      </p:grpSpPr>
+      <p:sp>
+        <p:nvSpPr>
+          <p:cNvPr id="2" name="Title 1">
+            <a:extLst>
+              <a:ext uri="{FF2B5EF4-FFF2-40B4-BE49-F238E27FC236}">
+                <a16:creationId xmlns:a16="http://schemas.microsoft.com/office/drawing/2014/main" id="{A929970F-766C-166A-5620-4126F34ABFF3}"/>
+              </a:ext>
+            </a:extLst>
+          </p:cNvPr>
+          <p:cNvSpPr>
+            <a:spLocks noGrp="1"/>
+          </p:cNvSpPr>
+          <p:nvPr>
+            <p:ph type="title"/>
+          </p:nvPr>
+        </p:nvSpPr>
+        <p:spPr/>
+        <p:txBody>
+          <a:bodyPr/>
+          <a:lstStyle/>
+          <a:p>
+            <a:r>
+              <a:rPr lang="en-US"/>
+              <a:t>Common Errors &amp; Quick Fixes</a:t>
+            </a:r>
+          </a:p>
+        </p:txBody>
+      </p:sp>
+      <p:sp>
+        <p:nvSpPr>
+          <p:cNvPr id="3" name="Content Placeholder 2">
+            <a:extLst>
+              <a:ext uri="{FF2B5EF4-FFF2-40B4-BE49-F238E27FC236}">
+                <a16:creationId xmlns:a16="http://schemas.microsoft.com/office/drawing/2014/main" id="{98BCE675-06D6-7CA1-31B0-216798C26704}"/>
+              </a:ext>
+            </a:extLst>
+          </p:cNvPr>
+          <p:cNvSpPr>
+            <a:spLocks noGrp="1"/>
+          </p:cNvSpPr>
+          <p:nvPr>
+            <p:ph idx="1"/>
+          </p:nvPr>
+        </p:nvSpPr>
+        <p:spPr/>
+        <p:txBody>
+          <a:bodyPr>
+            <a:normAutofit/>
+          </a:bodyPr>
+          <a:lstStyle/>
+          <a:p>
+            <a:r>
+              <a:rPr lang="en-US" sz="1800"/>
+              <a:t>“Unauthorized” sending email — reconnect Outlook with a mailbox-enabled account
+Approval ‘valid users’ error — pick the approver from the dropdown (a real user in your tenant)
+Date shows literal utcNow() — enter it via the fx / Expression editor so it becomes a token
+Excel cell shows ######## — the column is just too narrow; auto-fit it
+Unwanted ‘For each’, or agent can’t see its flow — use single-value fields; same environment in both tools</a:t>
+            </a:r>
+          </a:p>
+        </p:txBody>
+      </p:sp>
+    </p:spTree>
+    <p:extLst>
+      <p:ext uri="{BB962C8B-B14F-4D97-AF65-F5344CB8AC3E}">
+        <p14:creationId xmlns:p14="http://schemas.microsoft.com/office/powerpoint/2010/main" val="2083644524"/>
+      </p:ext>
+    </p:extLst>
+  </p:cSld>
+  <p:clrMapOvr>
+    <a:masterClrMapping/>
+  </p:clrMapOvr>
+</p:sld>
+</file>
+
+<file path=ppt/slides/slide89.xml><?xml version="1.0" encoding="utf-8"?>
+<p:sld xmlns:a="http://schemas.openxmlformats.org/drawingml/2006/main" xmlns:r="http://schemas.openxmlformats.org/officeDocument/2006/relationships" xmlns:p="http://schemas.openxmlformats.org/presentationml/2006/main">
+  <p:cSld>
+    <p:spTree>
+      <p:nvGrpSpPr>
+        <p:cNvPr id="1" name=""/>
+        <p:cNvGrpSpPr/>
+        <p:nvPr/>
+      </p:nvGrpSpPr>
+      <p:grpSpPr>
+        <a:xfrm>
+          <a:off x="0" y="0"/>
+          <a:ext cx="0" cy="0"/>
+          <a:chOff x="0" y="0"/>
+          <a:chExt cx="0" cy="0"/>
+        </a:xfrm>
+      </p:grpSpPr>
+      <p:sp>
+        <p:nvSpPr>
+          <p:cNvPr id="2" name="Title 1">
+            <a:extLst>
+              <a:ext uri="{FF2B5EF4-FFF2-40B4-BE49-F238E27FC236}">
+                <a16:creationId xmlns:a16="http://schemas.microsoft.com/office/drawing/2014/main" id="{FBB2B063-FE71-8DB0-46FB-13E6AB1CEA40}"/>
+              </a:ext>
+            </a:extLst>
+          </p:cNvPr>
+          <p:cNvSpPr>
+            <a:spLocks noGrp="1"/>
+          </p:cNvSpPr>
+          <p:nvPr>
+            <p:ph type="title"/>
+          </p:nvPr>
+        </p:nvSpPr>
+        <p:spPr/>
+        <p:txBody>
+          <a:bodyPr/>
+          <a:lstStyle/>
+          <a:p>
+            <a:r>
+              <a:rPr lang="en-US"/>
+              <a:t>Governance &amp; Security Basics</a:t>
+            </a:r>
+          </a:p>
+        </p:txBody>
+      </p:sp>
+      <p:sp>
+        <p:nvSpPr>
+          <p:cNvPr id="3" name="Content Placeholder 2">
+            <a:extLst>
+              <a:ext uri="{FF2B5EF4-FFF2-40B4-BE49-F238E27FC236}">
+                <a16:creationId xmlns:a16="http://schemas.microsoft.com/office/drawing/2014/main" id="{45B09298-679E-BC7E-0C15-59E0B78D509B}"/>
+              </a:ext>
+            </a:extLst>
+          </p:cNvPr>
+          <p:cNvSpPr>
+            <a:spLocks noGrp="1"/>
+          </p:cNvSpPr>
+          <p:nvPr>
+            <p:ph idx="1"/>
+          </p:nvPr>
+        </p:nvSpPr>
+        <p:spPr/>
+        <p:txBody>
+          <a:bodyPr>
+            <a:normAutofit/>
+          </a:bodyPr>
+          <a:lstStyle/>
+          <a:p>
+            <a:r>
+              <a:rPr lang="en-US" sz="1800"/>
+              <a:t>Use connections and permissions you're authorised to use
+Keep sensitive data out of emails and logs where possible
+Follow your organisation's data and approval policies
+Document what each flow does and who owns it
+Review and retire flows that are no longer needed</a:t>
+            </a:r>
+          </a:p>
+        </p:txBody>
+      </p:sp>
+    </p:spTree>
+    <p:extLst>
+      <p:ext uri="{BB962C8B-B14F-4D97-AF65-F5344CB8AC3E}">
+        <p14:creationId xmlns:p14="http://schemas.microsoft.com/office/powerpoint/2010/main" val="2262335789"/>
+      </p:ext>
+    </p:extLst>
+  </p:cSld>
+  <p:clrMapOvr>
+    <a:masterClrMapping/>
+  </p:clrMapOvr>
+</p:sld>
+</file>
+
+<file path=ppt/slides/slide9.xml><?xml version="1.0" encoding="utf-8"?>
+<p:sld xmlns:a="http://schemas.openxmlformats.org/drawingml/2006/main" xmlns:r="http://schemas.openxmlformats.org/officeDocument/2006/relationships" xmlns:p="http://schemas.openxmlformats.org/presentationml/2006/main">
+  <p:cSld>
+    <p:spTree>
+      <p:nvGrpSpPr>
+        <p:cNvPr id="1" name=""/>
+        <p:cNvGrpSpPr/>
+        <p:nvPr/>
+      </p:nvGrpSpPr>
+      <p:grpSpPr>
+        <a:xfrm>
+          <a:off x="0" y="0"/>
+          <a:ext cx="0" cy="0"/>
+          <a:chOff x="0" y="0"/>
+          <a:chExt cx="0" cy="0"/>
+        </a:xfrm>
+      </p:grpSpPr>
+      <p:sp>
+        <p:nvSpPr>
+          <p:cNvPr id="2" name="Title 1">
+            <a:extLst>
+              <a:ext uri="{FF2B5EF4-FFF2-40B4-BE49-F238E27FC236}">
+                <a16:creationId xmlns:a16="http://schemas.microsoft.com/office/drawing/2014/main" id="{C2C77996-099F-A63F-A74A-2367E5BDA414}"/>
+              </a:ext>
+            </a:extLst>
+          </p:cNvPr>
+          <p:cNvSpPr>
+            <a:spLocks noGrp="1"/>
+          </p:cNvSpPr>
+          <p:nvPr>
+            <p:ph type="title"/>
+          </p:nvPr>
+        </p:nvSpPr>
+        <p:spPr/>
+        <p:txBody>
+          <a:bodyPr/>
+          <a:lstStyle/>
+          <a:p>
+            <a:r>
+              <a:rPr lang="en-US"/>
+              <a:t>Manual Process vs. Automated Workflow</a:t>
+            </a:r>
+          </a:p>
+        </p:txBody>
+      </p:sp>
+      <p:sp>
+        <p:nvSpPr>
+          <p:cNvPr id="3" name="Content Placeholder 2">
+            <a:extLst>
+              <a:ext uri="{FF2B5EF4-FFF2-40B4-BE49-F238E27FC236}">
+                <a16:creationId xmlns:a16="http://schemas.microsoft.com/office/drawing/2014/main" id="{4454D47B-ECAD-EC96-AB7D-650BD30634F7}"/>
+              </a:ext>
+            </a:extLst>
+          </p:cNvPr>
+          <p:cNvSpPr>
+            <a:spLocks noGrp="1"/>
+          </p:cNvSpPr>
+          <p:nvPr>
+            <p:ph sz="half" idx="1"/>
+          </p:nvPr>
+        </p:nvSpPr>
+        <p:spPr/>
+        <p:txBody>
+          <a:bodyPr>
+            <a:normAutofit/>
+          </a:bodyPr>
+          <a:lstStyle/>
+          <a:p>
+            <a:r>
+              <a:rPr lang="en-US" sz="1600"/>
+              <a:t>MANUAL PROCESS
+Emails get missed in busy inboxes
+Data re-keyed by hand between apps
+Approvals stall and get forgotten
+No audit trail of what happened
+Slow, inconsistent, hard to scale</a:t>
+            </a:r>
+          </a:p>
+        </p:txBody>
+      </p:sp>
+      <p:sp>
+        <p:nvSpPr>
+          <p:cNvPr id="4" name="Content Placeholder 3">
+            <a:extLst>
+              <a:ext uri="{FF2B5EF4-FFF2-40B4-BE49-F238E27FC236}">
+                <a16:creationId xmlns:a16="http://schemas.microsoft.com/office/drawing/2014/main" id="{B5836758-6433-6420-CC9D-069C47E7EDF1}"/>
+              </a:ext>
+            </a:extLst>
+          </p:cNvPr>
+          <p:cNvSpPr>
+            <a:spLocks noGrp="1"/>
+          </p:cNvSpPr>
+          <p:nvPr>
+            <p:ph sz="half" idx="2"/>
+          </p:nvPr>
+        </p:nvSpPr>
+        <p:spPr/>
+        <p:txBody>
+          <a:bodyPr>
+            <a:normAutofit/>
+          </a:bodyPr>
+          <a:lstStyle/>
+          <a:p>
+            <a:r>
+              <a:rPr lang="en-US" sz="1600"/>
+              <a:t>AUTOMATED WORKFLOW
+Triggers fire the moment an event happens
+Data flows automatically between systems
+Approvals routed, tracked and reminded
+Every action logged automatically
+Fast, consistent and scalable</a:t>
+            </a:r>
+          </a:p>
+        </p:txBody>
+      </p:sp>
+    </p:spTree>
+    <p:extLst>
+      <p:ext uri="{BB962C8B-B14F-4D97-AF65-F5344CB8AC3E}">
+        <p14:creationId xmlns:p14="http://schemas.microsoft.com/office/powerpoint/2010/main" val="2049180939"/>
+      </p:ext>
+    </p:extLst>
+  </p:cSld>
+  <p:clrMapOvr>
+    <a:masterClrMapping/>
+  </p:clrMapOvr>
+</p:sld>
+</file>
+
+<file path=ppt/slides/slide90.xml><?xml version="1.0" encoding="utf-8"?>
+<p:sld xmlns:a="http://schemas.openxmlformats.org/drawingml/2006/main" xmlns:r="http://schemas.openxmlformats.org/officeDocument/2006/relationships" xmlns:p="http://schemas.openxmlformats.org/presentationml/2006/main">
+  <p:cSld>
+    <p:spTree>
+      <p:nvGrpSpPr>
+        <p:cNvPr id="1" name=""/>
+        <p:cNvGrpSpPr/>
+        <p:nvPr/>
+      </p:nvGrpSpPr>
+      <p:grpSpPr>
+        <a:xfrm>
+          <a:off x="0" y="0"/>
+          <a:ext cx="0" cy="0"/>
+          <a:chOff x="0" y="0"/>
+          <a:chExt cx="0" cy="0"/>
+        </a:xfrm>
+      </p:grpSpPr>
+      <p:sp>
+        <p:nvSpPr>
+          <p:cNvPr id="2" name="Title 1">
+            <a:extLst>
+              <a:ext uri="{FF2B5EF4-FFF2-40B4-BE49-F238E27FC236}">
+                <a16:creationId xmlns:a16="http://schemas.microsoft.com/office/drawing/2014/main" id="{8359F0DE-8506-42F9-AD61-C1755B9C6456}"/>
+              </a:ext>
+            </a:extLst>
+          </p:cNvPr>
+          <p:cNvSpPr>
+            <a:spLocks noGrp="1"/>
+          </p:cNvSpPr>
+          <p:nvPr>
+            <p:ph type="title"/>
+          </p:nvPr>
+        </p:nvSpPr>
+        <p:spPr/>
+        <p:txBody>
+          <a:bodyPr/>
+          <a:lstStyle/>
+          <a:p>
+            <a:r>
+              <a:rPr lang="en-US"/>
+              <a:t>Rolling This Out at Work</a:t>
+            </a:r>
+          </a:p>
+        </p:txBody>
+      </p:sp>
+      <p:sp>
+        <p:nvSpPr>
+          <p:cNvPr id="3" name="Content Placeholder 2">
+            <a:extLst>
+              <a:ext uri="{FF2B5EF4-FFF2-40B4-BE49-F238E27FC236}">
+                <a16:creationId xmlns:a16="http://schemas.microsoft.com/office/drawing/2014/main" id="{A5D77EA5-6EF6-BB98-A2E2-5494A12ADFAD}"/>
+              </a:ext>
+            </a:extLst>
+          </p:cNvPr>
+          <p:cNvSpPr>
+            <a:spLocks noGrp="1"/>
+          </p:cNvSpPr>
+          <p:nvPr>
+            <p:ph idx="1"/>
+          </p:nvPr>
+        </p:nvSpPr>
+        <p:spPr/>
+        <p:txBody>
+          <a:bodyPr>
+            <a:normAutofit/>
+          </a:bodyPr>
+          <a:lstStyle/>
+          <a:p>
+            <a:r>
+              <a:rPr lang="en-US" sz="1800"/>
+              <a:t>Pick one painful, repetitive task to automate first
+Prove the value, then share the win with your team
+Build a small library of reusable flows and agents
+Involve the people who do the work in the design
+Iterate — improve flows as needs change</a:t>
+            </a:r>
+          </a:p>
+        </p:txBody>
+      </p:sp>
+    </p:spTree>
+    <p:extLst>
+      <p:ext uri="{BB962C8B-B14F-4D97-AF65-F5344CB8AC3E}">
+        <p14:creationId xmlns:p14="http://schemas.microsoft.com/office/powerpoint/2010/main" val="1917962558"/>
+      </p:ext>
+    </p:extLst>
+  </p:cSld>
+  <p:clrMapOvr>
+    <a:masterClrMapping/>
+  </p:clrMapOvr>
+</p:sld>
+</file>
+
+<file path=ppt/slides/slide91.xml><?xml version="1.0" encoding="utf-8"?>
+<p:sld xmlns:a="http://schemas.openxmlformats.org/drawingml/2006/main" xmlns:r="http://schemas.openxmlformats.org/officeDocument/2006/relationships" xmlns:p="http://schemas.openxmlformats.org/presentationml/2006/main">
+  <p:cSld>
+    <p:spTree>
+      <p:nvGrpSpPr>
+        <p:cNvPr id="1" name=""/>
+        <p:cNvGrpSpPr/>
+        <p:nvPr/>
+      </p:nvGrpSpPr>
+      <p:grpSpPr>
+        <a:xfrm>
+          <a:off x="0" y="0"/>
+          <a:ext cx="0" cy="0"/>
+          <a:chOff x="0" y="0"/>
+          <a:chExt cx="0" cy="0"/>
+        </a:xfrm>
+      </p:grpSpPr>
+      <p:sp>
+        <p:nvSpPr>
+          <p:cNvPr id="2" name="Title 1">
+            <a:extLst>
+              <a:ext uri="{FF2B5EF4-FFF2-40B4-BE49-F238E27FC236}">
+                <a16:creationId xmlns:a16="http://schemas.microsoft.com/office/drawing/2014/main" id="{8D14DB8B-0314-C578-F18D-F0C7D5C8B018}"/>
+              </a:ext>
+            </a:extLst>
+          </p:cNvPr>
+          <p:cNvSpPr>
+            <a:spLocks noGrp="1"/>
+          </p:cNvSpPr>
+          <p:nvPr>
+            <p:ph type="title"/>
+          </p:nvPr>
+        </p:nvSpPr>
+        <p:spPr/>
+        <p:txBody>
+          <a:bodyPr/>
+          <a:lstStyle/>
+          <a:p>
+            <a:r>
+              <a:rPr lang="en-US"/>
+              <a:t>Course Recap — The Big Picture</a:t>
+            </a:r>
+          </a:p>
+        </p:txBody>
+      </p:sp>
+      <p:sp>
+        <p:nvSpPr>
+          <p:cNvPr id="3" name="Content Placeholder 2">
+            <a:extLst>
+              <a:ext uri="{FF2B5EF4-FFF2-40B4-BE49-F238E27FC236}">
+                <a16:creationId xmlns:a16="http://schemas.microsoft.com/office/drawing/2014/main" id="{D445FF6A-643A-36F6-288C-4418016B3CB9}"/>
+              </a:ext>
+            </a:extLst>
+          </p:cNvPr>
+          <p:cNvSpPr>
+            <a:spLocks noGrp="1"/>
+          </p:cNvSpPr>
+          <p:nvPr>
+            <p:ph idx="1"/>
+          </p:nvPr>
+        </p:nvSpPr>
+        <p:spPr/>
+        <p:txBody>
+          <a:bodyPr>
+            <a:normAutofit/>
+          </a:bodyPr>
+          <a:lstStyle/>
+          <a:p>
+            <a:r>
+              <a:rPr lang="en-US" sz="1800"/>
+              <a:t>Day 1: automation logic and Power Automate flows
+Day 2: building business agents in Copilot Studio
+Day 3: orchestrating agents + flows end to end
+You built working automations for real scenarios
+You can now design, build and run your own workflows</a:t>
+            </a:r>
+          </a:p>
+        </p:txBody>
+      </p:sp>
+    </p:spTree>
+    <p:extLst>
+      <p:ext uri="{BB962C8B-B14F-4D97-AF65-F5344CB8AC3E}">
+        <p14:creationId xmlns:p14="http://schemas.microsoft.com/office/powerpoint/2010/main" val="2766648414"/>
+      </p:ext>
+    </p:extLst>
+  </p:cSld>
+  <p:clrMapOvr>
+    <a:masterClrMapping/>
+  </p:clrMapOvr>
+</p:sld>
+</file>
+
+<file path=ppt/slides/slide92.xml><?xml version="1.0" encoding="utf-8"?>
+<p:sld xmlns:a="http://schemas.openxmlformats.org/drawingml/2006/main" xmlns:r="http://schemas.openxmlformats.org/officeDocument/2006/relationships" xmlns:p="http://schemas.openxmlformats.org/presentationml/2006/main">
+  <p:cSld>
+    <p:spTree>
+      <p:nvGrpSpPr>
+        <p:cNvPr id="1" name=""/>
+        <p:cNvGrpSpPr/>
+        <p:nvPr/>
+      </p:nvGrpSpPr>
+      <p:grpSpPr>
+        <a:xfrm>
+          <a:off x="0" y="0"/>
+          <a:ext cx="0" cy="0"/>
+          <a:chOff x="0" y="0"/>
+          <a:chExt cx="0" cy="0"/>
+        </a:xfrm>
+      </p:grpSpPr>
+      <p:sp>
+        <p:nvSpPr>
+          <p:cNvPr id="2" name="Title 1">
+            <a:extLst>
+              <a:ext uri="{FF2B5EF4-FFF2-40B4-BE49-F238E27FC236}">
+                <a16:creationId xmlns:a16="http://schemas.microsoft.com/office/drawing/2014/main" id="{329056BF-B5B7-F33E-DEEB-DC95C630F1F1}"/>
+              </a:ext>
+            </a:extLst>
+          </p:cNvPr>
+          <p:cNvSpPr>
+            <a:spLocks noGrp="1"/>
+          </p:cNvSpPr>
+          <p:nvPr>
+            <p:ph type="title"/>
+          </p:nvPr>
+        </p:nvSpPr>
+        <p:spPr/>
+        <p:txBody>
+          <a:bodyPr/>
+          <a:lstStyle/>
+          <a:p>
+            <a:r>
+              <a:rPr lang="en-US"/>
+              <a:t>Key Takeaways</a:t>
+            </a:r>
+          </a:p>
+        </p:txBody>
+      </p:sp>
+      <p:sp>
+        <p:nvSpPr>
+          <p:cNvPr id="3" name="Content Placeholder 2">
+            <a:extLst>
+              <a:ext uri="{FF2B5EF4-FFF2-40B4-BE49-F238E27FC236}">
+                <a16:creationId xmlns:a16="http://schemas.microsoft.com/office/drawing/2014/main" id="{1C9D97EE-B4BF-F57E-5A6F-E19E27A9B88B}"/>
+              </a:ext>
+            </a:extLst>
+          </p:cNvPr>
+          <p:cNvSpPr>
+            <a:spLocks noGrp="1"/>
+          </p:cNvSpPr>
+          <p:nvPr>
+            <p:ph idx="1"/>
+          </p:nvPr>
+        </p:nvSpPr>
+        <p:spPr/>
+        <p:txBody>
+          <a:bodyPr>
+            <a:normAutofit/>
+          </a:bodyPr>
+          <a:lstStyle/>
+          <a:p>
+            <a:r>
+              <a:rPr lang="en-US" sz="1800"/>
+              <a:t>Every workflow is Trigger → Actions → Output
+Power Automate does the work; Copilot Studio adds the intelligence
+Structured agent outputs make flows reliable
+Orchestration turns steps into complete processes
+Start small, test, and improve — then scale</a:t>
+            </a:r>
+          </a:p>
+        </p:txBody>
+      </p:sp>
+    </p:spTree>
+    <p:extLst>
+      <p:ext uri="{BB962C8B-B14F-4D97-AF65-F5344CB8AC3E}">
+        <p14:creationId xmlns:p14="http://schemas.microsoft.com/office/powerpoint/2010/main" val="2343113792"/>
+      </p:ext>
+    </p:extLst>
+  </p:cSld>
+  <p:clrMapOvr>
+    <a:masterClrMapping/>
+  </p:clrMapOvr>
+</p:sld>
+</file>
+
+<file path=ppt/slides/slide93.xml><?xml version="1.0" encoding="utf-8"?>
+<p:sld xmlns:a="http://schemas.openxmlformats.org/drawingml/2006/main" xmlns:r="http://schemas.openxmlformats.org/officeDocument/2006/relationships" xmlns:p="http://schemas.openxmlformats.org/presentationml/2006/main">
+  <p:cSld>
+    <p:spTree>
+      <p:nvGrpSpPr>
+        <p:cNvPr id="1" name=""/>
+        <p:cNvGrpSpPr/>
+        <p:nvPr/>
+      </p:nvGrpSpPr>
+      <p:grpSpPr>
+        <a:xfrm>
+          <a:off x="0" y="0"/>
+          <a:ext cx="0" cy="0"/>
+          <a:chOff x="0" y="0"/>
+          <a:chExt cx="0" cy="0"/>
+        </a:xfrm>
+      </p:grpSpPr>
+      <p:sp>
+        <p:nvSpPr>
+          <p:cNvPr id="2" name="Title 1">
+            <a:extLst>
+              <a:ext uri="{FF2B5EF4-FFF2-40B4-BE49-F238E27FC236}">
+                <a16:creationId xmlns:a16="http://schemas.microsoft.com/office/drawing/2014/main" id="{18849F80-0CCC-1E84-EF12-A7286325895B}"/>
+              </a:ext>
+            </a:extLst>
+          </p:cNvPr>
+          <p:cNvSpPr>
+            <a:spLocks noGrp="1"/>
+          </p:cNvSpPr>
+          <p:nvPr>
+            <p:ph type="title"/>
+          </p:nvPr>
+        </p:nvSpPr>
+        <p:spPr/>
+        <p:txBody>
+          <a:bodyPr/>
+          <a:lstStyle/>
+          <a:p>
+            <a:r>
+              <a:rPr lang="en-US"/>
+              <a:t>Resources &amp; Where to Go Next</a:t>
+            </a:r>
+          </a:p>
+        </p:txBody>
+      </p:sp>
+      <p:sp>
+        <p:nvSpPr>
+          <p:cNvPr id="3" name="Content Placeholder 2">
+            <a:extLst>
+              <a:ext uri="{FF2B5EF4-FFF2-40B4-BE49-F238E27FC236}">
+                <a16:creationId xmlns:a16="http://schemas.microsoft.com/office/drawing/2014/main" id="{60EAC2A6-1F1A-FD31-7E7A-A792B9661E72}"/>
+              </a:ext>
+            </a:extLst>
+          </p:cNvPr>
+          <p:cNvSpPr>
+            <a:spLocks noGrp="1"/>
+          </p:cNvSpPr>
+          <p:nvPr>
+            <p:ph idx="1"/>
+          </p:nvPr>
+        </p:nvSpPr>
+        <p:spPr/>
+        <p:txBody>
+          <a:bodyPr>
+            <a:normAutofit/>
+          </a:bodyPr>
+          <a:lstStyle/>
+          <a:p>
+            <a:r>
+              <a:rPr lang="en-US" sz="1800"/>
+              <a:t>make.powerautomate.com — build and manage your flows
+copilotstudio.microsoft.com — create and publish agents
+Microsoft Learn — free guided learning paths
+Templates gallery — start from pre-built flows
+Your community — share flows and patterns with colleagues</a:t>
+            </a:r>
+          </a:p>
+        </p:txBody>
+      </p:sp>
+    </p:spTree>
+    <p:extLst>
+      <p:ext uri="{BB962C8B-B14F-4D97-AF65-F5344CB8AC3E}">
+        <p14:creationId xmlns:p14="http://schemas.microsoft.com/office/powerpoint/2010/main" val="2032098328"/>
+      </p:ext>
+    </p:extLst>
+  </p:cSld>
+  <p:clrMapOvr>
+    <a:masterClrMapping/>
+  </p:clrMapOvr>
+</p:sld>
+</file>
+
 <file path=ppt/slides/slide94.xml><?xml version="1.0" encoding="utf-8"?>
 <p:sld xmlns:a="http://schemas.openxmlformats.org/drawingml/2006/main" xmlns:r="http://schemas.openxmlformats.org/officeDocument/2006/relationships" xmlns:p="http://schemas.openxmlformats.org/presentationml/2006/main">
   <p:cSld>
@@ -16059,7 +16059,7 @@
           <p:cNvPr id="2" name="Title 1">
             <a:extLst>
               <a:ext uri="{FF2B5EF4-FFF2-40B4-BE49-F238E27FC236}">
-                <a16:creationId xmlns:a16="http://schemas.microsoft.com/office/drawing/2014/main" id="{A929970F-766C-166A-5620-4126F34ABFF3}"/>
+                <a16:creationId xmlns:a16="http://schemas.microsoft.com/office/drawing/2014/main" id="{D23FF29D-2E00-A7A1-232C-5186174A1FA9}"/>
               </a:ext>
             </a:extLst>
           </p:cNvPr>
@@ -16077,25 +16077,25 @@
           <a:p>
             <a:r>
               <a:rPr lang="en-US"/>
-              <a:t>Common Errors &amp; Quick Fixes</a:t>
-            </a:r>
-          </a:p>
-        </p:txBody>
-      </p:sp>
-      <p:sp>
-        <p:nvSpPr>
-          <p:cNvPr id="3" name="Content Placeholder 2">
-            <a:extLst>
-              <a:ext uri="{FF2B5EF4-FFF2-40B4-BE49-F238E27FC236}">
-                <a16:creationId xmlns:a16="http://schemas.microsoft.com/office/drawing/2014/main" id="{98BCE675-06D6-7CA1-31B0-216798C26704}"/>
-              </a:ext>
-            </a:extLst>
-          </p:cNvPr>
-          <p:cNvSpPr>
-            <a:spLocks noGrp="1"/>
-          </p:cNvSpPr>
-          <p:nvPr>
-            <p:ph idx="1"/>
+              <a:t>Thank You</a:t>
+            </a:r>
+          </a:p>
+        </p:txBody>
+      </p:sp>
+      <p:sp>
+        <p:nvSpPr>
+          <p:cNvPr id="3" name="Text Placeholder 2">
+            <a:extLst>
+              <a:ext uri="{FF2B5EF4-FFF2-40B4-BE49-F238E27FC236}">
+                <a16:creationId xmlns:a16="http://schemas.microsoft.com/office/drawing/2014/main" id="{0E5E0239-BFD9-3216-03B0-6B956507258A}"/>
+              </a:ext>
+            </a:extLst>
+          </p:cNvPr>
+          <p:cNvSpPr>
+            <a:spLocks noGrp="1"/>
+          </p:cNvSpPr>
+          <p:nvPr>
+            <p:ph type="body" idx="1"/>
           </p:nvPr>
         </p:nvSpPr>
         <p:spPr/>
@@ -16106,12 +16106,12 @@
           <a:lstStyle/>
           <a:p>
             <a:r>
-              <a:rPr lang="en-US" sz="1800"/>
-              <a:t>“Unauthorized” sending email — reconnect Outlook with a mailbox-enabled account
-Approval ‘valid users’ error — pick the approver from the dropdown (a real user in your tenant)
-Date shows literal utcNow() — enter it via the fx / Expression editor so it becomes a token
-Excel cell shows ######## — the column is just too narrow; auto-fit it
-Unwanted ‘For each’, or agent can’t see its flow — use single-value fields; same environment in both tools</a:t>
+              <a:rPr lang="en-US" sz="1800" b="1">
+                <a:solidFill>
+                  <a:srgbClr val="7C3AED"/>
+                </a:solidFill>
+              </a:rPr>
+              <a:t>Now go automate something — questions welcome</a:t>
             </a:r>
           </a:p>
         </p:txBody>
@@ -16119,7 +16119,7 @@
     </p:spTree>
     <p:extLst>
       <p:ext uri="{BB962C8B-B14F-4D97-AF65-F5344CB8AC3E}">
-        <p14:creationId xmlns:p14="http://schemas.microsoft.com/office/powerpoint/2010/main" val="2083644524"/>
+        <p14:creationId xmlns:p14="http://schemas.microsoft.com/office/powerpoint/2010/main" val="3938712014"/>
       </p:ext>
     </p:extLst>
   </p:cSld>
